--- a/slides/functions-strings-pseudocode-unrevised.pptx
+++ b/slides/functions-strings-pseudocode-unrevised.pptx
@@ -5,7 +5,7 @@
     <p:sldMasterId id="2147483648" r:id="rId1"/>
   </p:sldMasterIdLst>
   <p:notesMasterIdLst>
-    <p:notesMasterId r:id="rId38"/>
+    <p:notesMasterId r:id="rId43"/>
   </p:notesMasterIdLst>
   <p:sldIdLst>
     <p:sldId id="352" r:id="rId2"/>
@@ -26,24 +26,29 @@
     <p:sldId id="412" r:id="rId17"/>
     <p:sldId id="395" r:id="rId18"/>
     <p:sldId id="404" r:id="rId19"/>
-    <p:sldId id="381" r:id="rId20"/>
-    <p:sldId id="434" r:id="rId21"/>
-    <p:sldId id="413" r:id="rId22"/>
-    <p:sldId id="414" r:id="rId23"/>
-    <p:sldId id="415" r:id="rId24"/>
-    <p:sldId id="416" r:id="rId25"/>
-    <p:sldId id="418" r:id="rId26"/>
-    <p:sldId id="419" r:id="rId27"/>
-    <p:sldId id="421" r:id="rId28"/>
-    <p:sldId id="431" r:id="rId29"/>
-    <p:sldId id="432" r:id="rId30"/>
-    <p:sldId id="422" r:id="rId31"/>
-    <p:sldId id="433" r:id="rId32"/>
-    <p:sldId id="423" r:id="rId33"/>
-    <p:sldId id="426" r:id="rId34"/>
-    <p:sldId id="428" r:id="rId35"/>
-    <p:sldId id="429" r:id="rId36"/>
-    <p:sldId id="427" r:id="rId37"/>
+    <p:sldId id="405" r:id="rId20"/>
+    <p:sldId id="398" r:id="rId21"/>
+    <p:sldId id="399" r:id="rId22"/>
+    <p:sldId id="400" r:id="rId23"/>
+    <p:sldId id="401" r:id="rId24"/>
+    <p:sldId id="381" r:id="rId25"/>
+    <p:sldId id="434" r:id="rId26"/>
+    <p:sldId id="413" r:id="rId27"/>
+    <p:sldId id="414" r:id="rId28"/>
+    <p:sldId id="415" r:id="rId29"/>
+    <p:sldId id="416" r:id="rId30"/>
+    <p:sldId id="418" r:id="rId31"/>
+    <p:sldId id="419" r:id="rId32"/>
+    <p:sldId id="421" r:id="rId33"/>
+    <p:sldId id="431" r:id="rId34"/>
+    <p:sldId id="432" r:id="rId35"/>
+    <p:sldId id="422" r:id="rId36"/>
+    <p:sldId id="433" r:id="rId37"/>
+    <p:sldId id="423" r:id="rId38"/>
+    <p:sldId id="426" r:id="rId39"/>
+    <p:sldId id="428" r:id="rId40"/>
+    <p:sldId id="429" r:id="rId41"/>
+    <p:sldId id="427" r:id="rId42"/>
   </p:sldIdLst>
   <p:sldSz cx="12192000" cy="6858000"/>
   <p:notesSz cx="6858000" cy="9144000"/>
@@ -654,7 +659,7 @@
           <a:p>
             <a:fld id="{5BF699C1-B38C-7747-820D-F72651749D5C}" type="slidenum">
               <a:rPr lang="en-US" smtClean="0"/>
-              <a:t>26</a:t>
+              <a:t>25</a:t>
             </a:fld>
             <a:endParaRPr lang="en-US"/>
           </a:p>
@@ -663,7 +668,7 @@
     </p:spTree>
     <p:extLst>
       <p:ext uri="{BB962C8B-B14F-4D97-AF65-F5344CB8AC3E}">
-        <p14:creationId xmlns:p14="http://schemas.microsoft.com/office/powerpoint/2010/main" val="3966689182"/>
+        <p14:creationId xmlns:p14="http://schemas.microsoft.com/office/powerpoint/2010/main" val="2921089565"/>
       </p:ext>
     </p:extLst>
   </p:cSld>
@@ -741,7 +746,7 @@
           <a:p>
             <a:fld id="{5BF699C1-B38C-7747-820D-F72651749D5C}" type="slidenum">
               <a:rPr lang="en-US" smtClean="0"/>
-              <a:t>27</a:t>
+              <a:t>26</a:t>
             </a:fld>
             <a:endParaRPr lang="en-US"/>
           </a:p>
@@ -750,7 +755,7 @@
     </p:spTree>
     <p:extLst>
       <p:ext uri="{BB962C8B-B14F-4D97-AF65-F5344CB8AC3E}">
-        <p14:creationId xmlns:p14="http://schemas.microsoft.com/office/powerpoint/2010/main" val="192605128"/>
+        <p14:creationId xmlns:p14="http://schemas.microsoft.com/office/powerpoint/2010/main" val="3826015102"/>
       </p:ext>
     </p:extLst>
   </p:cSld>
@@ -837,7 +842,7 @@
     </p:spTree>
     <p:extLst>
       <p:ext uri="{BB962C8B-B14F-4D97-AF65-F5344CB8AC3E}">
-        <p14:creationId xmlns:p14="http://schemas.microsoft.com/office/powerpoint/2010/main" val="4242234100"/>
+        <p14:creationId xmlns:p14="http://schemas.microsoft.com/office/powerpoint/2010/main" val="3840297573"/>
       </p:ext>
     </p:extLst>
   </p:cSld>
@@ -924,7 +929,7 @@
     </p:spTree>
     <p:extLst>
       <p:ext uri="{BB962C8B-B14F-4D97-AF65-F5344CB8AC3E}">
-        <p14:creationId xmlns:p14="http://schemas.microsoft.com/office/powerpoint/2010/main" val="1935763922"/>
+        <p14:creationId xmlns:p14="http://schemas.microsoft.com/office/powerpoint/2010/main" val="1006986074"/>
       </p:ext>
     </p:extLst>
   </p:cSld>
@@ -1011,7 +1016,7 @@
     </p:spTree>
     <p:extLst>
       <p:ext uri="{BB962C8B-B14F-4D97-AF65-F5344CB8AC3E}">
-        <p14:creationId xmlns:p14="http://schemas.microsoft.com/office/powerpoint/2010/main" val="1892482306"/>
+        <p14:creationId xmlns:p14="http://schemas.microsoft.com/office/powerpoint/2010/main" val="3213603972"/>
       </p:ext>
     </p:extLst>
   </p:cSld>
@@ -1098,7 +1103,7 @@
     </p:spTree>
     <p:extLst>
       <p:ext uri="{BB962C8B-B14F-4D97-AF65-F5344CB8AC3E}">
-        <p14:creationId xmlns:p14="http://schemas.microsoft.com/office/powerpoint/2010/main" val="1678968859"/>
+        <p14:creationId xmlns:p14="http://schemas.microsoft.com/office/powerpoint/2010/main" val="3966689182"/>
       </p:ext>
     </p:extLst>
   </p:cSld>
@@ -1185,7 +1190,7 @@
     </p:spTree>
     <p:extLst>
       <p:ext uri="{BB962C8B-B14F-4D97-AF65-F5344CB8AC3E}">
-        <p14:creationId xmlns:p14="http://schemas.microsoft.com/office/powerpoint/2010/main" val="3720930949"/>
+        <p14:creationId xmlns:p14="http://schemas.microsoft.com/office/powerpoint/2010/main" val="192605128"/>
       </p:ext>
     </p:extLst>
   </p:cSld>
@@ -1272,7 +1277,7 @@
     </p:spTree>
     <p:extLst>
       <p:ext uri="{BB962C8B-B14F-4D97-AF65-F5344CB8AC3E}">
-        <p14:creationId xmlns:p14="http://schemas.microsoft.com/office/powerpoint/2010/main" val="2127106222"/>
+        <p14:creationId xmlns:p14="http://schemas.microsoft.com/office/powerpoint/2010/main" val="4242234100"/>
       </p:ext>
     </p:extLst>
   </p:cSld>
@@ -1359,7 +1364,7 @@
     </p:spTree>
     <p:extLst>
       <p:ext uri="{BB962C8B-B14F-4D97-AF65-F5344CB8AC3E}">
-        <p14:creationId xmlns:p14="http://schemas.microsoft.com/office/powerpoint/2010/main" val="4179901790"/>
+        <p14:creationId xmlns:p14="http://schemas.microsoft.com/office/powerpoint/2010/main" val="1935763922"/>
       </p:ext>
     </p:extLst>
   </p:cSld>
@@ -1446,7 +1451,7 @@
     </p:spTree>
     <p:extLst>
       <p:ext uri="{BB962C8B-B14F-4D97-AF65-F5344CB8AC3E}">
-        <p14:creationId xmlns:p14="http://schemas.microsoft.com/office/powerpoint/2010/main" val="371953495"/>
+        <p14:creationId xmlns:p14="http://schemas.microsoft.com/office/powerpoint/2010/main" val="1892482306"/>
       </p:ext>
     </p:extLst>
   </p:cSld>
@@ -1620,6 +1625,441 @@
     </p:spTree>
     <p:extLst>
       <p:ext uri="{BB962C8B-B14F-4D97-AF65-F5344CB8AC3E}">
+        <p14:creationId xmlns:p14="http://schemas.microsoft.com/office/powerpoint/2010/main" val="1678968859"/>
+      </p:ext>
+    </p:extLst>
+  </p:cSld>
+  <p:clrMapOvr>
+    <a:masterClrMapping/>
+  </p:clrMapOvr>
+</p:notes>
+</file>
+
+<file path=ppt/notesSlides/notesSlide21.xml><?xml version="1.0" encoding="utf-8"?>
+<p:notes xmlns:a="http://schemas.openxmlformats.org/drawingml/2006/main" xmlns:r="http://schemas.openxmlformats.org/officeDocument/2006/relationships" xmlns:p="http://schemas.openxmlformats.org/presentationml/2006/main">
+  <p:cSld>
+    <p:spTree>
+      <p:nvGrpSpPr>
+        <p:cNvPr id="1" name=""/>
+        <p:cNvGrpSpPr/>
+        <p:nvPr/>
+      </p:nvGrpSpPr>
+      <p:grpSpPr>
+        <a:xfrm>
+          <a:off x="0" y="0"/>
+          <a:ext cx="0" cy="0"/>
+          <a:chOff x="0" y="0"/>
+          <a:chExt cx="0" cy="0"/>
+        </a:xfrm>
+      </p:grpSpPr>
+      <p:sp>
+        <p:nvSpPr>
+          <p:cNvPr id="2" name="Slide Image Placeholder 1"/>
+          <p:cNvSpPr>
+            <a:spLocks noGrp="1" noRot="1" noChangeAspect="1"/>
+          </p:cNvSpPr>
+          <p:nvPr>
+            <p:ph type="sldImg"/>
+          </p:nvPr>
+        </p:nvSpPr>
+        <p:spPr/>
+      </p:sp>
+      <p:sp>
+        <p:nvSpPr>
+          <p:cNvPr id="3" name="Notes Placeholder 2"/>
+          <p:cNvSpPr>
+            <a:spLocks noGrp="1"/>
+          </p:cNvSpPr>
+          <p:nvPr>
+            <p:ph type="body" idx="1"/>
+          </p:nvPr>
+        </p:nvSpPr>
+        <p:spPr/>
+        <p:txBody>
+          <a:bodyPr/>
+          <a:lstStyle/>
+          <a:p>
+            <a:r>
+              <a:rPr lang="en-US" dirty="0"/>
+              <a:t>So here's our first function call</a:t>
+            </a:r>
+          </a:p>
+        </p:txBody>
+      </p:sp>
+      <p:sp>
+        <p:nvSpPr>
+          <p:cNvPr id="4" name="Slide Number Placeholder 3"/>
+          <p:cNvSpPr>
+            <a:spLocks noGrp="1"/>
+          </p:cNvSpPr>
+          <p:nvPr>
+            <p:ph type="sldNum" sz="quarter" idx="5"/>
+          </p:nvPr>
+        </p:nvSpPr>
+        <p:spPr/>
+        <p:txBody>
+          <a:bodyPr/>
+          <a:lstStyle/>
+          <a:p>
+            <a:fld id="{5BF699C1-B38C-7747-820D-F72651749D5C}" type="slidenum">
+              <a:rPr lang="en-US" smtClean="0"/>
+              <a:t>37</a:t>
+            </a:fld>
+            <a:endParaRPr lang="en-US"/>
+          </a:p>
+        </p:txBody>
+      </p:sp>
+    </p:spTree>
+    <p:extLst>
+      <p:ext uri="{BB962C8B-B14F-4D97-AF65-F5344CB8AC3E}">
+        <p14:creationId xmlns:p14="http://schemas.microsoft.com/office/powerpoint/2010/main" val="3720930949"/>
+      </p:ext>
+    </p:extLst>
+  </p:cSld>
+  <p:clrMapOvr>
+    <a:masterClrMapping/>
+  </p:clrMapOvr>
+</p:notes>
+</file>
+
+<file path=ppt/notesSlides/notesSlide22.xml><?xml version="1.0" encoding="utf-8"?>
+<p:notes xmlns:a="http://schemas.openxmlformats.org/drawingml/2006/main" xmlns:r="http://schemas.openxmlformats.org/officeDocument/2006/relationships" xmlns:p="http://schemas.openxmlformats.org/presentationml/2006/main">
+  <p:cSld>
+    <p:spTree>
+      <p:nvGrpSpPr>
+        <p:cNvPr id="1" name=""/>
+        <p:cNvGrpSpPr/>
+        <p:nvPr/>
+      </p:nvGrpSpPr>
+      <p:grpSpPr>
+        <a:xfrm>
+          <a:off x="0" y="0"/>
+          <a:ext cx="0" cy="0"/>
+          <a:chOff x="0" y="0"/>
+          <a:chExt cx="0" cy="0"/>
+        </a:xfrm>
+      </p:grpSpPr>
+      <p:sp>
+        <p:nvSpPr>
+          <p:cNvPr id="2" name="Slide Image Placeholder 1"/>
+          <p:cNvSpPr>
+            <a:spLocks noGrp="1" noRot="1" noChangeAspect="1"/>
+          </p:cNvSpPr>
+          <p:nvPr>
+            <p:ph type="sldImg"/>
+          </p:nvPr>
+        </p:nvSpPr>
+        <p:spPr/>
+      </p:sp>
+      <p:sp>
+        <p:nvSpPr>
+          <p:cNvPr id="3" name="Notes Placeholder 2"/>
+          <p:cNvSpPr>
+            <a:spLocks noGrp="1"/>
+          </p:cNvSpPr>
+          <p:nvPr>
+            <p:ph type="body" idx="1"/>
+          </p:nvPr>
+        </p:nvSpPr>
+        <p:spPr/>
+        <p:txBody>
+          <a:bodyPr/>
+          <a:lstStyle/>
+          <a:p>
+            <a:r>
+              <a:rPr lang="en-US" dirty="0"/>
+              <a:t>So here's our first function call</a:t>
+            </a:r>
+          </a:p>
+        </p:txBody>
+      </p:sp>
+      <p:sp>
+        <p:nvSpPr>
+          <p:cNvPr id="4" name="Slide Number Placeholder 3"/>
+          <p:cNvSpPr>
+            <a:spLocks noGrp="1"/>
+          </p:cNvSpPr>
+          <p:nvPr>
+            <p:ph type="sldNum" sz="quarter" idx="5"/>
+          </p:nvPr>
+        </p:nvSpPr>
+        <p:spPr/>
+        <p:txBody>
+          <a:bodyPr/>
+          <a:lstStyle/>
+          <a:p>
+            <a:fld id="{5BF699C1-B38C-7747-820D-F72651749D5C}" type="slidenum">
+              <a:rPr lang="en-US" smtClean="0"/>
+              <a:t>38</a:t>
+            </a:fld>
+            <a:endParaRPr lang="en-US"/>
+          </a:p>
+        </p:txBody>
+      </p:sp>
+    </p:spTree>
+    <p:extLst>
+      <p:ext uri="{BB962C8B-B14F-4D97-AF65-F5344CB8AC3E}">
+        <p14:creationId xmlns:p14="http://schemas.microsoft.com/office/powerpoint/2010/main" val="2127106222"/>
+      </p:ext>
+    </p:extLst>
+  </p:cSld>
+  <p:clrMapOvr>
+    <a:masterClrMapping/>
+  </p:clrMapOvr>
+</p:notes>
+</file>
+
+<file path=ppt/notesSlides/notesSlide23.xml><?xml version="1.0" encoding="utf-8"?>
+<p:notes xmlns:a="http://schemas.openxmlformats.org/drawingml/2006/main" xmlns:r="http://schemas.openxmlformats.org/officeDocument/2006/relationships" xmlns:p="http://schemas.openxmlformats.org/presentationml/2006/main">
+  <p:cSld>
+    <p:spTree>
+      <p:nvGrpSpPr>
+        <p:cNvPr id="1" name=""/>
+        <p:cNvGrpSpPr/>
+        <p:nvPr/>
+      </p:nvGrpSpPr>
+      <p:grpSpPr>
+        <a:xfrm>
+          <a:off x="0" y="0"/>
+          <a:ext cx="0" cy="0"/>
+          <a:chOff x="0" y="0"/>
+          <a:chExt cx="0" cy="0"/>
+        </a:xfrm>
+      </p:grpSpPr>
+      <p:sp>
+        <p:nvSpPr>
+          <p:cNvPr id="2" name="Slide Image Placeholder 1"/>
+          <p:cNvSpPr>
+            <a:spLocks noGrp="1" noRot="1" noChangeAspect="1"/>
+          </p:cNvSpPr>
+          <p:nvPr>
+            <p:ph type="sldImg"/>
+          </p:nvPr>
+        </p:nvSpPr>
+        <p:spPr/>
+      </p:sp>
+      <p:sp>
+        <p:nvSpPr>
+          <p:cNvPr id="3" name="Notes Placeholder 2"/>
+          <p:cNvSpPr>
+            <a:spLocks noGrp="1"/>
+          </p:cNvSpPr>
+          <p:nvPr>
+            <p:ph type="body" idx="1"/>
+          </p:nvPr>
+        </p:nvSpPr>
+        <p:spPr/>
+        <p:txBody>
+          <a:bodyPr/>
+          <a:lstStyle/>
+          <a:p>
+            <a:r>
+              <a:rPr lang="en-US" dirty="0"/>
+              <a:t>So here's our first function call</a:t>
+            </a:r>
+          </a:p>
+        </p:txBody>
+      </p:sp>
+      <p:sp>
+        <p:nvSpPr>
+          <p:cNvPr id="4" name="Slide Number Placeholder 3"/>
+          <p:cNvSpPr>
+            <a:spLocks noGrp="1"/>
+          </p:cNvSpPr>
+          <p:nvPr>
+            <p:ph type="sldNum" sz="quarter" idx="5"/>
+          </p:nvPr>
+        </p:nvSpPr>
+        <p:spPr/>
+        <p:txBody>
+          <a:bodyPr/>
+          <a:lstStyle/>
+          <a:p>
+            <a:fld id="{5BF699C1-B38C-7747-820D-F72651749D5C}" type="slidenum">
+              <a:rPr lang="en-US" smtClean="0"/>
+              <a:t>39</a:t>
+            </a:fld>
+            <a:endParaRPr lang="en-US"/>
+          </a:p>
+        </p:txBody>
+      </p:sp>
+    </p:spTree>
+    <p:extLst>
+      <p:ext uri="{BB962C8B-B14F-4D97-AF65-F5344CB8AC3E}">
+        <p14:creationId xmlns:p14="http://schemas.microsoft.com/office/powerpoint/2010/main" val="4179901790"/>
+      </p:ext>
+    </p:extLst>
+  </p:cSld>
+  <p:clrMapOvr>
+    <a:masterClrMapping/>
+  </p:clrMapOvr>
+</p:notes>
+</file>
+
+<file path=ppt/notesSlides/notesSlide24.xml><?xml version="1.0" encoding="utf-8"?>
+<p:notes xmlns:a="http://schemas.openxmlformats.org/drawingml/2006/main" xmlns:r="http://schemas.openxmlformats.org/officeDocument/2006/relationships" xmlns:p="http://schemas.openxmlformats.org/presentationml/2006/main">
+  <p:cSld>
+    <p:spTree>
+      <p:nvGrpSpPr>
+        <p:cNvPr id="1" name=""/>
+        <p:cNvGrpSpPr/>
+        <p:nvPr/>
+      </p:nvGrpSpPr>
+      <p:grpSpPr>
+        <a:xfrm>
+          <a:off x="0" y="0"/>
+          <a:ext cx="0" cy="0"/>
+          <a:chOff x="0" y="0"/>
+          <a:chExt cx="0" cy="0"/>
+        </a:xfrm>
+      </p:grpSpPr>
+      <p:sp>
+        <p:nvSpPr>
+          <p:cNvPr id="2" name="Slide Image Placeholder 1"/>
+          <p:cNvSpPr>
+            <a:spLocks noGrp="1" noRot="1" noChangeAspect="1"/>
+          </p:cNvSpPr>
+          <p:nvPr>
+            <p:ph type="sldImg"/>
+          </p:nvPr>
+        </p:nvSpPr>
+        <p:spPr/>
+      </p:sp>
+      <p:sp>
+        <p:nvSpPr>
+          <p:cNvPr id="3" name="Notes Placeholder 2"/>
+          <p:cNvSpPr>
+            <a:spLocks noGrp="1"/>
+          </p:cNvSpPr>
+          <p:nvPr>
+            <p:ph type="body" idx="1"/>
+          </p:nvPr>
+        </p:nvSpPr>
+        <p:spPr/>
+        <p:txBody>
+          <a:bodyPr/>
+          <a:lstStyle/>
+          <a:p>
+            <a:r>
+              <a:rPr lang="en-US" dirty="0"/>
+              <a:t>So here's our first function call</a:t>
+            </a:r>
+          </a:p>
+        </p:txBody>
+      </p:sp>
+      <p:sp>
+        <p:nvSpPr>
+          <p:cNvPr id="4" name="Slide Number Placeholder 3"/>
+          <p:cNvSpPr>
+            <a:spLocks noGrp="1"/>
+          </p:cNvSpPr>
+          <p:nvPr>
+            <p:ph type="sldNum" sz="quarter" idx="5"/>
+          </p:nvPr>
+        </p:nvSpPr>
+        <p:spPr/>
+        <p:txBody>
+          <a:bodyPr/>
+          <a:lstStyle/>
+          <a:p>
+            <a:fld id="{5BF699C1-B38C-7747-820D-F72651749D5C}" type="slidenum">
+              <a:rPr lang="en-US" smtClean="0"/>
+              <a:t>40</a:t>
+            </a:fld>
+            <a:endParaRPr lang="en-US"/>
+          </a:p>
+        </p:txBody>
+      </p:sp>
+    </p:spTree>
+    <p:extLst>
+      <p:ext uri="{BB962C8B-B14F-4D97-AF65-F5344CB8AC3E}">
+        <p14:creationId xmlns:p14="http://schemas.microsoft.com/office/powerpoint/2010/main" val="371953495"/>
+      </p:ext>
+    </p:extLst>
+  </p:cSld>
+  <p:clrMapOvr>
+    <a:masterClrMapping/>
+  </p:clrMapOvr>
+</p:notes>
+</file>
+
+<file path=ppt/notesSlides/notesSlide25.xml><?xml version="1.0" encoding="utf-8"?>
+<p:notes xmlns:a="http://schemas.openxmlformats.org/drawingml/2006/main" xmlns:r="http://schemas.openxmlformats.org/officeDocument/2006/relationships" xmlns:p="http://schemas.openxmlformats.org/presentationml/2006/main">
+  <p:cSld>
+    <p:spTree>
+      <p:nvGrpSpPr>
+        <p:cNvPr id="1" name=""/>
+        <p:cNvGrpSpPr/>
+        <p:nvPr/>
+      </p:nvGrpSpPr>
+      <p:grpSpPr>
+        <a:xfrm>
+          <a:off x="0" y="0"/>
+          <a:ext cx="0" cy="0"/>
+          <a:chOff x="0" y="0"/>
+          <a:chExt cx="0" cy="0"/>
+        </a:xfrm>
+      </p:grpSpPr>
+      <p:sp>
+        <p:nvSpPr>
+          <p:cNvPr id="2" name="Slide Image Placeholder 1"/>
+          <p:cNvSpPr>
+            <a:spLocks noGrp="1" noRot="1" noChangeAspect="1"/>
+          </p:cNvSpPr>
+          <p:nvPr>
+            <p:ph type="sldImg"/>
+          </p:nvPr>
+        </p:nvSpPr>
+        <p:spPr/>
+      </p:sp>
+      <p:sp>
+        <p:nvSpPr>
+          <p:cNvPr id="3" name="Notes Placeholder 2"/>
+          <p:cNvSpPr>
+            <a:spLocks noGrp="1"/>
+          </p:cNvSpPr>
+          <p:nvPr>
+            <p:ph type="body" idx="1"/>
+          </p:nvPr>
+        </p:nvSpPr>
+        <p:spPr/>
+        <p:txBody>
+          <a:bodyPr/>
+          <a:lstStyle/>
+          <a:p>
+            <a:r>
+              <a:rPr lang="en-US" dirty="0"/>
+              <a:t>So here's our first function call</a:t>
+            </a:r>
+          </a:p>
+        </p:txBody>
+      </p:sp>
+      <p:sp>
+        <p:nvSpPr>
+          <p:cNvPr id="4" name="Slide Number Placeholder 3"/>
+          <p:cNvSpPr>
+            <a:spLocks noGrp="1"/>
+          </p:cNvSpPr>
+          <p:nvPr>
+            <p:ph type="sldNum" sz="quarter" idx="5"/>
+          </p:nvPr>
+        </p:nvSpPr>
+        <p:spPr/>
+        <p:txBody>
+          <a:bodyPr/>
+          <a:lstStyle/>
+          <a:p>
+            <a:fld id="{5BF699C1-B38C-7747-820D-F72651749D5C}" type="slidenum">
+              <a:rPr lang="en-US" smtClean="0"/>
+              <a:t>41</a:t>
+            </a:fld>
+            <a:endParaRPr lang="en-US"/>
+          </a:p>
+        </p:txBody>
+      </p:sp>
+    </p:spTree>
+    <p:extLst>
+      <p:ext uri="{BB962C8B-B14F-4D97-AF65-F5344CB8AC3E}">
         <p14:creationId xmlns:p14="http://schemas.microsoft.com/office/powerpoint/2010/main" val="351070841"/>
       </p:ext>
     </p:extLst>
@@ -1794,7 +2234,7 @@
     </p:spTree>
     <p:extLst>
       <p:ext uri="{BB962C8B-B14F-4D97-AF65-F5344CB8AC3E}">
-        <p14:creationId xmlns:p14="http://schemas.microsoft.com/office/powerpoint/2010/main" val="146937185"/>
+        <p14:creationId xmlns:p14="http://schemas.microsoft.com/office/powerpoint/2010/main" val="1594268193"/>
       </p:ext>
     </p:extLst>
   </p:cSld>
@@ -1881,7 +2321,7 @@
     </p:spTree>
     <p:extLst>
       <p:ext uri="{BB962C8B-B14F-4D97-AF65-F5344CB8AC3E}">
-        <p14:creationId xmlns:p14="http://schemas.microsoft.com/office/powerpoint/2010/main" val="2921089565"/>
+        <p14:creationId xmlns:p14="http://schemas.microsoft.com/office/powerpoint/2010/main" val="856728555"/>
       </p:ext>
     </p:extLst>
   </p:cSld>
@@ -1968,7 +2408,7 @@
     </p:spTree>
     <p:extLst>
       <p:ext uri="{BB962C8B-B14F-4D97-AF65-F5344CB8AC3E}">
-        <p14:creationId xmlns:p14="http://schemas.microsoft.com/office/powerpoint/2010/main" val="3826015102"/>
+        <p14:creationId xmlns:p14="http://schemas.microsoft.com/office/powerpoint/2010/main" val="1854052095"/>
       </p:ext>
     </p:extLst>
   </p:cSld>
@@ -2046,7 +2486,7 @@
           <a:p>
             <a:fld id="{5BF699C1-B38C-7747-820D-F72651749D5C}" type="slidenum">
               <a:rPr lang="en-US" smtClean="0"/>
-              <a:t>23</a:t>
+              <a:t>22</a:t>
             </a:fld>
             <a:endParaRPr lang="en-US"/>
           </a:p>
@@ -2055,7 +2495,7 @@
     </p:spTree>
     <p:extLst>
       <p:ext uri="{BB962C8B-B14F-4D97-AF65-F5344CB8AC3E}">
-        <p14:creationId xmlns:p14="http://schemas.microsoft.com/office/powerpoint/2010/main" val="3840297573"/>
+        <p14:creationId xmlns:p14="http://schemas.microsoft.com/office/powerpoint/2010/main" val="1487360076"/>
       </p:ext>
     </p:extLst>
   </p:cSld>
@@ -2133,7 +2573,7 @@
           <a:p>
             <a:fld id="{5BF699C1-B38C-7747-820D-F72651749D5C}" type="slidenum">
               <a:rPr lang="en-US" smtClean="0"/>
-              <a:t>24</a:t>
+              <a:t>23</a:t>
             </a:fld>
             <a:endParaRPr lang="en-US"/>
           </a:p>
@@ -2142,7 +2582,7 @@
     </p:spTree>
     <p:extLst>
       <p:ext uri="{BB962C8B-B14F-4D97-AF65-F5344CB8AC3E}">
-        <p14:creationId xmlns:p14="http://schemas.microsoft.com/office/powerpoint/2010/main" val="1006986074"/>
+        <p14:creationId xmlns:p14="http://schemas.microsoft.com/office/powerpoint/2010/main" val="572122241"/>
       </p:ext>
     </p:extLst>
   </p:cSld>
@@ -2220,7 +2660,7 @@
           <a:p>
             <a:fld id="{5BF699C1-B38C-7747-820D-F72651749D5C}" type="slidenum">
               <a:rPr lang="en-US" smtClean="0"/>
-              <a:t>25</a:t>
+              <a:t>24</a:t>
             </a:fld>
             <a:endParaRPr lang="en-US"/>
           </a:p>
@@ -2229,7 +2669,7 @@
     </p:spTree>
     <p:extLst>
       <p:ext uri="{BB962C8B-B14F-4D97-AF65-F5344CB8AC3E}">
-        <p14:creationId xmlns:p14="http://schemas.microsoft.com/office/powerpoint/2010/main" val="3213603972"/>
+        <p14:creationId xmlns:p14="http://schemas.microsoft.com/office/powerpoint/2010/main" val="146937185"/>
       </p:ext>
     </p:extLst>
   </p:cSld>
@@ -8045,7 +8485,7 @@
         <p:spPr>
           <a:xfrm>
             <a:off x="590309" y="555583"/>
-            <a:ext cx="11514666" cy="1323439"/>
+            <a:ext cx="11514666" cy="1015663"/>
           </a:xfrm>
           <a:prstGeom prst="rect">
             <a:avLst/>
@@ -8059,22 +8499,22 @@
           <a:lstStyle/>
           <a:p>
             <a:r>
-              <a:rPr lang="en-US" sz="8000" dirty="0">
+              <a:rPr lang="en-US" sz="6000" dirty="0">
                 <a:solidFill>
                   <a:srgbClr val="FF0000"/>
                 </a:solidFill>
               </a:rPr>
-              <a:t>IN-CLASS EXERCISE 1 </a:t>
-            </a:r>
-          </a:p>
-        </p:txBody>
-      </p:sp>
-      <p:sp>
-        <p:nvSpPr>
-          <p:cNvPr id="4" name="TextBox 3">
-            <a:extLst>
-              <a:ext uri="{FF2B5EF4-FFF2-40B4-BE49-F238E27FC236}">
-                <a16:creationId xmlns:a16="http://schemas.microsoft.com/office/drawing/2014/main" id="{E35D83AF-0E32-C145-85B6-27C9ECF9D14E}"/>
+              <a:t>PSEUDOCODE EXAMPLE</a:t>
+            </a:r>
+          </a:p>
+        </p:txBody>
+      </p:sp>
+      <p:sp>
+        <p:nvSpPr>
+          <p:cNvPr id="8" name="TextBox 7">
+            <a:extLst>
+              <a:ext uri="{FF2B5EF4-FFF2-40B4-BE49-F238E27FC236}">
+                <a16:creationId xmlns:a16="http://schemas.microsoft.com/office/drawing/2014/main" id="{B1015BC0-ECB4-5342-AF84-263C63834E06}"/>
               </a:ext>
             </a:extLst>
           </p:cNvPr>
@@ -8083,8 +8523,8 @@
         </p:nvSpPr>
         <p:spPr>
           <a:xfrm>
-            <a:off x="590309" y="1879022"/>
-            <a:ext cx="10678886" cy="5262979"/>
+            <a:off x="590309" y="1571246"/>
+            <a:ext cx="10678886" cy="3693319"/>
           </a:xfrm>
           <a:prstGeom prst="rect">
             <a:avLst/>
@@ -8098,73 +8538,95 @@
           <a:lstStyle/>
           <a:p>
             <a:r>
-              <a:rPr lang="en-US" sz="2400" dirty="0">
-                <a:solidFill>
-                  <a:srgbClr val="FF0000"/>
-                </a:solidFill>
-              </a:rPr>
-              <a:t>WRITING PSEUDOCODE</a:t>
-            </a:r>
-          </a:p>
-          <a:p>
-            <a:endParaRPr lang="en-US" sz="2400" dirty="0">
+              <a:rPr lang="en-US" sz="2600" dirty="0">
+                <a:sym typeface="Wingdings" pitchFamily="2" charset="2"/>
+              </a:rPr>
+              <a:t># pseudocode for using the rule of 9s algorithm to determine if a number is a multiple of 9</a:t>
+            </a:r>
+          </a:p>
+          <a:p>
+            <a:endParaRPr lang="en-US" sz="2600" dirty="0">
               <a:sym typeface="Wingdings" pitchFamily="2" charset="2"/>
             </a:endParaRPr>
           </a:p>
           <a:p>
             <a:r>
-              <a:rPr lang="en-US" sz="2400" dirty="0">
-                <a:sym typeface="Wingdings" pitchFamily="2" charset="2"/>
-              </a:rPr>
-              <a:t>Write pseudocode (NOT a full program) to ask the user for a new password. Your pseudocode, if implemented, would have to:</a:t>
-            </a:r>
-          </a:p>
-          <a:p>
-            <a:endParaRPr lang="en-US" sz="2400" dirty="0">
-              <a:sym typeface="Wingdings" pitchFamily="2" charset="2"/>
-            </a:endParaRPr>
-          </a:p>
-          <a:p>
-            <a:r>
-              <a:rPr lang="en-US" sz="2400" dirty="0">
-                <a:sym typeface="Wingdings" pitchFamily="2" charset="2"/>
-              </a:rPr>
-              <a:t>ask the user for a string, ask the user to re-enter the string, verify that the string is at least eight characters long, verify that that string contains at least one number, at least one lowercase letter, at least one piece of punctuation, and at least one uppercase letter.  </a:t>
-            </a:r>
-          </a:p>
-          <a:p>
-            <a:endParaRPr lang="en-US" sz="2400" dirty="0">
-              <a:sym typeface="Wingdings" pitchFamily="2" charset="2"/>
-            </a:endParaRPr>
-          </a:p>
-          <a:p>
-            <a:r>
-              <a:rPr lang="en-US" sz="2400" dirty="0">
-                <a:sym typeface="Wingdings" pitchFamily="2" charset="2"/>
-              </a:rPr>
-              <a:t>Start over if either the two strings don't match, or if the string is too short or doesn't have all the required characters.</a:t>
-            </a:r>
-          </a:p>
-          <a:p>
-            <a:endParaRPr lang="en-US" sz="2400" dirty="0">
-              <a:sym typeface="Wingdings" pitchFamily="2" charset="2"/>
-            </a:endParaRPr>
-          </a:p>
-          <a:p>
-            <a:pPr marL="457200" indent="-457200">
-              <a:buFont typeface="Arial" panose="020B0604020202020204" pitchFamily="34" charset="0"/>
-              <a:buChar char="•"/>
-            </a:pPr>
-            <a:endParaRPr lang="en-US" sz="2400" dirty="0">
-              <a:sym typeface="Wingdings" pitchFamily="2" charset="2"/>
-            </a:endParaRPr>
+              <a:rPr lang="en-US" sz="2600" dirty="0">
+                <a:sym typeface="Wingdings" pitchFamily="2" charset="2"/>
+              </a:rPr>
+              <a:t>while </a:t>
+            </a:r>
+            <a:r>
+              <a:rPr lang="en-US" sz="2600" dirty="0" err="1">
+                <a:sym typeface="Wingdings" pitchFamily="2" charset="2"/>
+              </a:rPr>
+              <a:t>numberOfDigits</a:t>
+            </a:r>
+            <a:r>
+              <a:rPr lang="en-US" sz="2600" dirty="0">
+                <a:sym typeface="Wingdings" pitchFamily="2" charset="2"/>
+              </a:rPr>
+              <a:t> != 1:</a:t>
+            </a:r>
+          </a:p>
+          <a:p>
+            <a:r>
+              <a:rPr lang="en-US" sz="2600" dirty="0">
+                <a:sym typeface="Wingdings" pitchFamily="2" charset="2"/>
+              </a:rPr>
+              <a:t>	number = </a:t>
+            </a:r>
+            <a:r>
+              <a:rPr lang="en-US" sz="2600" dirty="0" err="1">
+                <a:sym typeface="Wingdings" pitchFamily="2" charset="2"/>
+              </a:rPr>
+              <a:t>addDigits</a:t>
+            </a:r>
+            <a:r>
+              <a:rPr lang="en-US" sz="2600" dirty="0">
+                <a:sym typeface="Wingdings" pitchFamily="2" charset="2"/>
+              </a:rPr>
+              <a:t>(number)</a:t>
+            </a:r>
+          </a:p>
+          <a:p>
+            <a:r>
+              <a:rPr lang="en-US" sz="2600" dirty="0">
+                <a:sym typeface="Wingdings" pitchFamily="2" charset="2"/>
+              </a:rPr>
+              <a:t>if number == 9:</a:t>
+            </a:r>
+          </a:p>
+          <a:p>
+            <a:r>
+              <a:rPr lang="en-US" sz="2600" dirty="0">
+                <a:sym typeface="Wingdings" pitchFamily="2" charset="2"/>
+              </a:rPr>
+              <a:t>	success()</a:t>
+            </a:r>
+          </a:p>
+          <a:p>
+            <a:r>
+              <a:rPr lang="en-US" sz="2600" dirty="0">
+                <a:sym typeface="Wingdings" pitchFamily="2" charset="2"/>
+              </a:rPr>
+              <a:t>else:</a:t>
+            </a:r>
+          </a:p>
+          <a:p>
+            <a:r>
+              <a:rPr lang="en-US" sz="2600" dirty="0">
+                <a:sym typeface="Wingdings" pitchFamily="2" charset="2"/>
+              </a:rPr>
+              <a:t>	fail()</a:t>
+            </a:r>
           </a:p>
         </p:txBody>
       </p:sp>
     </p:spTree>
     <p:extLst>
       <p:ext uri="{BB962C8B-B14F-4D97-AF65-F5344CB8AC3E}">
-        <p14:creationId xmlns:p14="http://schemas.microsoft.com/office/powerpoint/2010/main" val="3525675785"/>
+        <p14:creationId xmlns:p14="http://schemas.microsoft.com/office/powerpoint/2010/main" val="2478297755"/>
       </p:ext>
     </p:extLst>
   </p:cSld>
@@ -8320,7 +8782,7 @@
         <p:spPr>
           <a:xfrm>
             <a:off x="590309" y="555583"/>
-            <a:ext cx="11514666" cy="1323439"/>
+            <a:ext cx="11514666" cy="1015663"/>
           </a:xfrm>
           <a:prstGeom prst="rect">
             <a:avLst/>
@@ -8334,22 +8796,22 @@
           <a:lstStyle/>
           <a:p>
             <a:r>
-              <a:rPr lang="en-US" sz="8000" dirty="0">
+              <a:rPr lang="en-US" sz="6000" dirty="0">
                 <a:solidFill>
                   <a:srgbClr val="FF0000"/>
                 </a:solidFill>
               </a:rPr>
-              <a:t>NOTE</a:t>
-            </a:r>
-          </a:p>
-        </p:txBody>
-      </p:sp>
-      <p:sp>
-        <p:nvSpPr>
-          <p:cNvPr id="4" name="TextBox 3">
-            <a:extLst>
-              <a:ext uri="{FF2B5EF4-FFF2-40B4-BE49-F238E27FC236}">
-                <a16:creationId xmlns:a16="http://schemas.microsoft.com/office/drawing/2014/main" id="{E35D83AF-0E32-C145-85B6-27C9ECF9D14E}"/>
+              <a:t>PSEUDOCODE EXAMPLE</a:t>
+            </a:r>
+          </a:p>
+        </p:txBody>
+      </p:sp>
+      <p:sp>
+        <p:nvSpPr>
+          <p:cNvPr id="8" name="TextBox 7">
+            <a:extLst>
+              <a:ext uri="{FF2B5EF4-FFF2-40B4-BE49-F238E27FC236}">
+                <a16:creationId xmlns:a16="http://schemas.microsoft.com/office/drawing/2014/main" id="{B1015BC0-ECB4-5342-AF84-263C63834E06}"/>
               </a:ext>
             </a:extLst>
           </p:cNvPr>
@@ -8358,8 +8820,8 @@
         </p:nvSpPr>
         <p:spPr>
           <a:xfrm>
-            <a:off x="590309" y="1879022"/>
-            <a:ext cx="10678886" cy="2677656"/>
+            <a:off x="590309" y="1571246"/>
+            <a:ext cx="10678886" cy="4093428"/>
           </a:xfrm>
           <a:prstGeom prst="rect">
             <a:avLst/>
@@ -8373,61 +8835,219 @@
           <a:lstStyle/>
           <a:p>
             <a:r>
-              <a:rPr lang="en-US" sz="2400" dirty="0">
-                <a:sym typeface="Wingdings" pitchFamily="2" charset="2"/>
-              </a:rPr>
-              <a:t>how to check for punctuation characters:</a:t>
-            </a:r>
-          </a:p>
-          <a:p>
-            <a:endParaRPr lang="en-US" sz="2400" dirty="0">
+              <a:rPr lang="en-US" sz="2600" dirty="0">
+                <a:sym typeface="Wingdings" pitchFamily="2" charset="2"/>
+              </a:rPr>
+              <a:t># pseudocode for using the rule of 9s algorithm to determine if a number is a multiple of 9</a:t>
+            </a:r>
+          </a:p>
+          <a:p>
+            <a:endParaRPr lang="en-US" sz="2600" dirty="0">
               <a:sym typeface="Wingdings" pitchFamily="2" charset="2"/>
             </a:endParaRPr>
           </a:p>
           <a:p>
             <a:r>
-              <a:rPr lang="en-US" sz="2400" dirty="0">
-                <a:sym typeface="Wingdings" pitchFamily="2" charset="2"/>
-              </a:rPr>
-              <a:t>import string</a:t>
-            </a:r>
-          </a:p>
-          <a:p>
-            <a:endParaRPr lang="en-US" sz="2400" dirty="0">
-              <a:sym typeface="Wingdings" pitchFamily="2" charset="2"/>
-            </a:endParaRPr>
-          </a:p>
-          <a:p>
-            <a:r>
-              <a:rPr lang="en-US" sz="2400" dirty="0" err="1">
-                <a:sym typeface="Wingdings" pitchFamily="2" charset="2"/>
-              </a:rPr>
-              <a:t>string.punctuation</a:t>
-            </a:r>
-            <a:endParaRPr lang="en-US" sz="2400" dirty="0">
-              <a:sym typeface="Wingdings" pitchFamily="2" charset="2"/>
-            </a:endParaRPr>
-          </a:p>
-          <a:p>
-            <a:endParaRPr lang="en-US" sz="2400" dirty="0">
-              <a:sym typeface="Wingdings" pitchFamily="2" charset="2"/>
-            </a:endParaRPr>
-          </a:p>
-          <a:p>
-            <a:pPr marL="457200" indent="-457200">
-              <a:buFont typeface="Arial" panose="020B0604020202020204" pitchFamily="34" charset="0"/>
-              <a:buChar char="•"/>
-            </a:pPr>
-            <a:endParaRPr lang="en-US" sz="2400" dirty="0">
-              <a:sym typeface="Wingdings" pitchFamily="2" charset="2"/>
-            </a:endParaRPr>
+              <a:rPr lang="en-US" sz="2600" dirty="0">
+                <a:sym typeface="Wingdings" pitchFamily="2" charset="2"/>
+              </a:rPr>
+              <a:t>number = </a:t>
+            </a:r>
+            <a:r>
+              <a:rPr lang="en-US" sz="2600" dirty="0" err="1">
+                <a:sym typeface="Wingdings" pitchFamily="2" charset="2"/>
+              </a:rPr>
+              <a:t>getInputFromUser</a:t>
+            </a:r>
+            <a:r>
+              <a:rPr lang="en-US" sz="2600" dirty="0">
+                <a:sym typeface="Wingdings" pitchFamily="2" charset="2"/>
+              </a:rPr>
+              <a:t>()</a:t>
+            </a:r>
+          </a:p>
+          <a:p>
+            <a:r>
+              <a:rPr lang="en-US" sz="2600" dirty="0">
+                <a:sym typeface="Wingdings" pitchFamily="2" charset="2"/>
+              </a:rPr>
+              <a:t>while </a:t>
+            </a:r>
+            <a:r>
+              <a:rPr lang="en-US" sz="2600" dirty="0" err="1">
+                <a:sym typeface="Wingdings" pitchFamily="2" charset="2"/>
+              </a:rPr>
+              <a:t>numberOfDigits</a:t>
+            </a:r>
+            <a:r>
+              <a:rPr lang="en-US" sz="2600" dirty="0">
+                <a:sym typeface="Wingdings" pitchFamily="2" charset="2"/>
+              </a:rPr>
+              <a:t> != 1:</a:t>
+            </a:r>
+          </a:p>
+          <a:p>
+            <a:r>
+              <a:rPr lang="en-US" sz="2600" dirty="0">
+                <a:sym typeface="Wingdings" pitchFamily="2" charset="2"/>
+              </a:rPr>
+              <a:t>	number = </a:t>
+            </a:r>
+            <a:r>
+              <a:rPr lang="en-US" sz="2600" dirty="0" err="1">
+                <a:sym typeface="Wingdings" pitchFamily="2" charset="2"/>
+              </a:rPr>
+              <a:t>addDigits</a:t>
+            </a:r>
+            <a:r>
+              <a:rPr lang="en-US" sz="2600" dirty="0">
+                <a:sym typeface="Wingdings" pitchFamily="2" charset="2"/>
+              </a:rPr>
+              <a:t>(number)</a:t>
+            </a:r>
+          </a:p>
+          <a:p>
+            <a:r>
+              <a:rPr lang="en-US" sz="2600" dirty="0">
+                <a:sym typeface="Wingdings" pitchFamily="2" charset="2"/>
+              </a:rPr>
+              <a:t>if number == 9:</a:t>
+            </a:r>
+          </a:p>
+          <a:p>
+            <a:r>
+              <a:rPr lang="en-US" sz="2600" dirty="0">
+                <a:sym typeface="Wingdings" pitchFamily="2" charset="2"/>
+              </a:rPr>
+              <a:t>	success()</a:t>
+            </a:r>
+          </a:p>
+          <a:p>
+            <a:r>
+              <a:rPr lang="en-US" sz="2600" dirty="0">
+                <a:sym typeface="Wingdings" pitchFamily="2" charset="2"/>
+              </a:rPr>
+              <a:t>else:</a:t>
+            </a:r>
+          </a:p>
+          <a:p>
+            <a:r>
+              <a:rPr lang="en-US" sz="2600" dirty="0">
+                <a:sym typeface="Wingdings" pitchFamily="2" charset="2"/>
+              </a:rPr>
+              <a:t>	fail()</a:t>
+            </a:r>
+          </a:p>
+        </p:txBody>
+      </p:sp>
+      <p:sp>
+        <p:nvSpPr>
+          <p:cNvPr id="4" name="Down Arrow 3">
+            <a:extLst>
+              <a:ext uri="{FF2B5EF4-FFF2-40B4-BE49-F238E27FC236}">
+                <a16:creationId xmlns:a16="http://schemas.microsoft.com/office/drawing/2014/main" id="{F65614A6-B4B6-4344-9D3B-29B143E59EE0}"/>
+              </a:ext>
+            </a:extLst>
+          </p:cNvPr>
+          <p:cNvSpPr/>
+          <p:nvPr/>
+        </p:nvSpPr>
+        <p:spPr>
+          <a:xfrm rot="6353669">
+            <a:off x="6250606" y="3644076"/>
+            <a:ext cx="413145" cy="591933"/>
+          </a:xfrm>
+          <a:prstGeom prst="downArrow">
+            <a:avLst>
+              <a:gd name="adj1" fmla="val 50000"/>
+              <a:gd name="adj2" fmla="val 53426"/>
+            </a:avLst>
+          </a:prstGeom>
+        </p:spPr>
+        <p:style>
+          <a:lnRef idx="2">
+            <a:schemeClr val="accent1">
+              <a:shade val="50000"/>
+            </a:schemeClr>
+          </a:lnRef>
+          <a:fillRef idx="1">
+            <a:schemeClr val="accent1"/>
+          </a:fillRef>
+          <a:effectRef idx="0">
+            <a:schemeClr val="accent1"/>
+          </a:effectRef>
+          <a:fontRef idx="minor">
+            <a:schemeClr val="lt1"/>
+          </a:fontRef>
+        </p:style>
+        <p:txBody>
+          <a:bodyPr rtlCol="0" anchor="ctr"/>
+          <a:lstStyle/>
+          <a:p>
+            <a:pPr algn="ctr"/>
+            <a:endParaRPr lang="en-US"/>
+          </a:p>
+        </p:txBody>
+      </p:sp>
+      <p:sp>
+        <p:nvSpPr>
+          <p:cNvPr id="2" name="TextBox 1">
+            <a:extLst>
+              <a:ext uri="{FF2B5EF4-FFF2-40B4-BE49-F238E27FC236}">
+                <a16:creationId xmlns:a16="http://schemas.microsoft.com/office/drawing/2014/main" id="{D547AD33-8FE1-584E-B510-08C013ACA746}"/>
+              </a:ext>
+            </a:extLst>
+          </p:cNvPr>
+          <p:cNvSpPr txBox="1"/>
+          <p:nvPr/>
+        </p:nvSpPr>
+        <p:spPr>
+          <a:xfrm>
+            <a:off x="8229600" y="3940935"/>
+            <a:ext cx="3545842" cy="923330"/>
+          </a:xfrm>
+          <a:prstGeom prst="rect">
+            <a:avLst/>
+          </a:prstGeom>
+          <a:noFill/>
+        </p:spPr>
+        <p:txBody>
+          <a:bodyPr wrap="none" rtlCol="0">
+            <a:spAutoFit/>
+          </a:bodyPr>
+          <a:lstStyle/>
+          <a:p>
+            <a:r>
+              <a:rPr lang="en-US" dirty="0"/>
+              <a:t>note that this is not working python</a:t>
+            </a:r>
+          </a:p>
+          <a:p>
+            <a:r>
+              <a:rPr lang="en-US" dirty="0"/>
+              <a:t>-- we haven't written the </a:t>
+            </a:r>
+            <a:r>
+              <a:rPr lang="en-US" dirty="0" err="1"/>
+              <a:t>addDigits</a:t>
+            </a:r>
+            <a:r>
+              <a:rPr lang="en-US" dirty="0"/>
+              <a:t> </a:t>
+            </a:r>
+          </a:p>
+          <a:p>
+            <a:r>
+              <a:rPr lang="en-US" dirty="0"/>
+              <a:t>function…</a:t>
+            </a:r>
           </a:p>
         </p:txBody>
       </p:sp>
     </p:spTree>
     <p:extLst>
       <p:ext uri="{BB962C8B-B14F-4D97-AF65-F5344CB8AC3E}">
-        <p14:creationId xmlns:p14="http://schemas.microsoft.com/office/powerpoint/2010/main" val="1676570554"/>
+        <p14:creationId xmlns:p14="http://schemas.microsoft.com/office/powerpoint/2010/main" val="1860240851"/>
       </p:ext>
     </p:extLst>
   </p:cSld>
@@ -8469,7 +9089,7 @@
         <p:spPr>
           <a:xfrm>
             <a:off x="590309" y="555583"/>
-            <a:ext cx="11514666" cy="1938992"/>
+            <a:ext cx="11514666" cy="1015663"/>
           </a:xfrm>
           <a:prstGeom prst="rect">
             <a:avLst/>
@@ -8488,27 +9108,17 @@
                   <a:srgbClr val="FF0000"/>
                 </a:solidFill>
               </a:rPr>
-              <a:t>ONE STRATEGY FOR DECIDING </a:t>
-            </a:r>
-          </a:p>
-          <a:p>
-            <a:r>
-              <a:rPr lang="en-US" sz="6000" dirty="0">
-                <a:solidFill>
-                  <a:srgbClr val="FF0000"/>
-                </a:solidFill>
-              </a:rPr>
-              <a:t>WHICH FUNCTIONS TO WRITE</a:t>
-            </a:r>
-          </a:p>
-        </p:txBody>
-      </p:sp>
-      <p:sp>
-        <p:nvSpPr>
-          <p:cNvPr id="2" name="TextBox 1">
-            <a:extLst>
-              <a:ext uri="{FF2B5EF4-FFF2-40B4-BE49-F238E27FC236}">
-                <a16:creationId xmlns:a16="http://schemas.microsoft.com/office/drawing/2014/main" id="{D547AD33-8FE1-584E-B510-08C013ACA746}"/>
+              <a:t>PSEUDOCODE EXAMPLE</a:t>
+            </a:r>
+          </a:p>
+        </p:txBody>
+      </p:sp>
+      <p:sp>
+        <p:nvSpPr>
+          <p:cNvPr id="8" name="TextBox 7">
+            <a:extLst>
+              <a:ext uri="{FF2B5EF4-FFF2-40B4-BE49-F238E27FC236}">
+                <a16:creationId xmlns:a16="http://schemas.microsoft.com/office/drawing/2014/main" id="{B1015BC0-ECB4-5342-AF84-263C63834E06}"/>
               </a:ext>
             </a:extLst>
           </p:cNvPr>
@@ -8517,8 +9127,8 @@
         </p:nvSpPr>
         <p:spPr>
           <a:xfrm>
-            <a:off x="6078828" y="3063962"/>
-            <a:ext cx="184731" cy="369332"/>
+            <a:off x="590309" y="1571246"/>
+            <a:ext cx="10678886" cy="4093428"/>
           </a:xfrm>
           <a:prstGeom prst="rect">
             <a:avLst/>
@@ -8526,21 +9136,172 @@
           <a:noFill/>
         </p:spPr>
         <p:txBody>
-          <a:bodyPr wrap="none" rtlCol="0">
+          <a:bodyPr wrap="square" rtlCol="0">
             <a:spAutoFit/>
           </a:bodyPr>
           <a:lstStyle/>
           <a:p>
-            <a:endParaRPr lang="en-US" dirty="0"/>
-          </a:p>
-        </p:txBody>
-      </p:sp>
-      <p:sp>
-        <p:nvSpPr>
-          <p:cNvPr id="9" name="TextBox 8">
-            <a:extLst>
-              <a:ext uri="{FF2B5EF4-FFF2-40B4-BE49-F238E27FC236}">
-                <a16:creationId xmlns:a16="http://schemas.microsoft.com/office/drawing/2014/main" id="{1B119A5E-C909-7A43-8310-B5F1C6FCE541}"/>
+            <a:r>
+              <a:rPr lang="en-US" sz="2600" dirty="0">
+                <a:sym typeface="Wingdings" pitchFamily="2" charset="2"/>
+              </a:rPr>
+              <a:t># pseudocode for using the rule of 9s algorithm to determine if a number is a multiple of 9</a:t>
+            </a:r>
+          </a:p>
+          <a:p>
+            <a:endParaRPr lang="en-US" sz="2600" dirty="0">
+              <a:sym typeface="Wingdings" pitchFamily="2" charset="2"/>
+            </a:endParaRPr>
+          </a:p>
+          <a:p>
+            <a:r>
+              <a:rPr lang="en-US" sz="2600" dirty="0">
+                <a:sym typeface="Wingdings" pitchFamily="2" charset="2"/>
+              </a:rPr>
+              <a:t>number = </a:t>
+            </a:r>
+            <a:r>
+              <a:rPr lang="en-US" sz="2600" dirty="0" err="1">
+                <a:sym typeface="Wingdings" pitchFamily="2" charset="2"/>
+              </a:rPr>
+              <a:t>getInputFromUser</a:t>
+            </a:r>
+            <a:r>
+              <a:rPr lang="en-US" sz="2600" dirty="0">
+                <a:sym typeface="Wingdings" pitchFamily="2" charset="2"/>
+              </a:rPr>
+              <a:t>()</a:t>
+            </a:r>
+          </a:p>
+          <a:p>
+            <a:r>
+              <a:rPr lang="en-US" sz="2600" dirty="0">
+                <a:sym typeface="Wingdings" pitchFamily="2" charset="2"/>
+              </a:rPr>
+              <a:t>while </a:t>
+            </a:r>
+            <a:r>
+              <a:rPr lang="en-US" sz="2600" dirty="0" err="1">
+                <a:sym typeface="Wingdings" pitchFamily="2" charset="2"/>
+              </a:rPr>
+              <a:t>numberOfDigits</a:t>
+            </a:r>
+            <a:r>
+              <a:rPr lang="en-US" sz="2600" dirty="0">
+                <a:sym typeface="Wingdings" pitchFamily="2" charset="2"/>
+              </a:rPr>
+              <a:t> != 1:</a:t>
+            </a:r>
+          </a:p>
+          <a:p>
+            <a:r>
+              <a:rPr lang="en-US" sz="2600" dirty="0">
+                <a:sym typeface="Wingdings" pitchFamily="2" charset="2"/>
+              </a:rPr>
+              <a:t>	number = </a:t>
+            </a:r>
+            <a:r>
+              <a:rPr lang="en-US" sz="2600" dirty="0" err="1">
+                <a:sym typeface="Wingdings" pitchFamily="2" charset="2"/>
+              </a:rPr>
+              <a:t>addDigits</a:t>
+            </a:r>
+            <a:r>
+              <a:rPr lang="en-US" sz="2600" dirty="0">
+                <a:sym typeface="Wingdings" pitchFamily="2" charset="2"/>
+              </a:rPr>
+              <a:t>(number)</a:t>
+            </a:r>
+          </a:p>
+          <a:p>
+            <a:r>
+              <a:rPr lang="en-US" sz="2600" dirty="0">
+                <a:sym typeface="Wingdings" pitchFamily="2" charset="2"/>
+              </a:rPr>
+              <a:t>if number == 9:</a:t>
+            </a:r>
+          </a:p>
+          <a:p>
+            <a:r>
+              <a:rPr lang="en-US" sz="2600" dirty="0">
+                <a:sym typeface="Wingdings" pitchFamily="2" charset="2"/>
+              </a:rPr>
+              <a:t>	success()</a:t>
+            </a:r>
+          </a:p>
+          <a:p>
+            <a:r>
+              <a:rPr lang="en-US" sz="2600" dirty="0">
+                <a:sym typeface="Wingdings" pitchFamily="2" charset="2"/>
+              </a:rPr>
+              <a:t>else:</a:t>
+            </a:r>
+          </a:p>
+          <a:p>
+            <a:r>
+              <a:rPr lang="en-US" sz="2600" dirty="0">
+                <a:sym typeface="Wingdings" pitchFamily="2" charset="2"/>
+              </a:rPr>
+              <a:t>	fail()</a:t>
+            </a:r>
+          </a:p>
+        </p:txBody>
+      </p:sp>
+      <p:sp>
+        <p:nvSpPr>
+          <p:cNvPr id="4" name="Down Arrow 3">
+            <a:extLst>
+              <a:ext uri="{FF2B5EF4-FFF2-40B4-BE49-F238E27FC236}">
+                <a16:creationId xmlns:a16="http://schemas.microsoft.com/office/drawing/2014/main" id="{F65614A6-B4B6-4344-9D3B-29B143E59EE0}"/>
+              </a:ext>
+            </a:extLst>
+          </p:cNvPr>
+          <p:cNvSpPr/>
+          <p:nvPr/>
+        </p:nvSpPr>
+        <p:spPr>
+          <a:xfrm rot="6353669">
+            <a:off x="3520932" y="4437879"/>
+            <a:ext cx="413145" cy="591933"/>
+          </a:xfrm>
+          <a:prstGeom prst="downArrow">
+            <a:avLst>
+              <a:gd name="adj1" fmla="val 50000"/>
+              <a:gd name="adj2" fmla="val 53426"/>
+            </a:avLst>
+          </a:prstGeom>
+        </p:spPr>
+        <p:style>
+          <a:lnRef idx="2">
+            <a:schemeClr val="accent1">
+              <a:shade val="50000"/>
+            </a:schemeClr>
+          </a:lnRef>
+          <a:fillRef idx="1">
+            <a:schemeClr val="accent1"/>
+          </a:fillRef>
+          <a:effectRef idx="0">
+            <a:schemeClr val="accent1"/>
+          </a:effectRef>
+          <a:fontRef idx="minor">
+            <a:schemeClr val="lt1"/>
+          </a:fontRef>
+        </p:style>
+        <p:txBody>
+          <a:bodyPr rtlCol="0" anchor="ctr"/>
+          <a:lstStyle/>
+          <a:p>
+            <a:pPr algn="ctr"/>
+            <a:endParaRPr lang="en-US"/>
+          </a:p>
+        </p:txBody>
+      </p:sp>
+      <p:sp>
+        <p:nvSpPr>
+          <p:cNvPr id="2" name="TextBox 1">
+            <a:extLst>
+              <a:ext uri="{FF2B5EF4-FFF2-40B4-BE49-F238E27FC236}">
+                <a16:creationId xmlns:a16="http://schemas.microsoft.com/office/drawing/2014/main" id="{D547AD33-8FE1-584E-B510-08C013ACA746}"/>
               </a:ext>
             </a:extLst>
           </p:cNvPr>
@@ -8549,8 +9310,8 @@
         </p:nvSpPr>
         <p:spPr>
           <a:xfrm>
-            <a:off x="590309" y="2633075"/>
-            <a:ext cx="10678886" cy="2123658"/>
+            <a:off x="4868214" y="4741344"/>
+            <a:ext cx="4623125" cy="369332"/>
           </a:xfrm>
           <a:prstGeom prst="rect">
             <a:avLst/>
@@ -8558,44 +9319,14 @@
           <a:noFill/>
         </p:spPr>
         <p:txBody>
-          <a:bodyPr wrap="square" rtlCol="0">
+          <a:bodyPr wrap="none" rtlCol="0">
             <a:spAutoFit/>
           </a:bodyPr>
           <a:lstStyle/>
           <a:p>
-            <a:pPr marL="457200" indent="-457200">
-              <a:buFont typeface="Arial" panose="020B0604020202020204" pitchFamily="34" charset="0"/>
-              <a:buChar char="•"/>
-            </a:pPr>
-            <a:r>
-              <a:rPr lang="en-US" sz="2200" dirty="0">
-                <a:sym typeface="Wingdings" pitchFamily="2" charset="2"/>
-              </a:rPr>
-              <a:t>Write out your main() function as pseudocode. Include function calls to functions that "magically" do whatever complicated thing you need to do to actually implement the code</a:t>
-            </a:r>
-          </a:p>
-          <a:p>
-            <a:pPr marL="457200" indent="-457200">
-              <a:buFont typeface="Arial" panose="020B0604020202020204" pitchFamily="34" charset="0"/>
-              <a:buChar char="•"/>
-            </a:pPr>
-            <a:r>
-              <a:rPr lang="en-US" sz="2200" dirty="0">
-                <a:sym typeface="Wingdings" pitchFamily="2" charset="2"/>
-              </a:rPr>
-              <a:t>Go back and actually write the functions</a:t>
-            </a:r>
-          </a:p>
-          <a:p>
-            <a:pPr marL="457200" indent="-457200">
-              <a:buFont typeface="Arial" panose="020B0604020202020204" pitchFamily="34" charset="0"/>
-              <a:buChar char="•"/>
-            </a:pPr>
-            <a:r>
-              <a:rPr lang="en-US" sz="2200" dirty="0">
-                <a:sym typeface="Wingdings" pitchFamily="2" charset="2"/>
-              </a:rPr>
-              <a:t>This is called "top-down design" – it's a good way to make sure your code is clean and readable</a:t>
+            <a:r>
+              <a:rPr lang="en-US" dirty="0"/>
+              <a:t>we haven't defined the success or fail functions</a:t>
             </a:r>
           </a:p>
         </p:txBody>
@@ -8603,7 +9334,7 @@
     </p:spTree>
     <p:extLst>
       <p:ext uri="{BB962C8B-B14F-4D97-AF65-F5344CB8AC3E}">
-        <p14:creationId xmlns:p14="http://schemas.microsoft.com/office/powerpoint/2010/main" val="3874932687"/>
+        <p14:creationId xmlns:p14="http://schemas.microsoft.com/office/powerpoint/2010/main" val="1602653628"/>
       </p:ext>
     </p:extLst>
   </p:cSld>
@@ -8632,10 +9363,10 @@
       </p:grpSpPr>
       <p:sp>
         <p:nvSpPr>
-          <p:cNvPr id="4" name="TextBox 3">
-            <a:extLst>
-              <a:ext uri="{FF2B5EF4-FFF2-40B4-BE49-F238E27FC236}">
-                <a16:creationId xmlns:a16="http://schemas.microsoft.com/office/drawing/2014/main" id="{5D4AF37B-C0FC-3743-A0E4-AAB61E028799}"/>
+          <p:cNvPr id="3" name="TextBox 2">
+            <a:extLst>
+              <a:ext uri="{FF2B5EF4-FFF2-40B4-BE49-F238E27FC236}">
+                <a16:creationId xmlns:a16="http://schemas.microsoft.com/office/drawing/2014/main" id="{E42D67C2-3010-0B46-A3B3-EDDCD41D3FBD}"/>
               </a:ext>
             </a:extLst>
           </p:cNvPr>
@@ -8645,7 +9376,7 @@
         <p:spPr>
           <a:xfrm>
             <a:off x="590309" y="555583"/>
-            <a:ext cx="2132315" cy="3170099"/>
+            <a:ext cx="11514666" cy="1015663"/>
           </a:xfrm>
           <a:prstGeom prst="rect">
             <a:avLst/>
@@ -8653,24 +9384,28 @@
           <a:noFill/>
         </p:spPr>
         <p:txBody>
-          <a:bodyPr wrap="none" rtlCol="0">
+          <a:bodyPr wrap="square" rtlCol="0">
             <a:spAutoFit/>
           </a:bodyPr>
           <a:lstStyle/>
           <a:p>
             <a:r>
-              <a:rPr lang="en-US" sz="20000" dirty="0"/>
-              <a:t>2.</a:t>
-            </a:r>
-          </a:p>
-        </p:txBody>
-      </p:sp>
-      <p:sp>
-        <p:nvSpPr>
-          <p:cNvPr id="3" name="TextBox 2">
-            <a:extLst>
-              <a:ext uri="{FF2B5EF4-FFF2-40B4-BE49-F238E27FC236}">
-                <a16:creationId xmlns:a16="http://schemas.microsoft.com/office/drawing/2014/main" id="{E42D67C2-3010-0B46-A3B3-EDDCD41D3FBD}"/>
+              <a:rPr lang="en-US" sz="6000" dirty="0">
+                <a:solidFill>
+                  <a:srgbClr val="FF0000"/>
+                </a:solidFill>
+              </a:rPr>
+              <a:t>PSEUDOCODE EXAMPLE</a:t>
+            </a:r>
+          </a:p>
+        </p:txBody>
+      </p:sp>
+      <p:sp>
+        <p:nvSpPr>
+          <p:cNvPr id="8" name="TextBox 7">
+            <a:extLst>
+              <a:ext uri="{FF2B5EF4-FFF2-40B4-BE49-F238E27FC236}">
+                <a16:creationId xmlns:a16="http://schemas.microsoft.com/office/drawing/2014/main" id="{B1015BC0-ECB4-5342-AF84-263C63834E06}"/>
               </a:ext>
             </a:extLst>
           </p:cNvPr>
@@ -8679,8 +9414,8 @@
         </p:nvSpPr>
         <p:spPr>
           <a:xfrm>
-            <a:off x="2546667" y="1288033"/>
-            <a:ext cx="9294917" cy="3477875"/>
+            <a:off x="590309" y="1571246"/>
+            <a:ext cx="10678886" cy="4093428"/>
           </a:xfrm>
           <a:prstGeom prst="rect">
             <a:avLst/>
@@ -8688,28 +9423,197 @@
           <a:noFill/>
         </p:spPr>
         <p:txBody>
+          <a:bodyPr wrap="square" rtlCol="0">
+            <a:spAutoFit/>
+          </a:bodyPr>
+          <a:lstStyle/>
+          <a:p>
+            <a:r>
+              <a:rPr lang="en-US" sz="2600" dirty="0">
+                <a:sym typeface="Wingdings" pitchFamily="2" charset="2"/>
+              </a:rPr>
+              <a:t># pseudocode for using the rule of 9s algorithm to determine if a number is a multiple of 9</a:t>
+            </a:r>
+          </a:p>
+          <a:p>
+            <a:endParaRPr lang="en-US" sz="2600" dirty="0">
+              <a:sym typeface="Wingdings" pitchFamily="2" charset="2"/>
+            </a:endParaRPr>
+          </a:p>
+          <a:p>
+            <a:r>
+              <a:rPr lang="en-US" sz="2600" dirty="0">
+                <a:sym typeface="Wingdings" pitchFamily="2" charset="2"/>
+              </a:rPr>
+              <a:t>number = </a:t>
+            </a:r>
+            <a:r>
+              <a:rPr lang="en-US" sz="2600" dirty="0" err="1">
+                <a:sym typeface="Wingdings" pitchFamily="2" charset="2"/>
+              </a:rPr>
+              <a:t>getInputFromUser</a:t>
+            </a:r>
+            <a:r>
+              <a:rPr lang="en-US" sz="2600" dirty="0">
+                <a:sym typeface="Wingdings" pitchFamily="2" charset="2"/>
+              </a:rPr>
+              <a:t>()</a:t>
+            </a:r>
+          </a:p>
+          <a:p>
+            <a:r>
+              <a:rPr lang="en-US" sz="2600" dirty="0">
+                <a:sym typeface="Wingdings" pitchFamily="2" charset="2"/>
+              </a:rPr>
+              <a:t>while </a:t>
+            </a:r>
+            <a:r>
+              <a:rPr lang="en-US" sz="2600" dirty="0" err="1">
+                <a:sym typeface="Wingdings" pitchFamily="2" charset="2"/>
+              </a:rPr>
+              <a:t>numberOfDigits</a:t>
+            </a:r>
+            <a:r>
+              <a:rPr lang="en-US" sz="2600" dirty="0">
+                <a:sym typeface="Wingdings" pitchFamily="2" charset="2"/>
+              </a:rPr>
+              <a:t> != 1:</a:t>
+            </a:r>
+          </a:p>
+          <a:p>
+            <a:r>
+              <a:rPr lang="en-US" sz="2600" dirty="0">
+                <a:sym typeface="Wingdings" pitchFamily="2" charset="2"/>
+              </a:rPr>
+              <a:t>	number = </a:t>
+            </a:r>
+            <a:r>
+              <a:rPr lang="en-US" sz="2600" dirty="0" err="1">
+                <a:sym typeface="Wingdings" pitchFamily="2" charset="2"/>
+              </a:rPr>
+              <a:t>addDigits</a:t>
+            </a:r>
+            <a:r>
+              <a:rPr lang="en-US" sz="2600" dirty="0">
+                <a:sym typeface="Wingdings" pitchFamily="2" charset="2"/>
+              </a:rPr>
+              <a:t>(number)</a:t>
+            </a:r>
+          </a:p>
+          <a:p>
+            <a:r>
+              <a:rPr lang="en-US" sz="2600" dirty="0">
+                <a:sym typeface="Wingdings" pitchFamily="2" charset="2"/>
+              </a:rPr>
+              <a:t>if number == 9:</a:t>
+            </a:r>
+          </a:p>
+          <a:p>
+            <a:r>
+              <a:rPr lang="en-US" sz="2600" dirty="0">
+                <a:sym typeface="Wingdings" pitchFamily="2" charset="2"/>
+              </a:rPr>
+              <a:t>	success()</a:t>
+            </a:r>
+          </a:p>
+          <a:p>
+            <a:r>
+              <a:rPr lang="en-US" sz="2600" dirty="0">
+                <a:sym typeface="Wingdings" pitchFamily="2" charset="2"/>
+              </a:rPr>
+              <a:t>else:</a:t>
+            </a:r>
+          </a:p>
+          <a:p>
+            <a:r>
+              <a:rPr lang="en-US" sz="2600" dirty="0">
+                <a:sym typeface="Wingdings" pitchFamily="2" charset="2"/>
+              </a:rPr>
+              <a:t>	fail()</a:t>
+            </a:r>
+          </a:p>
+        </p:txBody>
+      </p:sp>
+      <p:sp>
+        <p:nvSpPr>
+          <p:cNvPr id="4" name="Down Arrow 3">
+            <a:extLst>
+              <a:ext uri="{FF2B5EF4-FFF2-40B4-BE49-F238E27FC236}">
+                <a16:creationId xmlns:a16="http://schemas.microsoft.com/office/drawing/2014/main" id="{F65614A6-B4B6-4344-9D3B-29B143E59EE0}"/>
+              </a:ext>
+            </a:extLst>
+          </p:cNvPr>
+          <p:cNvSpPr/>
+          <p:nvPr/>
+        </p:nvSpPr>
+        <p:spPr>
+          <a:xfrm rot="6353669">
+            <a:off x="5285338" y="2762534"/>
+            <a:ext cx="413145" cy="591933"/>
+          </a:xfrm>
+          <a:prstGeom prst="downArrow">
+            <a:avLst>
+              <a:gd name="adj1" fmla="val 50000"/>
+              <a:gd name="adj2" fmla="val 53426"/>
+            </a:avLst>
+          </a:prstGeom>
+        </p:spPr>
+        <p:style>
+          <a:lnRef idx="2">
+            <a:schemeClr val="accent1">
+              <a:shade val="50000"/>
+            </a:schemeClr>
+          </a:lnRef>
+          <a:fillRef idx="1">
+            <a:schemeClr val="accent1"/>
+          </a:fillRef>
+          <a:effectRef idx="0">
+            <a:schemeClr val="accent1"/>
+          </a:effectRef>
+          <a:fontRef idx="minor">
+            <a:schemeClr val="lt1"/>
+          </a:fontRef>
+        </p:style>
+        <p:txBody>
+          <a:bodyPr rtlCol="0" anchor="ctr"/>
+          <a:lstStyle/>
+          <a:p>
+            <a:pPr algn="ctr"/>
+            <a:endParaRPr lang="en-US"/>
+          </a:p>
+        </p:txBody>
+      </p:sp>
+      <p:sp>
+        <p:nvSpPr>
+          <p:cNvPr id="2" name="TextBox 1">
+            <a:extLst>
+              <a:ext uri="{FF2B5EF4-FFF2-40B4-BE49-F238E27FC236}">
+                <a16:creationId xmlns:a16="http://schemas.microsoft.com/office/drawing/2014/main" id="{D547AD33-8FE1-584E-B510-08C013ACA746}"/>
+              </a:ext>
+            </a:extLst>
+          </p:cNvPr>
+          <p:cNvSpPr txBox="1"/>
+          <p:nvPr/>
+        </p:nvSpPr>
+        <p:spPr>
+          <a:xfrm>
+            <a:off x="6078828" y="3063962"/>
+            <a:ext cx="3796745" cy="369332"/>
+          </a:xfrm>
+          <a:prstGeom prst="rect">
+            <a:avLst/>
+          </a:prstGeom>
+          <a:noFill/>
+        </p:spPr>
+        <p:txBody>
           <a:bodyPr wrap="none" rtlCol="0">
             <a:spAutoFit/>
           </a:bodyPr>
           <a:lstStyle/>
           <a:p>
             <a:r>
-              <a:rPr lang="en-US" sz="11000" dirty="0">
-                <a:solidFill>
-                  <a:srgbClr val="FF0000"/>
-                </a:solidFill>
-              </a:rPr>
-              <a:t>STRING</a:t>
-            </a:r>
-          </a:p>
-          <a:p>
-            <a:r>
-              <a:rPr lang="en-US" sz="11000" dirty="0">
-                <a:solidFill>
-                  <a:srgbClr val="FF0000"/>
-                </a:solidFill>
-              </a:rPr>
-              <a:t>MANIPULATION</a:t>
+              <a:rPr lang="en-US" dirty="0"/>
+              <a:t>we haven't written this function either</a:t>
             </a:r>
           </a:p>
         </p:txBody>
@@ -8717,7 +9621,7 @@
     </p:spTree>
     <p:extLst>
       <p:ext uri="{BB962C8B-B14F-4D97-AF65-F5344CB8AC3E}">
-        <p14:creationId xmlns:p14="http://schemas.microsoft.com/office/powerpoint/2010/main" val="1380732152"/>
+        <p14:creationId xmlns:p14="http://schemas.microsoft.com/office/powerpoint/2010/main" val="2572682038"/>
       </p:ext>
     </p:extLst>
   </p:cSld>
@@ -8778,17 +9682,17 @@
                   <a:srgbClr val="FF0000"/>
                 </a:solidFill>
               </a:rPr>
-              <a:t>STRING METHODS</a:t>
-            </a:r>
-          </a:p>
-        </p:txBody>
-      </p:sp>
-      <p:sp>
-        <p:nvSpPr>
-          <p:cNvPr id="2" name="TextBox 1">
-            <a:extLst>
-              <a:ext uri="{FF2B5EF4-FFF2-40B4-BE49-F238E27FC236}">
-                <a16:creationId xmlns:a16="http://schemas.microsoft.com/office/drawing/2014/main" id="{D547AD33-8FE1-584E-B510-08C013ACA746}"/>
+              <a:t>PSEUDOCODE EXAMPLE</a:t>
+            </a:r>
+          </a:p>
+        </p:txBody>
+      </p:sp>
+      <p:sp>
+        <p:nvSpPr>
+          <p:cNvPr id="8" name="TextBox 7">
+            <a:extLst>
+              <a:ext uri="{FF2B5EF4-FFF2-40B4-BE49-F238E27FC236}">
+                <a16:creationId xmlns:a16="http://schemas.microsoft.com/office/drawing/2014/main" id="{B1015BC0-ECB4-5342-AF84-263C63834E06}"/>
               </a:ext>
             </a:extLst>
           </p:cNvPr>
@@ -8797,8 +9701,8 @@
         </p:nvSpPr>
         <p:spPr>
           <a:xfrm>
-            <a:off x="6078828" y="3063962"/>
-            <a:ext cx="184731" cy="369332"/>
+            <a:off x="590309" y="1571246"/>
+            <a:ext cx="10678886" cy="4093428"/>
           </a:xfrm>
           <a:prstGeom prst="rect">
             <a:avLst/>
@@ -8806,21 +9710,123 @@
           <a:noFill/>
         </p:spPr>
         <p:txBody>
-          <a:bodyPr wrap="none" rtlCol="0">
+          <a:bodyPr wrap="square" rtlCol="0">
             <a:spAutoFit/>
           </a:bodyPr>
           <a:lstStyle/>
           <a:p>
-            <a:endParaRPr lang="en-US" dirty="0"/>
-          </a:p>
-        </p:txBody>
-      </p:sp>
-      <p:sp>
-        <p:nvSpPr>
-          <p:cNvPr id="9" name="TextBox 8">
-            <a:extLst>
-              <a:ext uri="{FF2B5EF4-FFF2-40B4-BE49-F238E27FC236}">
-                <a16:creationId xmlns:a16="http://schemas.microsoft.com/office/drawing/2014/main" id="{1B119A5E-C909-7A43-8310-B5F1C6FCE541}"/>
+            <a:r>
+              <a:rPr lang="en-US" sz="2600" dirty="0">
+                <a:sym typeface="Wingdings" pitchFamily="2" charset="2"/>
+              </a:rPr>
+              <a:t># pseudocode for using the rule of 9s algorithm to determine if a number is a multiple of 9</a:t>
+            </a:r>
+          </a:p>
+          <a:p>
+            <a:endParaRPr lang="en-US" sz="2600" dirty="0">
+              <a:sym typeface="Wingdings" pitchFamily="2" charset="2"/>
+            </a:endParaRPr>
+          </a:p>
+          <a:p>
+            <a:r>
+              <a:rPr lang="en-US" sz="2600" dirty="0">
+                <a:sym typeface="Wingdings" pitchFamily="2" charset="2"/>
+              </a:rPr>
+              <a:t>number = </a:t>
+            </a:r>
+            <a:r>
+              <a:rPr lang="en-US" sz="2600" dirty="0" err="1">
+                <a:sym typeface="Wingdings" pitchFamily="2" charset="2"/>
+              </a:rPr>
+              <a:t>getInputFromUser</a:t>
+            </a:r>
+            <a:r>
+              <a:rPr lang="en-US" sz="2600" dirty="0">
+                <a:sym typeface="Wingdings" pitchFamily="2" charset="2"/>
+              </a:rPr>
+              <a:t>()</a:t>
+            </a:r>
+          </a:p>
+          <a:p>
+            <a:r>
+              <a:rPr lang="en-US" sz="2600" dirty="0">
+                <a:sym typeface="Wingdings" pitchFamily="2" charset="2"/>
+              </a:rPr>
+              <a:t>while </a:t>
+            </a:r>
+            <a:r>
+              <a:rPr lang="en-US" sz="2600" dirty="0" err="1">
+                <a:sym typeface="Wingdings" pitchFamily="2" charset="2"/>
+              </a:rPr>
+              <a:t>numberOfDigits</a:t>
+            </a:r>
+            <a:r>
+              <a:rPr lang="en-US" sz="2600" dirty="0">
+                <a:sym typeface="Wingdings" pitchFamily="2" charset="2"/>
+              </a:rPr>
+              <a:t> != 1:</a:t>
+            </a:r>
+          </a:p>
+          <a:p>
+            <a:r>
+              <a:rPr lang="en-US" sz="2600" dirty="0">
+                <a:sym typeface="Wingdings" pitchFamily="2" charset="2"/>
+              </a:rPr>
+              <a:t>	number = </a:t>
+            </a:r>
+            <a:r>
+              <a:rPr lang="en-US" sz="2600" dirty="0" err="1">
+                <a:sym typeface="Wingdings" pitchFamily="2" charset="2"/>
+              </a:rPr>
+              <a:t>addDigits</a:t>
+            </a:r>
+            <a:r>
+              <a:rPr lang="en-US" sz="2600" dirty="0">
+                <a:sym typeface="Wingdings" pitchFamily="2" charset="2"/>
+              </a:rPr>
+              <a:t>(number)</a:t>
+            </a:r>
+          </a:p>
+          <a:p>
+            <a:r>
+              <a:rPr lang="en-US" sz="2600" dirty="0">
+                <a:sym typeface="Wingdings" pitchFamily="2" charset="2"/>
+              </a:rPr>
+              <a:t>if number == 9:</a:t>
+            </a:r>
+          </a:p>
+          <a:p>
+            <a:r>
+              <a:rPr lang="en-US" sz="2600" dirty="0">
+                <a:sym typeface="Wingdings" pitchFamily="2" charset="2"/>
+              </a:rPr>
+              <a:t>	success()</a:t>
+            </a:r>
+          </a:p>
+          <a:p>
+            <a:r>
+              <a:rPr lang="en-US" sz="2600" dirty="0">
+                <a:sym typeface="Wingdings" pitchFamily="2" charset="2"/>
+              </a:rPr>
+              <a:t>else:</a:t>
+            </a:r>
+          </a:p>
+          <a:p>
+            <a:r>
+              <a:rPr lang="en-US" sz="2600" dirty="0">
+                <a:sym typeface="Wingdings" pitchFamily="2" charset="2"/>
+              </a:rPr>
+              <a:t>	fail()</a:t>
+            </a:r>
+          </a:p>
+        </p:txBody>
+      </p:sp>
+      <p:sp>
+        <p:nvSpPr>
+          <p:cNvPr id="5" name="TextBox 4">
+            <a:extLst>
+              <a:ext uri="{FF2B5EF4-FFF2-40B4-BE49-F238E27FC236}">
+                <a16:creationId xmlns:a16="http://schemas.microsoft.com/office/drawing/2014/main" id="{4906CE92-B6E5-D440-A33D-2BF5480DE601}"/>
               </a:ext>
             </a:extLst>
           </p:cNvPr>
@@ -8829,8 +9835,8 @@
         </p:nvSpPr>
         <p:spPr>
           <a:xfrm>
-            <a:off x="590309" y="1422461"/>
-            <a:ext cx="11837804" cy="4154984"/>
+            <a:off x="6480768" y="3063962"/>
+            <a:ext cx="4788427" cy="646331"/>
           </a:xfrm>
           <a:prstGeom prst="rect">
             <a:avLst/>
@@ -8838,191 +9844,28 @@
           <a:noFill/>
         </p:spPr>
         <p:txBody>
-          <a:bodyPr wrap="square" rtlCol="0">
+          <a:bodyPr wrap="none" rtlCol="0">
             <a:spAutoFit/>
           </a:bodyPr>
           <a:lstStyle/>
           <a:p>
-            <a:pPr marL="342900" indent="-342900">
-              <a:buFont typeface="Arial" panose="020B0604020202020204" pitchFamily="34" charset="0"/>
-              <a:buChar char="•"/>
-            </a:pPr>
-            <a:r>
-              <a:rPr lang="en-US" sz="2200" dirty="0">
-                <a:sym typeface="Wingdings" pitchFamily="2" charset="2"/>
-              </a:rPr>
-              <a:t>See textbook for a reference of string methods: </a:t>
-            </a:r>
-          </a:p>
-          <a:p>
-            <a:endParaRPr lang="en-US" sz="2200" dirty="0">
-              <a:sym typeface="Wingdings" pitchFamily="2" charset="2"/>
-            </a:endParaRPr>
-          </a:p>
-          <a:p>
-            <a:pPr marL="342900" indent="-342900">
-              <a:buFont typeface="Arial" panose="020B0604020202020204" pitchFamily="34" charset="0"/>
-              <a:buChar char="•"/>
-            </a:pPr>
-            <a:r>
-              <a:rPr lang="en-US" sz="2200" dirty="0">
-                <a:sym typeface="Wingdings" pitchFamily="2" charset="2"/>
-              </a:rPr>
-              <a:t>try out: find, replace, strip</a:t>
-            </a:r>
-          </a:p>
-          <a:p>
-            <a:pPr marL="342900" indent="-342900">
-              <a:buFont typeface="Arial" panose="020B0604020202020204" pitchFamily="34" charset="0"/>
-              <a:buChar char="•"/>
-            </a:pPr>
-            <a:endParaRPr lang="en-US" sz="2200" dirty="0">
-              <a:sym typeface="Wingdings" pitchFamily="2" charset="2"/>
-            </a:endParaRPr>
-          </a:p>
-          <a:p>
-            <a:r>
-              <a:rPr lang="en-US" sz="2200" dirty="0" err="1">
-                <a:sym typeface="Wingdings" pitchFamily="2" charset="2"/>
-              </a:rPr>
-              <a:t>myString</a:t>
-            </a:r>
-            <a:r>
-              <a:rPr lang="en-US" sz="2200" dirty="0">
-                <a:sym typeface="Wingdings" pitchFamily="2" charset="2"/>
-              </a:rPr>
-              <a:t> = "  hello world.    "</a:t>
-            </a:r>
-          </a:p>
-          <a:p>
-            <a:r>
-              <a:rPr lang="en-US" sz="2200" dirty="0">
-                <a:sym typeface="Wingdings" pitchFamily="2" charset="2"/>
-              </a:rPr>
-              <a:t>print(</a:t>
-            </a:r>
-            <a:r>
-              <a:rPr lang="en-US" sz="2200" dirty="0" err="1">
-                <a:sym typeface="Wingdings" pitchFamily="2" charset="2"/>
-              </a:rPr>
-              <a:t>myString.strip</a:t>
-            </a:r>
-            <a:r>
-              <a:rPr lang="en-US" sz="2200" dirty="0">
-                <a:sym typeface="Wingdings" pitchFamily="2" charset="2"/>
-              </a:rPr>
-              <a:t>())		 prints "hello world"</a:t>
-            </a:r>
-          </a:p>
-          <a:p>
-            <a:r>
-              <a:rPr lang="en-US" sz="2200" dirty="0" err="1">
-                <a:sym typeface="Wingdings" pitchFamily="2" charset="2"/>
-              </a:rPr>
-              <a:t>myString</a:t>
-            </a:r>
-            <a:r>
-              <a:rPr lang="en-US" sz="2200" dirty="0">
-                <a:sym typeface="Wingdings" pitchFamily="2" charset="2"/>
-              </a:rPr>
-              <a:t> = </a:t>
-            </a:r>
-            <a:r>
-              <a:rPr lang="en-US" sz="2200" dirty="0" err="1">
-                <a:sym typeface="Wingdings" pitchFamily="2" charset="2"/>
-              </a:rPr>
-              <a:t>myString.strip</a:t>
-            </a:r>
-            <a:r>
-              <a:rPr lang="en-US" sz="2200" dirty="0">
-                <a:sym typeface="Wingdings" pitchFamily="2" charset="2"/>
-              </a:rPr>
-              <a:t>())	</a:t>
-            </a:r>
-          </a:p>
-          <a:p>
-            <a:r>
-              <a:rPr lang="en-US" sz="2200" dirty="0">
-                <a:sym typeface="Wingdings" pitchFamily="2" charset="2"/>
-              </a:rPr>
-              <a:t>print(</a:t>
-            </a:r>
-            <a:r>
-              <a:rPr lang="en-US" sz="2200" dirty="0" err="1">
-                <a:sym typeface="Wingdings" pitchFamily="2" charset="2"/>
-              </a:rPr>
-              <a:t>myString.find</a:t>
-            </a:r>
-            <a:r>
-              <a:rPr lang="en-US" sz="2200" dirty="0">
-                <a:sym typeface="Wingdings" pitchFamily="2" charset="2"/>
-              </a:rPr>
-              <a:t>('</a:t>
-            </a:r>
-            <a:r>
-              <a:rPr lang="en-US" sz="2200" dirty="0" err="1">
-                <a:sym typeface="Wingdings" pitchFamily="2" charset="2"/>
-              </a:rPr>
-              <a:t>llo</a:t>
-            </a:r>
-            <a:r>
-              <a:rPr lang="en-US" sz="2200" dirty="0">
-                <a:sym typeface="Wingdings" pitchFamily="2" charset="2"/>
-              </a:rPr>
-              <a:t>'))	 prints 2</a:t>
-            </a:r>
-          </a:p>
-          <a:p>
-            <a:r>
-              <a:rPr lang="en-US" sz="2200" dirty="0">
-                <a:sym typeface="Wingdings" pitchFamily="2" charset="2"/>
-              </a:rPr>
-              <a:t>print(</a:t>
-            </a:r>
-            <a:r>
-              <a:rPr lang="en-US" sz="2200" dirty="0" err="1">
-                <a:sym typeface="Wingdings" pitchFamily="2" charset="2"/>
-              </a:rPr>
-              <a:t>myString.find</a:t>
-            </a:r>
-            <a:r>
-              <a:rPr lang="en-US" sz="2200" dirty="0">
-                <a:sym typeface="Wingdings" pitchFamily="2" charset="2"/>
-              </a:rPr>
-              <a:t>('goodbye'))	 prints -1</a:t>
-            </a:r>
-          </a:p>
-          <a:p>
-            <a:r>
-              <a:rPr lang="en-US" sz="2200" dirty="0">
-                <a:sym typeface="Wingdings" pitchFamily="2" charset="2"/>
-              </a:rPr>
-              <a:t>print(</a:t>
-            </a:r>
-            <a:r>
-              <a:rPr lang="en-US" sz="2200" dirty="0" err="1">
-                <a:sym typeface="Wingdings" pitchFamily="2" charset="2"/>
-              </a:rPr>
-              <a:t>myString.replace</a:t>
-            </a:r>
-            <a:r>
-              <a:rPr lang="en-US" sz="2200" dirty="0">
-                <a:sym typeface="Wingdings" pitchFamily="2" charset="2"/>
-              </a:rPr>
-              <a:t>('world' 'operator please give me number 9'))  prints "hello operator 										please give me number 9"</a:t>
-            </a:r>
-          </a:p>
-          <a:p>
-            <a:endParaRPr lang="en-US" sz="2200" dirty="0">
-              <a:sym typeface="Wingdings" pitchFamily="2" charset="2"/>
-            </a:endParaRPr>
+            <a:r>
+              <a:rPr lang="en-US" dirty="0"/>
+              <a:t>nevertheless, even though this isn't working</a:t>
+            </a:r>
+          </a:p>
+          <a:p>
+            <a:r>
+              <a:rPr lang="en-US" dirty="0"/>
+              <a:t>Python, it shows us the structure of the program </a:t>
+            </a:r>
           </a:p>
         </p:txBody>
       </p:sp>
     </p:spTree>
     <p:extLst>
       <p:ext uri="{BB962C8B-B14F-4D97-AF65-F5344CB8AC3E}">
-        <p14:creationId xmlns:p14="http://schemas.microsoft.com/office/powerpoint/2010/main" val="2322657959"/>
+        <p14:creationId xmlns:p14="http://schemas.microsoft.com/office/powerpoint/2010/main" val="1261378068"/>
       </p:ext>
     </p:extLst>
   </p:cSld>
@@ -9064,7 +9907,7 @@
         <p:spPr>
           <a:xfrm>
             <a:off x="590309" y="555583"/>
-            <a:ext cx="11514666" cy="1015663"/>
+            <a:ext cx="11514666" cy="1323439"/>
           </a:xfrm>
           <a:prstGeom prst="rect">
             <a:avLst/>
@@ -9078,22 +9921,22 @@
           <a:lstStyle/>
           <a:p>
             <a:r>
-              <a:rPr lang="en-US" sz="6000" dirty="0">
+              <a:rPr lang="en-US" sz="8000" dirty="0">
                 <a:solidFill>
                   <a:srgbClr val="FF0000"/>
                 </a:solidFill>
               </a:rPr>
-              <a:t>SLICE NOTATION</a:t>
-            </a:r>
-          </a:p>
-        </p:txBody>
-      </p:sp>
-      <p:sp>
-        <p:nvSpPr>
-          <p:cNvPr id="2" name="TextBox 1">
-            <a:extLst>
-              <a:ext uri="{FF2B5EF4-FFF2-40B4-BE49-F238E27FC236}">
-                <a16:creationId xmlns:a16="http://schemas.microsoft.com/office/drawing/2014/main" id="{D547AD33-8FE1-584E-B510-08C013ACA746}"/>
+              <a:t>IN-CLASS EXERCISE 1 </a:t>
+            </a:r>
+          </a:p>
+        </p:txBody>
+      </p:sp>
+      <p:sp>
+        <p:nvSpPr>
+          <p:cNvPr id="4" name="TextBox 3">
+            <a:extLst>
+              <a:ext uri="{FF2B5EF4-FFF2-40B4-BE49-F238E27FC236}">
+                <a16:creationId xmlns:a16="http://schemas.microsoft.com/office/drawing/2014/main" id="{E35D83AF-0E32-C145-85B6-27C9ECF9D14E}"/>
               </a:ext>
             </a:extLst>
           </p:cNvPr>
@@ -9102,8 +9945,8 @@
         </p:nvSpPr>
         <p:spPr>
           <a:xfrm>
-            <a:off x="6078828" y="3063962"/>
-            <a:ext cx="184731" cy="369332"/>
+            <a:off x="590309" y="1879022"/>
+            <a:ext cx="10678886" cy="5262979"/>
           </a:xfrm>
           <a:prstGeom prst="rect">
             <a:avLst/>
@@ -9111,179 +9954,79 @@
           <a:noFill/>
         </p:spPr>
         <p:txBody>
-          <a:bodyPr wrap="none" rtlCol="0">
-            <a:spAutoFit/>
-          </a:bodyPr>
-          <a:lstStyle/>
-          <a:p>
-            <a:endParaRPr lang="en-US" dirty="0"/>
-          </a:p>
-        </p:txBody>
-      </p:sp>
-      <p:sp>
-        <p:nvSpPr>
-          <p:cNvPr id="9" name="TextBox 8">
-            <a:extLst>
-              <a:ext uri="{FF2B5EF4-FFF2-40B4-BE49-F238E27FC236}">
-                <a16:creationId xmlns:a16="http://schemas.microsoft.com/office/drawing/2014/main" id="{1B119A5E-C909-7A43-8310-B5F1C6FCE541}"/>
-              </a:ext>
-            </a:extLst>
-          </p:cNvPr>
-          <p:cNvSpPr txBox="1"/>
-          <p:nvPr/>
-        </p:nvSpPr>
-        <p:spPr>
-          <a:xfrm>
-            <a:off x="590309" y="2633075"/>
-            <a:ext cx="10678886" cy="1446550"/>
-          </a:xfrm>
-          <a:prstGeom prst="rect">
-            <a:avLst/>
-          </a:prstGeom>
-          <a:noFill/>
-        </p:spPr>
-        <p:txBody>
           <a:bodyPr wrap="square" rtlCol="0">
             <a:spAutoFit/>
           </a:bodyPr>
           <a:lstStyle/>
           <a:p>
             <a:r>
-              <a:rPr lang="en-US" sz="2200" dirty="0">
-                <a:sym typeface="Wingdings" pitchFamily="2" charset="2"/>
-              </a:rPr>
-              <a:t>We've seen a couple of ways to get characters from strings by index:</a:t>
-            </a:r>
-          </a:p>
-          <a:p>
-            <a:endParaRPr lang="en-US" sz="2200" dirty="0">
+              <a:rPr lang="en-US" sz="2400" dirty="0">
+                <a:solidFill>
+                  <a:srgbClr val="FF0000"/>
+                </a:solidFill>
+              </a:rPr>
+              <a:t>WRITING PSEUDOCODE</a:t>
+            </a:r>
+          </a:p>
+          <a:p>
+            <a:endParaRPr lang="en-US" sz="2400" dirty="0">
               <a:sym typeface="Wingdings" pitchFamily="2" charset="2"/>
             </a:endParaRPr>
           </a:p>
           <a:p>
             <a:r>
-              <a:rPr lang="en-US" sz="2200" dirty="0" err="1">
-                <a:sym typeface="Wingdings" pitchFamily="2" charset="2"/>
-              </a:rPr>
-              <a:t>myString</a:t>
-            </a:r>
-            <a:r>
-              <a:rPr lang="en-US" sz="2200" dirty="0">
-                <a:sym typeface="Wingdings" pitchFamily="2" charset="2"/>
-              </a:rPr>
-              <a:t> = "hello"</a:t>
-            </a:r>
-          </a:p>
-          <a:p>
-            <a:r>
-              <a:rPr lang="en-US" sz="2200" dirty="0">
-                <a:sym typeface="Wingdings" pitchFamily="2" charset="2"/>
-              </a:rPr>
-              <a:t>print(</a:t>
-            </a:r>
-            <a:r>
-              <a:rPr lang="en-US" sz="2200" dirty="0" err="1">
-                <a:sym typeface="Wingdings" pitchFamily="2" charset="2"/>
-              </a:rPr>
-              <a:t>myString</a:t>
-            </a:r>
-            <a:r>
-              <a:rPr lang="en-US" sz="2200" dirty="0">
-                <a:sym typeface="Wingdings" pitchFamily="2" charset="2"/>
-              </a:rPr>
-              <a:t>[0])</a:t>
-            </a:r>
-          </a:p>
-        </p:txBody>
-      </p:sp>
-      <p:sp>
-        <p:nvSpPr>
-          <p:cNvPr id="5" name="Down Arrow 4">
-            <a:extLst>
-              <a:ext uri="{FF2B5EF4-FFF2-40B4-BE49-F238E27FC236}">
-                <a16:creationId xmlns:a16="http://schemas.microsoft.com/office/drawing/2014/main" id="{F6BF44C4-89FF-7C47-B873-D8D9A447216A}"/>
-              </a:ext>
-            </a:extLst>
-          </p:cNvPr>
-          <p:cNvSpPr/>
-          <p:nvPr/>
-        </p:nvSpPr>
-        <p:spPr>
-          <a:xfrm rot="6353669">
-            <a:off x="3108811" y="3651177"/>
-            <a:ext cx="413145" cy="591933"/>
-          </a:xfrm>
-          <a:prstGeom prst="downArrow">
-            <a:avLst>
-              <a:gd name="adj1" fmla="val 50000"/>
-              <a:gd name="adj2" fmla="val 53426"/>
-            </a:avLst>
-          </a:prstGeom>
-        </p:spPr>
-        <p:style>
-          <a:lnRef idx="2">
-            <a:schemeClr val="accent1">
-              <a:shade val="50000"/>
-            </a:schemeClr>
-          </a:lnRef>
-          <a:fillRef idx="1">
-            <a:schemeClr val="accent1"/>
-          </a:fillRef>
-          <a:effectRef idx="0">
-            <a:schemeClr val="accent1"/>
-          </a:effectRef>
-          <a:fontRef idx="minor">
-            <a:schemeClr val="lt1"/>
-          </a:fontRef>
-        </p:style>
-        <p:txBody>
-          <a:bodyPr rtlCol="0" anchor="ctr"/>
-          <a:lstStyle/>
-          <a:p>
-            <a:pPr algn="ctr"/>
-            <a:endParaRPr lang="en-US"/>
-          </a:p>
-        </p:txBody>
-      </p:sp>
-      <p:sp>
-        <p:nvSpPr>
-          <p:cNvPr id="4" name="TextBox 3">
-            <a:extLst>
-              <a:ext uri="{FF2B5EF4-FFF2-40B4-BE49-F238E27FC236}">
-                <a16:creationId xmlns:a16="http://schemas.microsoft.com/office/drawing/2014/main" id="{03BBB3F0-5DD2-4F4D-9386-D0C0225D6494}"/>
-              </a:ext>
-            </a:extLst>
-          </p:cNvPr>
-          <p:cNvSpPr txBox="1"/>
-          <p:nvPr/>
-        </p:nvSpPr>
-        <p:spPr>
-          <a:xfrm>
-            <a:off x="4082603" y="3857542"/>
-            <a:ext cx="1003288" cy="369332"/>
-          </a:xfrm>
-          <a:prstGeom prst="rect">
-            <a:avLst/>
-          </a:prstGeom>
-          <a:noFill/>
-        </p:spPr>
-        <p:txBody>
-          <a:bodyPr wrap="none" rtlCol="0">
-            <a:spAutoFit/>
-          </a:bodyPr>
-          <a:lstStyle/>
-          <a:p>
-            <a:r>
-              <a:rPr lang="en-US" dirty="0"/>
-              <a:t>prints 'h'</a:t>
-            </a:r>
+              <a:rPr lang="en-US" sz="2400" dirty="0">
+                <a:sym typeface="Wingdings" pitchFamily="2" charset="2"/>
+              </a:rPr>
+              <a:t>Write pseudocode (NOT a full program) to ask the user for a new password. Your pseudocode, if implemented, would have to:</a:t>
+            </a:r>
+          </a:p>
+          <a:p>
+            <a:endParaRPr lang="en-US" sz="2400" dirty="0">
+              <a:sym typeface="Wingdings" pitchFamily="2" charset="2"/>
+            </a:endParaRPr>
+          </a:p>
+          <a:p>
+            <a:r>
+              <a:rPr lang="en-US" sz="2400" dirty="0">
+                <a:sym typeface="Wingdings" pitchFamily="2" charset="2"/>
+              </a:rPr>
+              <a:t>ask the user for a string, ask the user to re-enter the string, verify that the string is at least eight characters long, verify that that string contains at least one number, at least one lowercase letter, at least one piece of punctuation, and at least one uppercase letter.  </a:t>
+            </a:r>
+          </a:p>
+          <a:p>
+            <a:endParaRPr lang="en-US" sz="2400" dirty="0">
+              <a:sym typeface="Wingdings" pitchFamily="2" charset="2"/>
+            </a:endParaRPr>
+          </a:p>
+          <a:p>
+            <a:r>
+              <a:rPr lang="en-US" sz="2400" dirty="0">
+                <a:sym typeface="Wingdings" pitchFamily="2" charset="2"/>
+              </a:rPr>
+              <a:t>Start over if either the two strings don't match, or if the string is too short or doesn't have all the required characters.</a:t>
+            </a:r>
+          </a:p>
+          <a:p>
+            <a:endParaRPr lang="en-US" sz="2400" dirty="0">
+              <a:sym typeface="Wingdings" pitchFamily="2" charset="2"/>
+            </a:endParaRPr>
+          </a:p>
+          <a:p>
+            <a:pPr marL="457200" indent="-457200">
+              <a:buFont typeface="Arial" panose="020B0604020202020204" pitchFamily="34" charset="0"/>
+              <a:buChar char="•"/>
+            </a:pPr>
+            <a:endParaRPr lang="en-US" sz="2400" dirty="0">
+              <a:sym typeface="Wingdings" pitchFamily="2" charset="2"/>
+            </a:endParaRPr>
           </a:p>
         </p:txBody>
       </p:sp>
     </p:spTree>
     <p:extLst>
       <p:ext uri="{BB962C8B-B14F-4D97-AF65-F5344CB8AC3E}">
-        <p14:creationId xmlns:p14="http://schemas.microsoft.com/office/powerpoint/2010/main" val="2156631455"/>
+        <p14:creationId xmlns:p14="http://schemas.microsoft.com/office/powerpoint/2010/main" val="3525675785"/>
       </p:ext>
     </p:extLst>
   </p:cSld>
@@ -9325,7 +10068,7 @@
         <p:spPr>
           <a:xfrm>
             <a:off x="590309" y="555583"/>
-            <a:ext cx="11514666" cy="1015663"/>
+            <a:ext cx="11514666" cy="1323439"/>
           </a:xfrm>
           <a:prstGeom prst="rect">
             <a:avLst/>
@@ -9339,22 +10082,22 @@
           <a:lstStyle/>
           <a:p>
             <a:r>
-              <a:rPr lang="en-US" sz="6000" dirty="0">
+              <a:rPr lang="en-US" sz="8000" dirty="0">
                 <a:solidFill>
                   <a:srgbClr val="FF0000"/>
                 </a:solidFill>
               </a:rPr>
-              <a:t>SLICE NOTATION</a:t>
-            </a:r>
-          </a:p>
-        </p:txBody>
-      </p:sp>
-      <p:sp>
-        <p:nvSpPr>
-          <p:cNvPr id="2" name="TextBox 1">
-            <a:extLst>
-              <a:ext uri="{FF2B5EF4-FFF2-40B4-BE49-F238E27FC236}">
-                <a16:creationId xmlns:a16="http://schemas.microsoft.com/office/drawing/2014/main" id="{D547AD33-8FE1-584E-B510-08C013ACA746}"/>
+              <a:t>NOTE</a:t>
+            </a:r>
+          </a:p>
+        </p:txBody>
+      </p:sp>
+      <p:sp>
+        <p:nvSpPr>
+          <p:cNvPr id="4" name="TextBox 3">
+            <a:extLst>
+              <a:ext uri="{FF2B5EF4-FFF2-40B4-BE49-F238E27FC236}">
+                <a16:creationId xmlns:a16="http://schemas.microsoft.com/office/drawing/2014/main" id="{E35D83AF-0E32-C145-85B6-27C9ECF9D14E}"/>
               </a:ext>
             </a:extLst>
           </p:cNvPr>
@@ -9363,8 +10106,8 @@
         </p:nvSpPr>
         <p:spPr>
           <a:xfrm>
-            <a:off x="6078828" y="3063962"/>
-            <a:ext cx="184731" cy="369332"/>
+            <a:off x="590309" y="1879022"/>
+            <a:ext cx="10678886" cy="2677656"/>
           </a:xfrm>
           <a:prstGeom prst="rect">
             <a:avLst/>
@@ -9372,204 +10115,82 @@
           <a:noFill/>
         </p:spPr>
         <p:txBody>
-          <a:bodyPr wrap="none" rtlCol="0">
-            <a:spAutoFit/>
-          </a:bodyPr>
-          <a:lstStyle/>
-          <a:p>
-            <a:endParaRPr lang="en-US" dirty="0"/>
-          </a:p>
-        </p:txBody>
-      </p:sp>
-      <p:sp>
-        <p:nvSpPr>
-          <p:cNvPr id="9" name="TextBox 8">
-            <a:extLst>
-              <a:ext uri="{FF2B5EF4-FFF2-40B4-BE49-F238E27FC236}">
-                <a16:creationId xmlns:a16="http://schemas.microsoft.com/office/drawing/2014/main" id="{1B119A5E-C909-7A43-8310-B5F1C6FCE541}"/>
-              </a:ext>
-            </a:extLst>
-          </p:cNvPr>
-          <p:cNvSpPr txBox="1"/>
-          <p:nvPr/>
-        </p:nvSpPr>
-        <p:spPr>
-          <a:xfrm>
-            <a:off x="590309" y="2633075"/>
-            <a:ext cx="10678886" cy="2123658"/>
-          </a:xfrm>
-          <a:prstGeom prst="rect">
-            <a:avLst/>
-          </a:prstGeom>
-          <a:noFill/>
-        </p:spPr>
-        <p:txBody>
           <a:bodyPr wrap="square" rtlCol="0">
             <a:spAutoFit/>
           </a:bodyPr>
           <a:lstStyle/>
           <a:p>
             <a:r>
-              <a:rPr lang="en-US" sz="2200" dirty="0">
-                <a:sym typeface="Wingdings" pitchFamily="2" charset="2"/>
-              </a:rPr>
-              <a:t>We've seen a couple of ways to get characters from strings by index:</a:t>
-            </a:r>
-          </a:p>
-          <a:p>
-            <a:endParaRPr lang="en-US" sz="2200" dirty="0">
+              <a:rPr lang="en-US" sz="2400" dirty="0">
+                <a:solidFill>
+                  <a:srgbClr val="FF0000"/>
+                </a:solidFill>
+                <a:sym typeface="Wingdings" pitchFamily="2" charset="2"/>
+              </a:rPr>
+              <a:t>how to check for punctuation characters:</a:t>
+            </a:r>
+          </a:p>
+          <a:p>
+            <a:endParaRPr lang="en-US" sz="2400" dirty="0">
+              <a:solidFill>
+                <a:srgbClr val="FF0000"/>
+              </a:solidFill>
               <a:sym typeface="Wingdings" pitchFamily="2" charset="2"/>
             </a:endParaRPr>
           </a:p>
           <a:p>
             <a:r>
-              <a:rPr lang="en-US" sz="2200" dirty="0" err="1">
-                <a:sym typeface="Wingdings" pitchFamily="2" charset="2"/>
-              </a:rPr>
-              <a:t>myString</a:t>
-            </a:r>
-            <a:r>
-              <a:rPr lang="en-US" sz="2200" dirty="0">
-                <a:sym typeface="Wingdings" pitchFamily="2" charset="2"/>
-              </a:rPr>
-              <a:t> = "hello"</a:t>
-            </a:r>
-          </a:p>
-          <a:p>
-            <a:r>
-              <a:rPr lang="en-US" sz="2200" dirty="0">
-                <a:sym typeface="Wingdings" pitchFamily="2" charset="2"/>
-              </a:rPr>
-              <a:t>print(</a:t>
-            </a:r>
-            <a:r>
-              <a:rPr lang="en-US" sz="2200" dirty="0" err="1">
-                <a:sym typeface="Wingdings" pitchFamily="2" charset="2"/>
-              </a:rPr>
-              <a:t>myString</a:t>
-            </a:r>
-            <a:r>
-              <a:rPr lang="en-US" sz="2200" dirty="0">
-                <a:sym typeface="Wingdings" pitchFamily="2" charset="2"/>
-              </a:rPr>
-              <a:t>[0])</a:t>
-            </a:r>
-          </a:p>
-          <a:p>
-            <a:endParaRPr lang="en-US" sz="2200" dirty="0">
+              <a:rPr lang="en-US" sz="2400" dirty="0">
+                <a:solidFill>
+                  <a:srgbClr val="FF0000"/>
+                </a:solidFill>
+                <a:sym typeface="Wingdings" pitchFamily="2" charset="2"/>
+              </a:rPr>
+              <a:t>import string</a:t>
+            </a:r>
+          </a:p>
+          <a:p>
+            <a:endParaRPr lang="en-US" sz="2400" dirty="0">
+              <a:solidFill>
+                <a:srgbClr val="FF0000"/>
+              </a:solidFill>
               <a:sym typeface="Wingdings" pitchFamily="2" charset="2"/>
             </a:endParaRPr>
           </a:p>
           <a:p>
             <a:r>
-              <a:rPr lang="en-US" sz="2200" dirty="0">
-                <a:sym typeface="Wingdings" pitchFamily="2" charset="2"/>
-              </a:rPr>
-              <a:t>print(</a:t>
-            </a:r>
-            <a:r>
-              <a:rPr lang="en-US" sz="2200" dirty="0" err="1">
-                <a:sym typeface="Wingdings" pitchFamily="2" charset="2"/>
-              </a:rPr>
-              <a:t>myString</a:t>
-            </a:r>
-            <a:r>
-              <a:rPr lang="en-US" sz="2200" dirty="0">
-                <a:sym typeface="Wingdings" pitchFamily="2" charset="2"/>
-              </a:rPr>
-              <a:t>[-1])</a:t>
-            </a:r>
-          </a:p>
-        </p:txBody>
-      </p:sp>
-      <p:sp>
-        <p:nvSpPr>
-          <p:cNvPr id="5" name="Down Arrow 4">
-            <a:extLst>
-              <a:ext uri="{FF2B5EF4-FFF2-40B4-BE49-F238E27FC236}">
-                <a16:creationId xmlns:a16="http://schemas.microsoft.com/office/drawing/2014/main" id="{F6BF44C4-89FF-7C47-B873-D8D9A447216A}"/>
-              </a:ext>
-            </a:extLst>
-          </p:cNvPr>
-          <p:cNvSpPr/>
-          <p:nvPr/>
-        </p:nvSpPr>
-        <p:spPr>
-          <a:xfrm rot="6353669">
-            <a:off x="3224721" y="4210637"/>
-            <a:ext cx="413145" cy="591933"/>
-          </a:xfrm>
-          <a:prstGeom prst="downArrow">
-            <a:avLst>
-              <a:gd name="adj1" fmla="val 50000"/>
-              <a:gd name="adj2" fmla="val 53426"/>
-            </a:avLst>
-          </a:prstGeom>
-        </p:spPr>
-        <p:style>
-          <a:lnRef idx="2">
-            <a:schemeClr val="accent1">
-              <a:shade val="50000"/>
-            </a:schemeClr>
-          </a:lnRef>
-          <a:fillRef idx="1">
-            <a:schemeClr val="accent1"/>
-          </a:fillRef>
-          <a:effectRef idx="0">
-            <a:schemeClr val="accent1"/>
-          </a:effectRef>
-          <a:fontRef idx="minor">
-            <a:schemeClr val="lt1"/>
-          </a:fontRef>
-        </p:style>
-        <p:txBody>
-          <a:bodyPr rtlCol="0" anchor="ctr"/>
-          <a:lstStyle/>
-          <a:p>
-            <a:pPr algn="ctr"/>
-            <a:endParaRPr lang="en-US"/>
-          </a:p>
-        </p:txBody>
-      </p:sp>
-      <p:sp>
-        <p:nvSpPr>
-          <p:cNvPr id="4" name="TextBox 3">
-            <a:extLst>
-              <a:ext uri="{FF2B5EF4-FFF2-40B4-BE49-F238E27FC236}">
-                <a16:creationId xmlns:a16="http://schemas.microsoft.com/office/drawing/2014/main" id="{03BBB3F0-5DD2-4F4D-9386-D0C0225D6494}"/>
-              </a:ext>
-            </a:extLst>
-          </p:cNvPr>
-          <p:cNvSpPr txBox="1"/>
-          <p:nvPr/>
-        </p:nvSpPr>
-        <p:spPr>
-          <a:xfrm>
-            <a:off x="4095482" y="4506603"/>
-            <a:ext cx="1003288" cy="369332"/>
-          </a:xfrm>
-          <a:prstGeom prst="rect">
-            <a:avLst/>
-          </a:prstGeom>
-          <a:noFill/>
-        </p:spPr>
-        <p:txBody>
-          <a:bodyPr wrap="none" rtlCol="0">
-            <a:spAutoFit/>
-          </a:bodyPr>
-          <a:lstStyle/>
-          <a:p>
-            <a:r>
-              <a:rPr lang="en-US" dirty="0"/>
-              <a:t>prints 'o'</a:t>
-            </a:r>
+              <a:rPr lang="en-US" sz="2400" dirty="0" err="1">
+                <a:solidFill>
+                  <a:srgbClr val="FF0000"/>
+                </a:solidFill>
+                <a:sym typeface="Wingdings" pitchFamily="2" charset="2"/>
+              </a:rPr>
+              <a:t>string.punctuation</a:t>
+            </a:r>
+            <a:endParaRPr lang="en-US" sz="2400" dirty="0">
+              <a:sym typeface="Wingdings" pitchFamily="2" charset="2"/>
+            </a:endParaRPr>
+          </a:p>
+          <a:p>
+            <a:endParaRPr lang="en-US" sz="2400" dirty="0">
+              <a:sym typeface="Wingdings" pitchFamily="2" charset="2"/>
+            </a:endParaRPr>
+          </a:p>
+          <a:p>
+            <a:pPr marL="457200" indent="-457200">
+              <a:buFont typeface="Arial" panose="020B0604020202020204" pitchFamily="34" charset="0"/>
+              <a:buChar char="•"/>
+            </a:pPr>
+            <a:endParaRPr lang="en-US" sz="2400" dirty="0">
+              <a:sym typeface="Wingdings" pitchFamily="2" charset="2"/>
+            </a:endParaRPr>
           </a:p>
         </p:txBody>
       </p:sp>
     </p:spTree>
     <p:extLst>
       <p:ext uri="{BB962C8B-B14F-4D97-AF65-F5344CB8AC3E}">
-        <p14:creationId xmlns:p14="http://schemas.microsoft.com/office/powerpoint/2010/main" val="1449782185"/>
+        <p14:creationId xmlns:p14="http://schemas.microsoft.com/office/powerpoint/2010/main" val="1676570554"/>
       </p:ext>
     </p:extLst>
   </p:cSld>
@@ -9611,7 +10232,7 @@
         <p:spPr>
           <a:xfrm>
             <a:off x="590309" y="555583"/>
-            <a:ext cx="11514666" cy="1015663"/>
+            <a:ext cx="11514666" cy="1938992"/>
           </a:xfrm>
           <a:prstGeom prst="rect">
             <a:avLst/>
@@ -9630,7 +10251,17 @@
                   <a:srgbClr val="FF0000"/>
                 </a:solidFill>
               </a:rPr>
-              <a:t>SLICE NOTATION</a:t>
+              <a:t>ONE STRATEGY FOR DECIDING </a:t>
+            </a:r>
+          </a:p>
+          <a:p>
+            <a:r>
+              <a:rPr lang="en-US" sz="6000" dirty="0">
+                <a:solidFill>
+                  <a:srgbClr val="FF0000"/>
+                </a:solidFill>
+              </a:rPr>
+              <a:t>WHICH FUNCTIONS TO WRITE</a:t>
             </a:r>
           </a:p>
         </p:txBody>
@@ -9682,7 +10313,7 @@
         <p:spPr>
           <a:xfrm>
             <a:off x="590309" y="2633075"/>
-            <a:ext cx="10678886" cy="1446550"/>
+            <a:ext cx="10678886" cy="2123658"/>
           </a:xfrm>
           <a:prstGeom prst="rect">
             <a:avLst/>
@@ -9695,146 +10326,39 @@
           </a:bodyPr>
           <a:lstStyle/>
           <a:p>
+            <a:pPr marL="457200" indent="-457200">
+              <a:buFont typeface="Arial" panose="020B0604020202020204" pitchFamily="34" charset="0"/>
+              <a:buChar char="•"/>
+            </a:pPr>
             <a:r>
               <a:rPr lang="en-US" sz="2200" dirty="0">
                 <a:sym typeface="Wingdings" pitchFamily="2" charset="2"/>
               </a:rPr>
-              <a:t>We can also print a range of characters, using </a:t>
-            </a:r>
-            <a:r>
-              <a:rPr lang="en-US" sz="2200" i="1" dirty="0">
-                <a:sym typeface="Wingdings" pitchFamily="2" charset="2"/>
-              </a:rPr>
-              <a:t>slice notation</a:t>
-            </a:r>
+              <a:t>Write out your main() function as pseudocode. Include function calls to functions that "magically" do whatever complicated thing you need to do to actually implement the code</a:t>
+            </a:r>
+          </a:p>
+          <a:p>
+            <a:pPr marL="457200" indent="-457200">
+              <a:buFont typeface="Arial" panose="020B0604020202020204" pitchFamily="34" charset="0"/>
+              <a:buChar char="•"/>
+            </a:pPr>
             <a:r>
               <a:rPr lang="en-US" sz="2200" dirty="0">
                 <a:sym typeface="Wingdings" pitchFamily="2" charset="2"/>
               </a:rPr>
-              <a:t>:</a:t>
-            </a:r>
-          </a:p>
-          <a:p>
-            <a:endParaRPr lang="en-US" sz="2200" dirty="0">
-              <a:sym typeface="Wingdings" pitchFamily="2" charset="2"/>
-            </a:endParaRPr>
-          </a:p>
-          <a:p>
-            <a:r>
-              <a:rPr lang="en-US" sz="2200" dirty="0" err="1">
-                <a:sym typeface="Wingdings" pitchFamily="2" charset="2"/>
-              </a:rPr>
-              <a:t>myString</a:t>
-            </a:r>
+              <a:t>Go back and actually write the functions</a:t>
+            </a:r>
+          </a:p>
+          <a:p>
+            <a:pPr marL="457200" indent="-457200">
+              <a:buFont typeface="Arial" panose="020B0604020202020204" pitchFamily="34" charset="0"/>
+              <a:buChar char="•"/>
+            </a:pPr>
             <a:r>
               <a:rPr lang="en-US" sz="2200" dirty="0">
                 <a:sym typeface="Wingdings" pitchFamily="2" charset="2"/>
               </a:rPr>
-              <a:t> = "hello world"</a:t>
-            </a:r>
-          </a:p>
-          <a:p>
-            <a:r>
-              <a:rPr lang="en-US" sz="2200" dirty="0">
-                <a:sym typeface="Wingdings" pitchFamily="2" charset="2"/>
-              </a:rPr>
-              <a:t>print(</a:t>
-            </a:r>
-            <a:r>
-              <a:rPr lang="en-US" sz="2200" dirty="0" err="1">
-                <a:sym typeface="Wingdings" pitchFamily="2" charset="2"/>
-              </a:rPr>
-              <a:t>myString</a:t>
-            </a:r>
-            <a:r>
-              <a:rPr lang="en-US" sz="2200" dirty="0">
-                <a:sym typeface="Wingdings" pitchFamily="2" charset="2"/>
-              </a:rPr>
-              <a:t>[6:11])</a:t>
-            </a:r>
-          </a:p>
-        </p:txBody>
-      </p:sp>
-      <p:sp>
-        <p:nvSpPr>
-          <p:cNvPr id="5" name="Down Arrow 4">
-            <a:extLst>
-              <a:ext uri="{FF2B5EF4-FFF2-40B4-BE49-F238E27FC236}">
-                <a16:creationId xmlns:a16="http://schemas.microsoft.com/office/drawing/2014/main" id="{F6BF44C4-89FF-7C47-B873-D8D9A447216A}"/>
-              </a:ext>
-            </a:extLst>
-          </p:cNvPr>
-          <p:cNvSpPr/>
-          <p:nvPr/>
-        </p:nvSpPr>
-        <p:spPr>
-          <a:xfrm rot="6353669">
-            <a:off x="3237600" y="3783659"/>
-            <a:ext cx="413145" cy="591933"/>
-          </a:xfrm>
-          <a:prstGeom prst="downArrow">
-            <a:avLst>
-              <a:gd name="adj1" fmla="val 50000"/>
-              <a:gd name="adj2" fmla="val 53426"/>
-            </a:avLst>
-          </a:prstGeom>
-        </p:spPr>
-        <p:style>
-          <a:lnRef idx="2">
-            <a:schemeClr val="accent1">
-              <a:shade val="50000"/>
-            </a:schemeClr>
-          </a:lnRef>
-          <a:fillRef idx="1">
-            <a:schemeClr val="accent1"/>
-          </a:fillRef>
-          <a:effectRef idx="0">
-            <a:schemeClr val="accent1"/>
-          </a:effectRef>
-          <a:fontRef idx="minor">
-            <a:schemeClr val="lt1"/>
-          </a:fontRef>
-        </p:style>
-        <p:txBody>
-          <a:bodyPr rtlCol="0" anchor="ctr"/>
-          <a:lstStyle/>
-          <a:p>
-            <a:pPr algn="ctr"/>
-            <a:endParaRPr lang="en-US"/>
-          </a:p>
-        </p:txBody>
-      </p:sp>
-      <p:sp>
-        <p:nvSpPr>
-          <p:cNvPr id="4" name="TextBox 3">
-            <a:extLst>
-              <a:ext uri="{FF2B5EF4-FFF2-40B4-BE49-F238E27FC236}">
-                <a16:creationId xmlns:a16="http://schemas.microsoft.com/office/drawing/2014/main" id="{03BBB3F0-5DD2-4F4D-9386-D0C0225D6494}"/>
-              </a:ext>
-            </a:extLst>
-          </p:cNvPr>
-          <p:cNvSpPr txBox="1"/>
-          <p:nvPr/>
-        </p:nvSpPr>
-        <p:spPr>
-          <a:xfrm>
-            <a:off x="4095482" y="4506603"/>
-            <a:ext cx="1421158" cy="369332"/>
-          </a:xfrm>
-          <a:prstGeom prst="rect">
-            <a:avLst/>
-          </a:prstGeom>
-          <a:noFill/>
-        </p:spPr>
-        <p:txBody>
-          <a:bodyPr wrap="none" rtlCol="0">
-            <a:spAutoFit/>
-          </a:bodyPr>
-          <a:lstStyle/>
-          <a:p>
-            <a:r>
-              <a:rPr lang="en-US" dirty="0"/>
-              <a:t>prints 'world'</a:t>
+              <a:t>This is called "top-down design" – it's a good way to make sure your code is clean and readable</a:t>
             </a:r>
           </a:p>
         </p:txBody>
@@ -9842,7 +10366,7 @@
     </p:spTree>
     <p:extLst>
       <p:ext uri="{BB962C8B-B14F-4D97-AF65-F5344CB8AC3E}">
-        <p14:creationId xmlns:p14="http://schemas.microsoft.com/office/powerpoint/2010/main" val="1035794916"/>
+        <p14:creationId xmlns:p14="http://schemas.microsoft.com/office/powerpoint/2010/main" val="3874932687"/>
       </p:ext>
     </p:extLst>
   </p:cSld>
@@ -9871,10 +10395,10 @@
       </p:grpSpPr>
       <p:sp>
         <p:nvSpPr>
-          <p:cNvPr id="3" name="TextBox 2">
-            <a:extLst>
-              <a:ext uri="{FF2B5EF4-FFF2-40B4-BE49-F238E27FC236}">
-                <a16:creationId xmlns:a16="http://schemas.microsoft.com/office/drawing/2014/main" id="{E42D67C2-3010-0B46-A3B3-EDDCD41D3FBD}"/>
+          <p:cNvPr id="4" name="TextBox 3">
+            <a:extLst>
+              <a:ext uri="{FF2B5EF4-FFF2-40B4-BE49-F238E27FC236}">
+                <a16:creationId xmlns:a16="http://schemas.microsoft.com/office/drawing/2014/main" id="{5D4AF37B-C0FC-3743-A0E4-AAB61E028799}"/>
               </a:ext>
             </a:extLst>
           </p:cNvPr>
@@ -9884,7 +10408,7 @@
         <p:spPr>
           <a:xfrm>
             <a:off x="590309" y="555583"/>
-            <a:ext cx="11514666" cy="1015663"/>
+            <a:ext cx="2132315" cy="3170099"/>
           </a:xfrm>
           <a:prstGeom prst="rect">
             <a:avLst/>
@@ -9892,28 +10416,24 @@
           <a:noFill/>
         </p:spPr>
         <p:txBody>
-          <a:bodyPr wrap="square" rtlCol="0">
+          <a:bodyPr wrap="none" rtlCol="0">
             <a:spAutoFit/>
           </a:bodyPr>
           <a:lstStyle/>
           <a:p>
             <a:r>
-              <a:rPr lang="en-US" sz="6000" dirty="0">
-                <a:solidFill>
-                  <a:srgbClr val="FF0000"/>
-                </a:solidFill>
-              </a:rPr>
-              <a:t>FUN WITH RANGES</a:t>
-            </a:r>
-          </a:p>
-        </p:txBody>
-      </p:sp>
-      <p:sp>
-        <p:nvSpPr>
-          <p:cNvPr id="2" name="TextBox 1">
-            <a:extLst>
-              <a:ext uri="{FF2B5EF4-FFF2-40B4-BE49-F238E27FC236}">
-                <a16:creationId xmlns:a16="http://schemas.microsoft.com/office/drawing/2014/main" id="{D547AD33-8FE1-584E-B510-08C013ACA746}"/>
+              <a:rPr lang="en-US" sz="20000" dirty="0"/>
+              <a:t>2.</a:t>
+            </a:r>
+          </a:p>
+        </p:txBody>
+      </p:sp>
+      <p:sp>
+        <p:nvSpPr>
+          <p:cNvPr id="3" name="TextBox 2">
+            <a:extLst>
+              <a:ext uri="{FF2B5EF4-FFF2-40B4-BE49-F238E27FC236}">
+                <a16:creationId xmlns:a16="http://schemas.microsoft.com/office/drawing/2014/main" id="{E42D67C2-3010-0B46-A3B3-EDDCD41D3FBD}"/>
               </a:ext>
             </a:extLst>
           </p:cNvPr>
@@ -9922,8 +10442,8 @@
         </p:nvSpPr>
         <p:spPr>
           <a:xfrm>
-            <a:off x="6078828" y="3063962"/>
-            <a:ext cx="184731" cy="369332"/>
+            <a:off x="2546667" y="1288033"/>
+            <a:ext cx="9294917" cy="3477875"/>
           </a:xfrm>
           <a:prstGeom prst="rect">
             <a:avLst/>
@@ -9936,137 +10456,23 @@
           </a:bodyPr>
           <a:lstStyle/>
           <a:p>
-            <a:endParaRPr lang="en-US" dirty="0"/>
-          </a:p>
-        </p:txBody>
-      </p:sp>
-      <p:sp>
-        <p:nvSpPr>
-          <p:cNvPr id="9" name="TextBox 8">
-            <a:extLst>
-              <a:ext uri="{FF2B5EF4-FFF2-40B4-BE49-F238E27FC236}">
-                <a16:creationId xmlns:a16="http://schemas.microsoft.com/office/drawing/2014/main" id="{1B119A5E-C909-7A43-8310-B5F1C6FCE541}"/>
-              </a:ext>
-            </a:extLst>
-          </p:cNvPr>
-          <p:cNvSpPr txBox="1"/>
-          <p:nvPr/>
-        </p:nvSpPr>
-        <p:spPr>
-          <a:xfrm>
-            <a:off x="590309" y="2002010"/>
-            <a:ext cx="10678886" cy="1785104"/>
-          </a:xfrm>
-          <a:prstGeom prst="rect">
-            <a:avLst/>
-          </a:prstGeom>
-          <a:noFill/>
-        </p:spPr>
-        <p:txBody>
-          <a:bodyPr wrap="square" rtlCol="0">
-            <a:spAutoFit/>
-          </a:bodyPr>
-          <a:lstStyle/>
-          <a:p>
-            <a:r>
-              <a:rPr lang="en-US" sz="2200" dirty="0">
-                <a:sym typeface="Wingdings" pitchFamily="2" charset="2"/>
-              </a:rPr>
-              <a:t>Consider this for loop:</a:t>
-            </a:r>
-          </a:p>
-          <a:p>
-            <a:endParaRPr lang="en-US" sz="2200" dirty="0">
-              <a:sym typeface="Wingdings" pitchFamily="2" charset="2"/>
-            </a:endParaRPr>
-          </a:p>
-          <a:p>
-            <a:r>
-              <a:rPr lang="en-US" sz="2200" dirty="0" err="1">
-                <a:sym typeface="Wingdings" pitchFamily="2" charset="2"/>
-              </a:rPr>
-              <a:t>myString</a:t>
-            </a:r>
-            <a:r>
-              <a:rPr lang="en-US" sz="2200" dirty="0">
-                <a:sym typeface="Wingdings" pitchFamily="2" charset="2"/>
-              </a:rPr>
-              <a:t> = "hello world"</a:t>
-            </a:r>
-          </a:p>
-          <a:p>
-            <a:r>
-              <a:rPr lang="en-US" sz="2200" dirty="0">
-                <a:sym typeface="Wingdings" pitchFamily="2" charset="2"/>
-              </a:rPr>
-              <a:t>for x in range(</a:t>
-            </a:r>
-            <a:r>
-              <a:rPr lang="en-US" sz="2200" dirty="0" err="1">
-                <a:sym typeface="Wingdings" pitchFamily="2" charset="2"/>
-              </a:rPr>
-              <a:t>len</a:t>
-            </a:r>
-            <a:r>
-              <a:rPr lang="en-US" sz="2200" dirty="0">
-                <a:sym typeface="Wingdings" pitchFamily="2" charset="2"/>
-              </a:rPr>
-              <a:t>(</a:t>
-            </a:r>
-            <a:r>
-              <a:rPr lang="en-US" sz="2200" dirty="0" err="1">
-                <a:sym typeface="Wingdings" pitchFamily="2" charset="2"/>
-              </a:rPr>
-              <a:t>myString</a:t>
-            </a:r>
-            <a:r>
-              <a:rPr lang="en-US" sz="2200" dirty="0">
-                <a:sym typeface="Wingdings" pitchFamily="2" charset="2"/>
-              </a:rPr>
-              <a:t>)):</a:t>
-            </a:r>
-          </a:p>
-          <a:p>
-            <a:r>
-              <a:rPr lang="en-US" sz="2200" dirty="0">
-                <a:sym typeface="Wingdings" pitchFamily="2" charset="2"/>
-              </a:rPr>
-              <a:t>	print(x)</a:t>
-            </a:r>
-          </a:p>
-        </p:txBody>
-      </p:sp>
-      <p:sp>
-        <p:nvSpPr>
-          <p:cNvPr id="6" name="TextBox 5">
-            <a:extLst>
-              <a:ext uri="{FF2B5EF4-FFF2-40B4-BE49-F238E27FC236}">
-                <a16:creationId xmlns:a16="http://schemas.microsoft.com/office/drawing/2014/main" id="{70752080-E5A5-9F4B-9CBE-5A92C332040F}"/>
-              </a:ext>
-            </a:extLst>
-          </p:cNvPr>
-          <p:cNvSpPr txBox="1"/>
-          <p:nvPr/>
-        </p:nvSpPr>
-        <p:spPr>
-          <a:xfrm>
-            <a:off x="6078828" y="2694630"/>
-            <a:ext cx="2164952" cy="369332"/>
-          </a:xfrm>
-          <a:prstGeom prst="rect">
-            <a:avLst/>
-          </a:prstGeom>
-          <a:noFill/>
-        </p:spPr>
-        <p:txBody>
-          <a:bodyPr wrap="none" rtlCol="0">
-            <a:spAutoFit/>
-          </a:bodyPr>
-          <a:lstStyle/>
-          <a:p>
-            <a:r>
-              <a:rPr lang="en-US" dirty="0"/>
-              <a:t>what does this print?</a:t>
+            <a:r>
+              <a:rPr lang="en-US" sz="11000" dirty="0">
+                <a:solidFill>
+                  <a:srgbClr val="FF0000"/>
+                </a:solidFill>
+              </a:rPr>
+              <a:t>STRING</a:t>
+            </a:r>
+          </a:p>
+          <a:p>
+            <a:r>
+              <a:rPr lang="en-US" sz="11000" dirty="0">
+                <a:solidFill>
+                  <a:srgbClr val="FF0000"/>
+                </a:solidFill>
+              </a:rPr>
+              <a:t>MANIPULATION</a:t>
             </a:r>
           </a:p>
         </p:txBody>
@@ -10074,7 +10480,7 @@
     </p:spTree>
     <p:extLst>
       <p:ext uri="{BB962C8B-B14F-4D97-AF65-F5344CB8AC3E}">
-        <p14:creationId xmlns:p14="http://schemas.microsoft.com/office/powerpoint/2010/main" val="1740364638"/>
+        <p14:creationId xmlns:p14="http://schemas.microsoft.com/office/powerpoint/2010/main" val="1380732152"/>
       </p:ext>
     </p:extLst>
   </p:cSld>
@@ -10135,7 +10541,7 @@
                   <a:srgbClr val="FF0000"/>
                 </a:solidFill>
               </a:rPr>
-              <a:t>FUN WITH RANGES</a:t>
+              <a:t>STRING METHODS</a:t>
             </a:r>
           </a:p>
         </p:txBody>
@@ -10186,8 +10592,8 @@
         </p:nvSpPr>
         <p:spPr>
           <a:xfrm>
-            <a:off x="590309" y="2002010"/>
-            <a:ext cx="10678886" cy="1785104"/>
+            <a:off x="590309" y="1422461"/>
+            <a:ext cx="11837804" cy="4154984"/>
           </a:xfrm>
           <a:prstGeom prst="rect">
             <a:avLst/>
@@ -10200,11 +10606,15 @@
           </a:bodyPr>
           <a:lstStyle/>
           <a:p>
+            <a:pPr marL="342900" indent="-342900">
+              <a:buFont typeface="Arial" panose="020B0604020202020204" pitchFamily="34" charset="0"/>
+              <a:buChar char="•"/>
+            </a:pPr>
             <a:r>
               <a:rPr lang="en-US" sz="2200" dirty="0">
                 <a:sym typeface="Wingdings" pitchFamily="2" charset="2"/>
               </a:rPr>
-              <a:t>Consider this for loop:</a:t>
+              <a:t>See textbook for a reference of string methods: </a:t>
             </a:r>
           </a:p>
           <a:p>
@@ -10213,6 +10623,27 @@
             </a:endParaRPr>
           </a:p>
           <a:p>
+            <a:pPr marL="342900" indent="-342900">
+              <a:buFont typeface="Arial" panose="020B0604020202020204" pitchFamily="34" charset="0"/>
+              <a:buChar char="•"/>
+            </a:pPr>
+            <a:r>
+              <a:rPr lang="en-US" sz="2200" dirty="0">
+                <a:sym typeface="Wingdings" pitchFamily="2" charset="2"/>
+              </a:rPr>
+              <a:t>try out: find, replace, strip</a:t>
+            </a:r>
+          </a:p>
+          <a:p>
+            <a:pPr marL="342900" indent="-342900">
+              <a:buFont typeface="Arial" panose="020B0604020202020204" pitchFamily="34" charset="0"/>
+              <a:buChar char="•"/>
+            </a:pPr>
+            <a:endParaRPr lang="en-US" sz="2200" dirty="0">
+              <a:sym typeface="Wingdings" pitchFamily="2" charset="2"/>
+            </a:endParaRPr>
+          </a:p>
+          <a:p>
             <a:r>
               <a:rPr lang="en-US" sz="2200" dirty="0" err="1">
                 <a:sym typeface="Wingdings" pitchFamily="2" charset="2"/>
@@ -10223,7 +10654,7 @@
               <a:rPr lang="en-US" sz="2200" dirty="0">
                 <a:sym typeface="Wingdings" pitchFamily="2" charset="2"/>
               </a:rPr>
-              <a:t> = "hello world"</a:t>
+              <a:t> = "  hello world.    "</a:t>
             </a:r>
           </a:p>
           <a:p>
@@ -10231,20 +10662,22 @@
               <a:rPr lang="en-US" sz="2200" dirty="0">
                 <a:sym typeface="Wingdings" pitchFamily="2" charset="2"/>
               </a:rPr>
-              <a:t>for x in range(</a:t>
+              <a:t>print(</a:t>
             </a:r>
             <a:r>
               <a:rPr lang="en-US" sz="2200" dirty="0" err="1">
                 <a:sym typeface="Wingdings" pitchFamily="2" charset="2"/>
               </a:rPr>
-              <a:t>len</a:t>
+              <a:t>myString.strip</a:t>
             </a:r>
             <a:r>
               <a:rPr lang="en-US" sz="2200" dirty="0">
                 <a:sym typeface="Wingdings" pitchFamily="2" charset="2"/>
               </a:rPr>
-              <a:t>(</a:t>
-            </a:r>
+              <a:t>())		 prints "hello world"</a:t>
+            </a:r>
+          </a:p>
+          <a:p>
             <a:r>
               <a:rPr lang="en-US" sz="2200" dirty="0" err="1">
                 <a:sym typeface="Wingdings" pitchFamily="2" charset="2"/>
@@ -10255,204 +10688,104 @@
               <a:rPr lang="en-US" sz="2200" dirty="0">
                 <a:sym typeface="Wingdings" pitchFamily="2" charset="2"/>
               </a:rPr>
-              <a:t>)):</a:t>
-            </a:r>
-          </a:p>
-          <a:p>
+              <a:t> = </a:t>
+            </a:r>
+            <a:r>
+              <a:rPr lang="en-US" sz="2200" dirty="0" err="1">
+                <a:sym typeface="Wingdings" pitchFamily="2" charset="2"/>
+              </a:rPr>
+              <a:t>myString.strip</a:t>
+            </a:r>
             <a:r>
               <a:rPr lang="en-US" sz="2200" dirty="0">
                 <a:sym typeface="Wingdings" pitchFamily="2" charset="2"/>
               </a:rPr>
-              <a:t>	print(x)</a:t>
-            </a:r>
-          </a:p>
-        </p:txBody>
-      </p:sp>
-      <p:sp>
-        <p:nvSpPr>
-          <p:cNvPr id="6" name="TextBox 5">
-            <a:extLst>
-              <a:ext uri="{FF2B5EF4-FFF2-40B4-BE49-F238E27FC236}">
-                <a16:creationId xmlns:a16="http://schemas.microsoft.com/office/drawing/2014/main" id="{70752080-E5A5-9F4B-9CBE-5A92C332040F}"/>
-              </a:ext>
-            </a:extLst>
-          </p:cNvPr>
-          <p:cNvSpPr txBox="1"/>
-          <p:nvPr/>
-        </p:nvSpPr>
-        <p:spPr>
-          <a:xfrm>
-            <a:off x="6078828" y="2694630"/>
-            <a:ext cx="2164952" cy="369332"/>
-          </a:xfrm>
-          <a:prstGeom prst="rect">
-            <a:avLst/>
-          </a:prstGeom>
-          <a:noFill/>
-        </p:spPr>
-        <p:txBody>
-          <a:bodyPr wrap="none" rtlCol="0">
-            <a:spAutoFit/>
-          </a:bodyPr>
-          <a:lstStyle/>
-          <a:p>
-            <a:r>
-              <a:rPr lang="en-US" dirty="0"/>
-              <a:t>what does this print?</a:t>
-            </a:r>
-          </a:p>
-        </p:txBody>
-      </p:sp>
-      <p:sp>
-        <p:nvSpPr>
-          <p:cNvPr id="4" name="TextBox 3">
-            <a:extLst>
-              <a:ext uri="{FF2B5EF4-FFF2-40B4-BE49-F238E27FC236}">
-                <a16:creationId xmlns:a16="http://schemas.microsoft.com/office/drawing/2014/main" id="{42110F1D-BCA9-DC46-A70F-2F851FD3F0F4}"/>
-              </a:ext>
-            </a:extLst>
-          </p:cNvPr>
-          <p:cNvSpPr txBox="1"/>
-          <p:nvPr/>
-        </p:nvSpPr>
-        <p:spPr>
-          <a:xfrm>
-            <a:off x="9247031" y="2002010"/>
-            <a:ext cx="1342034" cy="3139321"/>
-          </a:xfrm>
-          <a:prstGeom prst="rect">
-            <a:avLst/>
-          </a:prstGeom>
-          <a:solidFill>
-            <a:schemeClr val="accent1"/>
-          </a:solidFill>
-          <a:ln>
-            <a:solidFill>
-              <a:schemeClr val="accent1"/>
-            </a:solidFill>
-          </a:ln>
-        </p:spPr>
-        <p:txBody>
-          <a:bodyPr wrap="none" rtlCol="0">
-            <a:spAutoFit/>
-          </a:bodyPr>
-          <a:lstStyle/>
-          <a:p>
-            <a:r>
-              <a:rPr lang="en-US" dirty="0">
-                <a:solidFill>
-                  <a:srgbClr val="FFFF00"/>
-                </a:solidFill>
-              </a:rPr>
-              <a:t>answer:  	0 </a:t>
-            </a:r>
-          </a:p>
-          <a:p>
-            <a:r>
-              <a:rPr lang="en-US" dirty="0">
-                <a:solidFill>
-                  <a:srgbClr val="FFFF00"/>
-                </a:solidFill>
-              </a:rPr>
-              <a:t>	1</a:t>
-            </a:r>
-          </a:p>
-          <a:p>
-            <a:r>
-              <a:rPr lang="en-US" dirty="0">
-                <a:solidFill>
-                  <a:srgbClr val="FFFF00"/>
-                </a:solidFill>
-              </a:rPr>
-              <a:t>	2</a:t>
-            </a:r>
-          </a:p>
-          <a:p>
-            <a:r>
-              <a:rPr lang="en-US" dirty="0">
-                <a:solidFill>
-                  <a:srgbClr val="FFFF00"/>
-                </a:solidFill>
-              </a:rPr>
-              <a:t>	3</a:t>
-            </a:r>
-          </a:p>
-          <a:p>
-            <a:r>
-              <a:rPr lang="en-US" dirty="0">
-                <a:solidFill>
-                  <a:srgbClr val="FFFF00"/>
-                </a:solidFill>
-              </a:rPr>
-              <a:t>	4</a:t>
-            </a:r>
-          </a:p>
-          <a:p>
-            <a:r>
-              <a:rPr lang="en-US" dirty="0">
-                <a:solidFill>
-                  <a:srgbClr val="FFFF00"/>
-                </a:solidFill>
-              </a:rPr>
-              <a:t>	5</a:t>
-            </a:r>
-          </a:p>
-          <a:p>
-            <a:r>
-              <a:rPr lang="en-US" dirty="0">
-                <a:solidFill>
-                  <a:srgbClr val="FFFF00"/>
-                </a:solidFill>
-              </a:rPr>
-              <a:t>	6</a:t>
-            </a:r>
-          </a:p>
-          <a:p>
-            <a:r>
-              <a:rPr lang="en-US" dirty="0">
-                <a:solidFill>
-                  <a:srgbClr val="FFFF00"/>
-                </a:solidFill>
-              </a:rPr>
-              <a:t>	7</a:t>
-            </a:r>
-          </a:p>
-          <a:p>
-            <a:r>
-              <a:rPr lang="en-US" dirty="0">
-                <a:solidFill>
-                  <a:srgbClr val="FFFF00"/>
-                </a:solidFill>
-              </a:rPr>
-              <a:t>	8</a:t>
-            </a:r>
-          </a:p>
-          <a:p>
-            <a:r>
-              <a:rPr lang="en-US" dirty="0">
-                <a:solidFill>
-                  <a:srgbClr val="FFFF00"/>
-                </a:solidFill>
-              </a:rPr>
-              <a:t>	9</a:t>
-            </a:r>
-          </a:p>
-          <a:p>
-            <a:r>
-              <a:rPr lang="en-US" dirty="0">
-                <a:solidFill>
-                  <a:srgbClr val="FFFF00"/>
-                </a:solidFill>
-              </a:rPr>
-              <a:t>	10</a:t>
-            </a:r>
+              <a:t>())	</a:t>
+            </a:r>
+          </a:p>
+          <a:p>
+            <a:r>
+              <a:rPr lang="en-US" sz="2200" dirty="0">
+                <a:sym typeface="Wingdings" pitchFamily="2" charset="2"/>
+              </a:rPr>
+              <a:t>print(</a:t>
+            </a:r>
+            <a:r>
+              <a:rPr lang="en-US" sz="2200" dirty="0" err="1">
+                <a:sym typeface="Wingdings" pitchFamily="2" charset="2"/>
+              </a:rPr>
+              <a:t>myString.find</a:t>
+            </a:r>
+            <a:r>
+              <a:rPr lang="en-US" sz="2200" dirty="0">
+                <a:sym typeface="Wingdings" pitchFamily="2" charset="2"/>
+              </a:rPr>
+              <a:t>('</a:t>
+            </a:r>
+            <a:r>
+              <a:rPr lang="en-US" sz="2200" dirty="0" err="1">
+                <a:sym typeface="Wingdings" pitchFamily="2" charset="2"/>
+              </a:rPr>
+              <a:t>llo</a:t>
+            </a:r>
+            <a:r>
+              <a:rPr lang="en-US" sz="2200" dirty="0">
+                <a:sym typeface="Wingdings" pitchFamily="2" charset="2"/>
+              </a:rPr>
+              <a:t>'))	 prints 2</a:t>
+            </a:r>
+          </a:p>
+          <a:p>
+            <a:r>
+              <a:rPr lang="en-US" sz="2200" dirty="0">
+                <a:sym typeface="Wingdings" pitchFamily="2" charset="2"/>
+              </a:rPr>
+              <a:t>print(</a:t>
+            </a:r>
+            <a:r>
+              <a:rPr lang="en-US" sz="2200" dirty="0" err="1">
+                <a:sym typeface="Wingdings" pitchFamily="2" charset="2"/>
+              </a:rPr>
+              <a:t>myString.find</a:t>
+            </a:r>
+            <a:r>
+              <a:rPr lang="en-US" sz="2200" dirty="0">
+                <a:sym typeface="Wingdings" pitchFamily="2" charset="2"/>
+              </a:rPr>
+              <a:t>('goodbye'))	 prints -1</a:t>
+            </a:r>
+          </a:p>
+          <a:p>
+            <a:r>
+              <a:rPr lang="en-US" sz="2200" dirty="0">
+                <a:sym typeface="Wingdings" pitchFamily="2" charset="2"/>
+              </a:rPr>
+              <a:t>print(</a:t>
+            </a:r>
+            <a:r>
+              <a:rPr lang="en-US" sz="2200" dirty="0" err="1">
+                <a:sym typeface="Wingdings" pitchFamily="2" charset="2"/>
+              </a:rPr>
+              <a:t>myString.replace</a:t>
+            </a:r>
+            <a:r>
+              <a:rPr lang="en-US" sz="2200" dirty="0">
+                <a:sym typeface="Wingdings" pitchFamily="2" charset="2"/>
+              </a:rPr>
+              <a:t>('world' 'operator please give me number 9'))  prints "hello operator 										please give me number 9"</a:t>
+            </a:r>
+          </a:p>
+          <a:p>
+            <a:endParaRPr lang="en-US" sz="2200" dirty="0">
+              <a:sym typeface="Wingdings" pitchFamily="2" charset="2"/>
+            </a:endParaRPr>
           </a:p>
         </p:txBody>
       </p:sp>
     </p:spTree>
     <p:extLst>
       <p:ext uri="{BB962C8B-B14F-4D97-AF65-F5344CB8AC3E}">
-        <p14:creationId xmlns:p14="http://schemas.microsoft.com/office/powerpoint/2010/main" val="791396677"/>
+        <p14:creationId xmlns:p14="http://schemas.microsoft.com/office/powerpoint/2010/main" val="2322657959"/>
       </p:ext>
     </p:extLst>
   </p:cSld>
@@ -10513,7 +10846,7 @@
                   <a:srgbClr val="FF0000"/>
                 </a:solidFill>
               </a:rPr>
-              <a:t>FUN WITH RANGES</a:t>
+              <a:t>SLICE NOTATION</a:t>
             </a:r>
           </a:p>
         </p:txBody>
@@ -10564,8 +10897,8 @@
         </p:nvSpPr>
         <p:spPr>
           <a:xfrm>
-            <a:off x="590309" y="2002010"/>
-            <a:ext cx="10678886" cy="1785104"/>
+            <a:off x="590309" y="2633075"/>
+            <a:ext cx="10678886" cy="1446550"/>
           </a:xfrm>
           <a:prstGeom prst="rect">
             <a:avLst/>
@@ -10582,7 +10915,7 @@
               <a:rPr lang="en-US" sz="2200" dirty="0">
                 <a:sym typeface="Wingdings" pitchFamily="2" charset="2"/>
               </a:rPr>
-              <a:t>Consider this for loop:</a:t>
+              <a:t>We've seen a couple of ways to get characters from strings by index:</a:t>
             </a:r>
           </a:p>
           <a:p>
@@ -10601,7 +10934,7 @@
               <a:rPr lang="en-US" sz="2200" dirty="0">
                 <a:sym typeface="Wingdings" pitchFamily="2" charset="2"/>
               </a:rPr>
-              <a:t> = "hello world"</a:t>
+              <a:t> = "hello"</a:t>
             </a:r>
           </a:p>
           <a:p>
@@ -10609,49 +10942,78 @@
               <a:rPr lang="en-US" sz="2200" dirty="0">
                 <a:sym typeface="Wingdings" pitchFamily="2" charset="2"/>
               </a:rPr>
-              <a:t>for x in range(</a:t>
+              <a:t>print(</a:t>
             </a:r>
             <a:r>
               <a:rPr lang="en-US" sz="2200" dirty="0" err="1">
                 <a:sym typeface="Wingdings" pitchFamily="2" charset="2"/>
               </a:rPr>
-              <a:t>len</a:t>
+              <a:t>myString</a:t>
             </a:r>
             <a:r>
               <a:rPr lang="en-US" sz="2200" dirty="0">
                 <a:sym typeface="Wingdings" pitchFamily="2" charset="2"/>
               </a:rPr>
-              <a:t>(</a:t>
-            </a:r>
-            <a:r>
-              <a:rPr lang="en-US" sz="2200" dirty="0" err="1">
-                <a:sym typeface="Wingdings" pitchFamily="2" charset="2"/>
-              </a:rPr>
-              <a:t>myString</a:t>
-            </a:r>
-            <a:r>
-              <a:rPr lang="en-US" sz="2200" dirty="0">
-                <a:sym typeface="Wingdings" pitchFamily="2" charset="2"/>
-              </a:rPr>
-              <a:t>)):</a:t>
-            </a:r>
-          </a:p>
-          <a:p>
-            <a:r>
-              <a:rPr lang="en-US" sz="2200" dirty="0">
-                <a:sym typeface="Wingdings" pitchFamily="2" charset="2"/>
-              </a:rPr>
-              <a:t>	print(x)</a:t>
-            </a:r>
-          </a:p>
-        </p:txBody>
-      </p:sp>
-      <p:sp>
-        <p:nvSpPr>
-          <p:cNvPr id="6" name="TextBox 5">
-            <a:extLst>
-              <a:ext uri="{FF2B5EF4-FFF2-40B4-BE49-F238E27FC236}">
-                <a16:creationId xmlns:a16="http://schemas.microsoft.com/office/drawing/2014/main" id="{70752080-E5A5-9F4B-9CBE-5A92C332040F}"/>
+              <a:t>[0])</a:t>
+            </a:r>
+          </a:p>
+        </p:txBody>
+      </p:sp>
+      <p:sp>
+        <p:nvSpPr>
+          <p:cNvPr id="5" name="Down Arrow 4">
+            <a:extLst>
+              <a:ext uri="{FF2B5EF4-FFF2-40B4-BE49-F238E27FC236}">
+                <a16:creationId xmlns:a16="http://schemas.microsoft.com/office/drawing/2014/main" id="{F6BF44C4-89FF-7C47-B873-D8D9A447216A}"/>
+              </a:ext>
+            </a:extLst>
+          </p:cNvPr>
+          <p:cNvSpPr/>
+          <p:nvPr/>
+        </p:nvSpPr>
+        <p:spPr>
+          <a:xfrm rot="6353669">
+            <a:off x="3108811" y="3651177"/>
+            <a:ext cx="413145" cy="591933"/>
+          </a:xfrm>
+          <a:prstGeom prst="downArrow">
+            <a:avLst>
+              <a:gd name="adj1" fmla="val 50000"/>
+              <a:gd name="adj2" fmla="val 53426"/>
+            </a:avLst>
+          </a:prstGeom>
+        </p:spPr>
+        <p:style>
+          <a:lnRef idx="2">
+            <a:schemeClr val="accent1">
+              <a:shade val="50000"/>
+            </a:schemeClr>
+          </a:lnRef>
+          <a:fillRef idx="1">
+            <a:schemeClr val="accent1"/>
+          </a:fillRef>
+          <a:effectRef idx="0">
+            <a:schemeClr val="accent1"/>
+          </a:effectRef>
+          <a:fontRef idx="minor">
+            <a:schemeClr val="lt1"/>
+          </a:fontRef>
+        </p:style>
+        <p:txBody>
+          <a:bodyPr rtlCol="0" anchor="ctr"/>
+          <a:lstStyle/>
+          <a:p>
+            <a:pPr algn="ctr"/>
+            <a:endParaRPr lang="en-US"/>
+          </a:p>
+        </p:txBody>
+      </p:sp>
+      <p:sp>
+        <p:nvSpPr>
+          <p:cNvPr id="4" name="TextBox 3">
+            <a:extLst>
+              <a:ext uri="{FF2B5EF4-FFF2-40B4-BE49-F238E27FC236}">
+                <a16:creationId xmlns:a16="http://schemas.microsoft.com/office/drawing/2014/main" id="{03BBB3F0-5DD2-4F4D-9386-D0C0225D6494}"/>
               </a:ext>
             </a:extLst>
           </p:cNvPr>
@@ -10660,8 +11022,8 @@
         </p:nvSpPr>
         <p:spPr>
           <a:xfrm>
-            <a:off x="6078828" y="2694630"/>
-            <a:ext cx="2835071" cy="2308324"/>
+            <a:off x="4082603" y="3857542"/>
+            <a:ext cx="1003288" cy="369332"/>
           </a:xfrm>
           <a:prstGeom prst="rect">
             <a:avLst/>
@@ -10676,223 +11038,7 @@
           <a:p>
             <a:r>
               <a:rPr lang="en-US" dirty="0"/>
-              <a:t>this may not seem terribly</a:t>
-            </a:r>
-          </a:p>
-          <a:p>
-            <a:r>
-              <a:rPr lang="en-US" dirty="0"/>
-              <a:t>useful, but notice that these</a:t>
-            </a:r>
-          </a:p>
-          <a:p>
-            <a:r>
-              <a:rPr lang="en-US" dirty="0"/>
-              <a:t>are the indices of all the</a:t>
-            </a:r>
-          </a:p>
-          <a:p>
-            <a:r>
-              <a:rPr lang="en-US" dirty="0"/>
-              <a:t>characters in </a:t>
-            </a:r>
-            <a:r>
-              <a:rPr lang="en-US" dirty="0" err="1"/>
-              <a:t>myString</a:t>
-            </a:r>
-            <a:endParaRPr lang="en-US" dirty="0"/>
-          </a:p>
-          <a:p>
-            <a:endParaRPr lang="en-US" dirty="0"/>
-          </a:p>
-          <a:p>
-            <a:r>
-              <a:rPr lang="en-US" dirty="0" err="1"/>
-              <a:t>myString</a:t>
-            </a:r>
-            <a:r>
-              <a:rPr lang="en-US" dirty="0"/>
-              <a:t>[0] </a:t>
-            </a:r>
-            <a:r>
-              <a:rPr lang="en-US" dirty="0">
-                <a:sym typeface="Wingdings" pitchFamily="2" charset="2"/>
-              </a:rPr>
-              <a:t> 	h</a:t>
-            </a:r>
-          </a:p>
-          <a:p>
-            <a:r>
-              <a:rPr lang="en-US" dirty="0" err="1">
-                <a:sym typeface="Wingdings" pitchFamily="2" charset="2"/>
-              </a:rPr>
-              <a:t>myString</a:t>
-            </a:r>
-            <a:r>
-              <a:rPr lang="en-US" dirty="0">
-                <a:sym typeface="Wingdings" pitchFamily="2" charset="2"/>
-              </a:rPr>
-              <a:t>[4]  	o</a:t>
-            </a:r>
-          </a:p>
-          <a:p>
-            <a:r>
-              <a:rPr lang="en-US" dirty="0" err="1">
-                <a:sym typeface="Wingdings" pitchFamily="2" charset="2"/>
-              </a:rPr>
-              <a:t>myString</a:t>
-            </a:r>
-            <a:r>
-              <a:rPr lang="en-US" dirty="0">
-                <a:sym typeface="Wingdings" pitchFamily="2" charset="2"/>
-              </a:rPr>
-              <a:t>[10]  	d</a:t>
-            </a:r>
-          </a:p>
-        </p:txBody>
-      </p:sp>
-      <p:sp>
-        <p:nvSpPr>
-          <p:cNvPr id="4" name="TextBox 3">
-            <a:extLst>
-              <a:ext uri="{FF2B5EF4-FFF2-40B4-BE49-F238E27FC236}">
-                <a16:creationId xmlns:a16="http://schemas.microsoft.com/office/drawing/2014/main" id="{42110F1D-BCA9-DC46-A70F-2F851FD3F0F4}"/>
-              </a:ext>
-            </a:extLst>
-          </p:cNvPr>
-          <p:cNvSpPr txBox="1"/>
-          <p:nvPr/>
-        </p:nvSpPr>
-        <p:spPr>
-          <a:xfrm>
-            <a:off x="9247031" y="2002010"/>
-            <a:ext cx="1342034" cy="3139321"/>
-          </a:xfrm>
-          <a:prstGeom prst="rect">
-            <a:avLst/>
-          </a:prstGeom>
-          <a:solidFill>
-            <a:schemeClr val="accent1"/>
-          </a:solidFill>
-          <a:ln>
-            <a:solidFill>
-              <a:schemeClr val="accent1"/>
-            </a:solidFill>
-          </a:ln>
-        </p:spPr>
-        <p:txBody>
-          <a:bodyPr wrap="none" rtlCol="0">
-            <a:spAutoFit/>
-          </a:bodyPr>
-          <a:lstStyle/>
-          <a:p>
-            <a:r>
-              <a:rPr lang="en-US" dirty="0">
-                <a:solidFill>
-                  <a:srgbClr val="FFFF00"/>
-                </a:solidFill>
-              </a:rPr>
-              <a:t>answer:  	0 </a:t>
-            </a:r>
-          </a:p>
-          <a:p>
-            <a:r>
-              <a:rPr lang="en-US" dirty="0">
-                <a:solidFill>
-                  <a:srgbClr val="FFFF00"/>
-                </a:solidFill>
-              </a:rPr>
-              <a:t>	1</a:t>
-            </a:r>
-          </a:p>
-          <a:p>
-            <a:r>
-              <a:rPr lang="en-US" dirty="0">
-                <a:solidFill>
-                  <a:srgbClr val="FFFF00"/>
-                </a:solidFill>
-              </a:rPr>
-              <a:t>	2</a:t>
-            </a:r>
-          </a:p>
-          <a:p>
-            <a:r>
-              <a:rPr lang="en-US" dirty="0">
-                <a:solidFill>
-                  <a:srgbClr val="FFFF00"/>
-                </a:solidFill>
-              </a:rPr>
-              <a:t>	3</a:t>
-            </a:r>
-          </a:p>
-          <a:p>
-            <a:r>
-              <a:rPr lang="en-US" dirty="0">
-                <a:solidFill>
-                  <a:srgbClr val="FFFF00"/>
-                </a:solidFill>
-              </a:rPr>
-              <a:t>	4</a:t>
-            </a:r>
-          </a:p>
-          <a:p>
-            <a:r>
-              <a:rPr lang="en-US" dirty="0">
-                <a:solidFill>
-                  <a:srgbClr val="FFFF00"/>
-                </a:solidFill>
-              </a:rPr>
-              <a:t>	5</a:t>
-            </a:r>
-          </a:p>
-          <a:p>
-            <a:r>
-              <a:rPr lang="en-US" dirty="0">
-                <a:solidFill>
-                  <a:srgbClr val="FFFF00"/>
-                </a:solidFill>
-              </a:rPr>
-              <a:t>	6</a:t>
-            </a:r>
-          </a:p>
-          <a:p>
-            <a:r>
-              <a:rPr lang="en-US" dirty="0">
-                <a:solidFill>
-                  <a:srgbClr val="FFFF00"/>
-                </a:solidFill>
-              </a:rPr>
-              <a:t>	7</a:t>
-            </a:r>
-          </a:p>
-          <a:p>
-            <a:r>
-              <a:rPr lang="en-US" dirty="0">
-                <a:solidFill>
-                  <a:srgbClr val="FFFF00"/>
-                </a:solidFill>
-              </a:rPr>
-              <a:t>	8</a:t>
-            </a:r>
-          </a:p>
-          <a:p>
-            <a:r>
-              <a:rPr lang="en-US" dirty="0">
-                <a:solidFill>
-                  <a:srgbClr val="FFFF00"/>
-                </a:solidFill>
-              </a:rPr>
-              <a:t>	9</a:t>
-            </a:r>
-          </a:p>
-          <a:p>
-            <a:r>
-              <a:rPr lang="en-US" dirty="0">
-                <a:solidFill>
-                  <a:srgbClr val="FFFF00"/>
-                </a:solidFill>
-              </a:rPr>
-              <a:t>	10</a:t>
+              <a:t>prints 'h'</a:t>
             </a:r>
           </a:p>
         </p:txBody>
@@ -10900,7 +11046,7 @@
     </p:spTree>
     <p:extLst>
       <p:ext uri="{BB962C8B-B14F-4D97-AF65-F5344CB8AC3E}">
-        <p14:creationId xmlns:p14="http://schemas.microsoft.com/office/powerpoint/2010/main" val="597262373"/>
+        <p14:creationId xmlns:p14="http://schemas.microsoft.com/office/powerpoint/2010/main" val="2156631455"/>
       </p:ext>
     </p:extLst>
   </p:cSld>
@@ -11209,7 +11355,7 @@
                   <a:srgbClr val="FF0000"/>
                 </a:solidFill>
               </a:rPr>
-              <a:t>FUN WITH RANGES</a:t>
+              <a:t>SLICE NOTATION</a:t>
             </a:r>
           </a:p>
         </p:txBody>
@@ -11260,8 +11406,8 @@
         </p:nvSpPr>
         <p:spPr>
           <a:xfrm>
-            <a:off x="590309" y="2002010"/>
-            <a:ext cx="10678886" cy="1785104"/>
+            <a:off x="590309" y="2633075"/>
+            <a:ext cx="10678886" cy="2123658"/>
           </a:xfrm>
           <a:prstGeom prst="rect">
             <a:avLst/>
@@ -11278,7 +11424,7 @@
               <a:rPr lang="en-US" sz="2200" dirty="0">
                 <a:sym typeface="Wingdings" pitchFamily="2" charset="2"/>
               </a:rPr>
-              <a:t>Consider this for loop:</a:t>
+              <a:t>We've seen a couple of ways to get characters from strings by index:</a:t>
             </a:r>
           </a:p>
           <a:p>
@@ -11297,7 +11443,7 @@
               <a:rPr lang="en-US" sz="2200" dirty="0">
                 <a:sym typeface="Wingdings" pitchFamily="2" charset="2"/>
               </a:rPr>
-              <a:t> = "hello world"</a:t>
+              <a:t> = "hello"</a:t>
             </a:r>
           </a:p>
           <a:p>
@@ -11305,19 +11451,32 @@
               <a:rPr lang="en-US" sz="2200" dirty="0">
                 <a:sym typeface="Wingdings" pitchFamily="2" charset="2"/>
               </a:rPr>
-              <a:t>for x in range(</a:t>
+              <a:t>print(</a:t>
             </a:r>
             <a:r>
               <a:rPr lang="en-US" sz="2200" dirty="0" err="1">
                 <a:sym typeface="Wingdings" pitchFamily="2" charset="2"/>
               </a:rPr>
-              <a:t>len</a:t>
+              <a:t>myString</a:t>
             </a:r>
             <a:r>
               <a:rPr lang="en-US" sz="2200" dirty="0">
                 <a:sym typeface="Wingdings" pitchFamily="2" charset="2"/>
               </a:rPr>
-              <a:t>(</a:t>
+              <a:t>[0])</a:t>
+            </a:r>
+          </a:p>
+          <a:p>
+            <a:endParaRPr lang="en-US" sz="2200" dirty="0">
+              <a:sym typeface="Wingdings" pitchFamily="2" charset="2"/>
+            </a:endParaRPr>
+          </a:p>
+          <a:p>
+            <a:r>
+              <a:rPr lang="en-US" sz="2200" dirty="0">
+                <a:sym typeface="Wingdings" pitchFamily="2" charset="2"/>
+              </a:rPr>
+              <a:t>print(</a:t>
             </a:r>
             <a:r>
               <a:rPr lang="en-US" sz="2200" dirty="0" err="1">
@@ -11329,129 +11488,17 @@
               <a:rPr lang="en-US" sz="2200" dirty="0">
                 <a:sym typeface="Wingdings" pitchFamily="2" charset="2"/>
               </a:rPr>
-              <a:t>)):</a:t>
-            </a:r>
-          </a:p>
-          <a:p>
-            <a:r>
-              <a:rPr lang="en-US" sz="2200" dirty="0">
-                <a:sym typeface="Wingdings" pitchFamily="2" charset="2"/>
-              </a:rPr>
-              <a:t>	print(</a:t>
-            </a:r>
-            <a:r>
-              <a:rPr lang="en-US" sz="2200" dirty="0" err="1">
-                <a:sym typeface="Wingdings" pitchFamily="2" charset="2"/>
-              </a:rPr>
-              <a:t>myString</a:t>
-            </a:r>
-            <a:r>
-              <a:rPr lang="en-US" sz="2200" dirty="0">
-                <a:sym typeface="Wingdings" pitchFamily="2" charset="2"/>
-              </a:rPr>
-              <a:t>[x])</a:t>
-            </a:r>
-          </a:p>
-        </p:txBody>
-      </p:sp>
-      <p:sp>
-        <p:nvSpPr>
-          <p:cNvPr id="6" name="TextBox 5">
-            <a:extLst>
-              <a:ext uri="{FF2B5EF4-FFF2-40B4-BE49-F238E27FC236}">
-                <a16:creationId xmlns:a16="http://schemas.microsoft.com/office/drawing/2014/main" id="{70752080-E5A5-9F4B-9CBE-5A92C332040F}"/>
-              </a:ext>
-            </a:extLst>
-          </p:cNvPr>
-          <p:cNvSpPr txBox="1"/>
-          <p:nvPr/>
-        </p:nvSpPr>
-        <p:spPr>
-          <a:xfrm>
-            <a:off x="6078828" y="2694630"/>
-            <a:ext cx="3216906" cy="369332"/>
-          </a:xfrm>
-          <a:prstGeom prst="rect">
-            <a:avLst/>
-          </a:prstGeom>
-          <a:noFill/>
-        </p:spPr>
-        <p:txBody>
-          <a:bodyPr wrap="none" rtlCol="0">
-            <a:spAutoFit/>
-          </a:bodyPr>
-          <a:lstStyle/>
-          <a:p>
-            <a:r>
-              <a:rPr lang="en-US" dirty="0"/>
-              <a:t>okay, what what does </a:t>
-            </a:r>
-            <a:r>
-              <a:rPr lang="en-US" i="1" dirty="0"/>
-              <a:t>this</a:t>
-            </a:r>
-            <a:r>
-              <a:rPr lang="en-US" dirty="0"/>
-              <a:t> print?</a:t>
-            </a:r>
-          </a:p>
-        </p:txBody>
-      </p:sp>
-      <p:sp>
-        <p:nvSpPr>
-          <p:cNvPr id="4" name="TextBox 3">
-            <a:extLst>
-              <a:ext uri="{FF2B5EF4-FFF2-40B4-BE49-F238E27FC236}">
-                <a16:creationId xmlns:a16="http://schemas.microsoft.com/office/drawing/2014/main" id="{F6C1EDF6-D09E-854A-ACE5-ED646C608BF5}"/>
-              </a:ext>
-            </a:extLst>
-          </p:cNvPr>
-          <p:cNvSpPr txBox="1"/>
-          <p:nvPr/>
-        </p:nvSpPr>
-        <p:spPr>
-          <a:xfrm>
-            <a:off x="4597758" y="3503226"/>
-            <a:ext cx="3990901" cy="646331"/>
-          </a:xfrm>
-          <a:prstGeom prst="rect">
-            <a:avLst/>
-          </a:prstGeom>
-          <a:noFill/>
-        </p:spPr>
-        <p:txBody>
-          <a:bodyPr wrap="none" rtlCol="0">
-            <a:spAutoFit/>
-          </a:bodyPr>
-          <a:lstStyle/>
-          <a:p>
-            <a:r>
-              <a:rPr lang="en-US" dirty="0"/>
-              <a:t>(remember, the </a:t>
-            </a:r>
-            <a:r>
-              <a:rPr lang="en-US" dirty="0" err="1"/>
-              <a:t>len</a:t>
-            </a:r>
-            <a:r>
-              <a:rPr lang="en-US" dirty="0"/>
-              <a:t>() function prints the </a:t>
-            </a:r>
-          </a:p>
-          <a:p>
-            <a:r>
-              <a:rPr lang="en-US" dirty="0"/>
-              <a:t>length of the string you pass in)</a:t>
-            </a:r>
-          </a:p>
-        </p:txBody>
-      </p:sp>
-      <p:sp>
-        <p:nvSpPr>
-          <p:cNvPr id="7" name="Down Arrow 6">
-            <a:extLst>
-              <a:ext uri="{FF2B5EF4-FFF2-40B4-BE49-F238E27FC236}">
-                <a16:creationId xmlns:a16="http://schemas.microsoft.com/office/drawing/2014/main" id="{1D4D359E-F019-524A-8D04-CEAB5A2180BD}"/>
+              <a:t>[-1])</a:t>
+            </a:r>
+          </a:p>
+        </p:txBody>
+      </p:sp>
+      <p:sp>
+        <p:nvSpPr>
+          <p:cNvPr id="5" name="Down Arrow 4">
+            <a:extLst>
+              <a:ext uri="{FF2B5EF4-FFF2-40B4-BE49-F238E27FC236}">
+                <a16:creationId xmlns:a16="http://schemas.microsoft.com/office/drawing/2014/main" id="{F6BF44C4-89FF-7C47-B873-D8D9A447216A}"/>
               </a:ext>
             </a:extLst>
           </p:cNvPr>
@@ -11460,7 +11507,7 @@
         </p:nvSpPr>
         <p:spPr>
           <a:xfrm rot="6353669">
-            <a:off x="4049961" y="3047725"/>
+            <a:off x="3224721" y="4210637"/>
             <a:ext cx="413145" cy="591933"/>
           </a:xfrm>
           <a:prstGeom prst="downArrow">
@@ -11495,10 +11542,45 @@
           </a:p>
         </p:txBody>
       </p:sp>
+      <p:sp>
+        <p:nvSpPr>
+          <p:cNvPr id="4" name="TextBox 3">
+            <a:extLst>
+              <a:ext uri="{FF2B5EF4-FFF2-40B4-BE49-F238E27FC236}">
+                <a16:creationId xmlns:a16="http://schemas.microsoft.com/office/drawing/2014/main" id="{03BBB3F0-5DD2-4F4D-9386-D0C0225D6494}"/>
+              </a:ext>
+            </a:extLst>
+          </p:cNvPr>
+          <p:cNvSpPr txBox="1"/>
+          <p:nvPr/>
+        </p:nvSpPr>
+        <p:spPr>
+          <a:xfrm>
+            <a:off x="4095482" y="4506603"/>
+            <a:ext cx="1003288" cy="369332"/>
+          </a:xfrm>
+          <a:prstGeom prst="rect">
+            <a:avLst/>
+          </a:prstGeom>
+          <a:noFill/>
+        </p:spPr>
+        <p:txBody>
+          <a:bodyPr wrap="none" rtlCol="0">
+            <a:spAutoFit/>
+          </a:bodyPr>
+          <a:lstStyle/>
+          <a:p>
+            <a:r>
+              <a:rPr lang="en-US" dirty="0"/>
+              <a:t>prints 'o'</a:t>
+            </a:r>
+          </a:p>
+        </p:txBody>
+      </p:sp>
     </p:spTree>
     <p:extLst>
       <p:ext uri="{BB962C8B-B14F-4D97-AF65-F5344CB8AC3E}">
-        <p14:creationId xmlns:p14="http://schemas.microsoft.com/office/powerpoint/2010/main" val="1876066901"/>
+        <p14:creationId xmlns:p14="http://schemas.microsoft.com/office/powerpoint/2010/main" val="1449782185"/>
       </p:ext>
     </p:extLst>
   </p:cSld>
@@ -11559,7 +11641,7 @@
                   <a:srgbClr val="FF0000"/>
                 </a:solidFill>
               </a:rPr>
-              <a:t>FUN WITH RANGES</a:t>
+              <a:t>SLICE NOTATION</a:t>
             </a:r>
           </a:p>
         </p:txBody>
@@ -11610,8 +11692,8 @@
         </p:nvSpPr>
         <p:spPr>
           <a:xfrm>
-            <a:off x="590309" y="2002010"/>
-            <a:ext cx="10678886" cy="1785104"/>
+            <a:off x="590309" y="2633075"/>
+            <a:ext cx="10678886" cy="1446550"/>
           </a:xfrm>
           <a:prstGeom prst="rect">
             <a:avLst/>
@@ -11628,7 +11710,19 @@
               <a:rPr lang="en-US" sz="2200" dirty="0">
                 <a:sym typeface="Wingdings" pitchFamily="2" charset="2"/>
               </a:rPr>
-              <a:t>Consider this for loop:</a:t>
+              <a:t>We can also print a range of characters, using </a:t>
+            </a:r>
+            <a:r>
+              <a:rPr lang="en-US" sz="2200" i="1" dirty="0">
+                <a:sym typeface="Wingdings" pitchFamily="2" charset="2"/>
+              </a:rPr>
+              <a:t>slice notation</a:t>
+            </a:r>
+            <a:r>
+              <a:rPr lang="en-US" sz="2200" dirty="0">
+                <a:sym typeface="Wingdings" pitchFamily="2" charset="2"/>
+              </a:rPr>
+              <a:t>:</a:t>
             </a:r>
           </a:p>
           <a:p>
@@ -11655,153 +11749,29 @@
               <a:rPr lang="en-US" sz="2200" dirty="0">
                 <a:sym typeface="Wingdings" pitchFamily="2" charset="2"/>
               </a:rPr>
-              <a:t>for x in range(</a:t>
+              <a:t>print(</a:t>
             </a:r>
             <a:r>
               <a:rPr lang="en-US" sz="2200" dirty="0" err="1">
                 <a:sym typeface="Wingdings" pitchFamily="2" charset="2"/>
               </a:rPr>
-              <a:t>len</a:t>
+              <a:t>myString</a:t>
             </a:r>
             <a:r>
               <a:rPr lang="en-US" sz="2200" dirty="0">
                 <a:sym typeface="Wingdings" pitchFamily="2" charset="2"/>
               </a:rPr>
-              <a:t>(</a:t>
-            </a:r>
-            <a:r>
-              <a:rPr lang="en-US" sz="2200" dirty="0" err="1">
-                <a:sym typeface="Wingdings" pitchFamily="2" charset="2"/>
-              </a:rPr>
-              <a:t>myString</a:t>
-            </a:r>
-            <a:r>
-              <a:rPr lang="en-US" sz="2200" dirty="0">
-                <a:sym typeface="Wingdings" pitchFamily="2" charset="2"/>
-              </a:rPr>
-              <a:t>)):</a:t>
-            </a:r>
-          </a:p>
-          <a:p>
-            <a:r>
-              <a:rPr lang="en-US" sz="2200" dirty="0">
-                <a:sym typeface="Wingdings" pitchFamily="2" charset="2"/>
-              </a:rPr>
-              <a:t>	print(</a:t>
-            </a:r>
-            <a:r>
-              <a:rPr lang="en-US" sz="2200" dirty="0" err="1">
-                <a:sym typeface="Wingdings" pitchFamily="2" charset="2"/>
-              </a:rPr>
-              <a:t>myString</a:t>
-            </a:r>
-            <a:r>
-              <a:rPr lang="en-US" sz="2200" dirty="0">
-                <a:sym typeface="Wingdings" pitchFamily="2" charset="2"/>
-              </a:rPr>
-              <a:t>[x])</a:t>
-            </a:r>
-          </a:p>
-        </p:txBody>
-      </p:sp>
-      <p:sp>
-        <p:nvSpPr>
-          <p:cNvPr id="6" name="TextBox 5">
-            <a:extLst>
-              <a:ext uri="{FF2B5EF4-FFF2-40B4-BE49-F238E27FC236}">
-                <a16:creationId xmlns:a16="http://schemas.microsoft.com/office/drawing/2014/main" id="{70752080-E5A5-9F4B-9CBE-5A92C332040F}"/>
-              </a:ext>
-            </a:extLst>
-          </p:cNvPr>
-          <p:cNvSpPr txBox="1"/>
-          <p:nvPr/>
-        </p:nvSpPr>
-        <p:spPr>
-          <a:xfrm>
-            <a:off x="6078828" y="2694630"/>
-            <a:ext cx="3216906" cy="369332"/>
-          </a:xfrm>
-          <a:prstGeom prst="rect">
-            <a:avLst/>
-          </a:prstGeom>
-          <a:noFill/>
-        </p:spPr>
-        <p:txBody>
-          <a:bodyPr wrap="none" rtlCol="0">
-            <a:spAutoFit/>
-          </a:bodyPr>
-          <a:lstStyle/>
-          <a:p>
-            <a:r>
-              <a:rPr lang="en-US" dirty="0"/>
-              <a:t>okay, what what does </a:t>
-            </a:r>
-            <a:r>
-              <a:rPr lang="en-US" i="1" dirty="0"/>
-              <a:t>this</a:t>
-            </a:r>
-            <a:r>
-              <a:rPr lang="en-US" dirty="0"/>
-              <a:t> print?</a:t>
-            </a:r>
-          </a:p>
-        </p:txBody>
-      </p:sp>
-      <p:sp>
-        <p:nvSpPr>
-          <p:cNvPr id="4" name="TextBox 3">
-            <a:extLst>
-              <a:ext uri="{FF2B5EF4-FFF2-40B4-BE49-F238E27FC236}">
-                <a16:creationId xmlns:a16="http://schemas.microsoft.com/office/drawing/2014/main" id="{F6C1EDF6-D09E-854A-ACE5-ED646C608BF5}"/>
-              </a:ext>
-            </a:extLst>
-          </p:cNvPr>
-          <p:cNvSpPr txBox="1"/>
-          <p:nvPr/>
-        </p:nvSpPr>
-        <p:spPr>
-          <a:xfrm>
-            <a:off x="4597758" y="3503226"/>
-            <a:ext cx="3990901" cy="646331"/>
-          </a:xfrm>
-          <a:prstGeom prst="rect">
-            <a:avLst/>
-          </a:prstGeom>
-          <a:noFill/>
-        </p:spPr>
-        <p:txBody>
-          <a:bodyPr wrap="none" rtlCol="0">
-            <a:spAutoFit/>
-          </a:bodyPr>
-          <a:lstStyle/>
-          <a:p>
-            <a:r>
-              <a:rPr lang="en-US" dirty="0"/>
-              <a:t>(remember, the </a:t>
-            </a:r>
-            <a:r>
-              <a:rPr lang="en-US" dirty="0" err="1"/>
-              <a:t>len</a:t>
-            </a:r>
-            <a:r>
-              <a:rPr lang="en-US" dirty="0"/>
-              <a:t>() function prints the </a:t>
-            </a:r>
-          </a:p>
-          <a:p>
-            <a:r>
-              <a:rPr lang="en-US" dirty="0"/>
-              <a:t>length of the string you pass in)</a:t>
-            </a:r>
-          </a:p>
-        </p:txBody>
-      </p:sp>
-      <p:sp>
-        <p:nvSpPr>
-          <p:cNvPr id="7" name="Down Arrow 6">
-            <a:extLst>
-              <a:ext uri="{FF2B5EF4-FFF2-40B4-BE49-F238E27FC236}">
-                <a16:creationId xmlns:a16="http://schemas.microsoft.com/office/drawing/2014/main" id="{1D4D359E-F019-524A-8D04-CEAB5A2180BD}"/>
+              <a:t>[6:11])</a:t>
+            </a:r>
+          </a:p>
+        </p:txBody>
+      </p:sp>
+      <p:sp>
+        <p:nvSpPr>
+          <p:cNvPr id="5" name="Down Arrow 4">
+            <a:extLst>
+              <a:ext uri="{FF2B5EF4-FFF2-40B4-BE49-F238E27FC236}">
+                <a16:creationId xmlns:a16="http://schemas.microsoft.com/office/drawing/2014/main" id="{F6BF44C4-89FF-7C47-B873-D8D9A447216A}"/>
               </a:ext>
             </a:extLst>
           </p:cNvPr>
@@ -11810,7 +11780,7 @@
         </p:nvSpPr>
         <p:spPr>
           <a:xfrm rot="6353669">
-            <a:off x="4049961" y="3047725"/>
+            <a:off x="3237600" y="3783659"/>
             <a:ext cx="413145" cy="591933"/>
           </a:xfrm>
           <a:prstGeom prst="downArrow">
@@ -11847,10 +11817,10 @@
       </p:sp>
       <p:sp>
         <p:nvSpPr>
-          <p:cNvPr id="8" name="TextBox 7">
-            <a:extLst>
-              <a:ext uri="{FF2B5EF4-FFF2-40B4-BE49-F238E27FC236}">
-                <a16:creationId xmlns:a16="http://schemas.microsoft.com/office/drawing/2014/main" id="{A56C95C3-5D42-EE40-9D97-2962D3A5A2D7}"/>
+          <p:cNvPr id="4" name="TextBox 3">
+            <a:extLst>
+              <a:ext uri="{FF2B5EF4-FFF2-40B4-BE49-F238E27FC236}">
+                <a16:creationId xmlns:a16="http://schemas.microsoft.com/office/drawing/2014/main" id="{03BBB3F0-5DD2-4F4D-9386-D0C0225D6494}"/>
               </a:ext>
             </a:extLst>
           </p:cNvPr>
@@ -11859,20 +11829,13 @@
         </p:nvSpPr>
         <p:spPr>
           <a:xfrm>
-            <a:off x="9247031" y="2002010"/>
-            <a:ext cx="1282723" cy="3139321"/>
+            <a:off x="4095482" y="4506603"/>
+            <a:ext cx="1421158" cy="369332"/>
           </a:xfrm>
           <a:prstGeom prst="rect">
             <a:avLst/>
           </a:prstGeom>
-          <a:solidFill>
-            <a:schemeClr val="accent1"/>
-          </a:solidFill>
-          <a:ln>
-            <a:solidFill>
-              <a:schemeClr val="accent1"/>
-            </a:solidFill>
-          </a:ln>
+          <a:noFill/>
         </p:spPr>
         <p:txBody>
           <a:bodyPr wrap="none" rtlCol="0">
@@ -11881,112 +11844,8 @@
           <a:lstStyle/>
           <a:p>
             <a:r>
-              <a:rPr lang="en-US" dirty="0">
-                <a:solidFill>
-                  <a:srgbClr val="FFFF00"/>
-                </a:solidFill>
-              </a:rPr>
-              <a:t>answer:  	h </a:t>
-            </a:r>
-          </a:p>
-          <a:p>
-            <a:r>
-              <a:rPr lang="en-US" dirty="0">
-                <a:solidFill>
-                  <a:srgbClr val="FFFF00"/>
-                </a:solidFill>
-              </a:rPr>
-              <a:t>	e</a:t>
-            </a:r>
-          </a:p>
-          <a:p>
-            <a:r>
-              <a:rPr lang="en-US" dirty="0">
-                <a:solidFill>
-                  <a:srgbClr val="FFFF00"/>
-                </a:solidFill>
-              </a:rPr>
-              <a:t>	l</a:t>
-            </a:r>
-          </a:p>
-          <a:p>
-            <a:r>
-              <a:rPr lang="en-US" dirty="0">
-                <a:solidFill>
-                  <a:srgbClr val="FFFF00"/>
-                </a:solidFill>
-              </a:rPr>
-              <a:t>	l</a:t>
-            </a:r>
-          </a:p>
-          <a:p>
-            <a:r>
-              <a:rPr lang="en-US" dirty="0">
-                <a:solidFill>
-                  <a:srgbClr val="FFFF00"/>
-                </a:solidFill>
-              </a:rPr>
-              <a:t>	o</a:t>
-            </a:r>
-          </a:p>
-          <a:p>
-            <a:r>
-              <a:rPr lang="en-US" dirty="0">
-                <a:solidFill>
-                  <a:srgbClr val="FFFF00"/>
-                </a:solidFill>
-              </a:rPr>
-              <a:t>	</a:t>
-            </a:r>
-          </a:p>
-          <a:p>
-            <a:r>
-              <a:rPr lang="en-US" dirty="0">
-                <a:solidFill>
-                  <a:srgbClr val="FFFF00"/>
-                </a:solidFill>
-              </a:rPr>
-              <a:t>	w</a:t>
-            </a:r>
-          </a:p>
-          <a:p>
-            <a:r>
-              <a:rPr lang="en-US" dirty="0">
-                <a:solidFill>
-                  <a:srgbClr val="FFFF00"/>
-                </a:solidFill>
-              </a:rPr>
-              <a:t>	o</a:t>
-            </a:r>
-          </a:p>
-          <a:p>
-            <a:r>
-              <a:rPr lang="en-US" dirty="0">
-                <a:solidFill>
-                  <a:srgbClr val="FFFF00"/>
-                </a:solidFill>
-              </a:rPr>
-              <a:t>	r</a:t>
-            </a:r>
-          </a:p>
-          <a:p>
-            <a:r>
-              <a:rPr lang="en-US" dirty="0">
-                <a:solidFill>
-                  <a:srgbClr val="FFFF00"/>
-                </a:solidFill>
-              </a:rPr>
-              <a:t>	l</a:t>
-            </a:r>
-          </a:p>
-          <a:p>
-            <a:r>
-              <a:rPr lang="en-US" dirty="0">
-                <a:solidFill>
-                  <a:srgbClr val="FFFF00"/>
-                </a:solidFill>
-              </a:rPr>
-              <a:t>	d</a:t>
+              <a:rPr lang="en-US" dirty="0"/>
+              <a:t>prints 'world'</a:t>
             </a:r>
           </a:p>
         </p:txBody>
@@ -11994,7 +11853,7 @@
     </p:spTree>
     <p:extLst>
       <p:ext uri="{BB962C8B-B14F-4D97-AF65-F5344CB8AC3E}">
-        <p14:creationId xmlns:p14="http://schemas.microsoft.com/office/powerpoint/2010/main" val="2710399490"/>
+        <p14:creationId xmlns:p14="http://schemas.microsoft.com/office/powerpoint/2010/main" val="1035794916"/>
       </p:ext>
     </p:extLst>
   </p:cSld>
@@ -12055,7 +11914,7 @@
                   <a:srgbClr val="FF0000"/>
                 </a:solidFill>
               </a:rPr>
-              <a:t>FUN WITH ACCUMULATORS</a:t>
+              <a:t>FUN WITH RANGES</a:t>
             </a:r>
           </a:p>
         </p:txBody>
@@ -12107,7 +11966,7 @@
         <p:spPr>
           <a:xfrm>
             <a:off x="590309" y="2002010"/>
-            <a:ext cx="10678886" cy="2123658"/>
+            <a:ext cx="10678886" cy="1785104"/>
           </a:xfrm>
           <a:prstGeom prst="rect">
             <a:avLst/>
@@ -12148,92 +12007,42 @@
           </a:p>
           <a:p>
             <a:r>
+              <a:rPr lang="en-US" sz="2200" dirty="0">
+                <a:sym typeface="Wingdings" pitchFamily="2" charset="2"/>
+              </a:rPr>
+              <a:t>for x in range(</a:t>
+            </a:r>
+            <a:r>
               <a:rPr lang="en-US" sz="2200" dirty="0" err="1">
                 <a:sym typeface="Wingdings" pitchFamily="2" charset="2"/>
               </a:rPr>
-              <a:t>outputString</a:t>
+              <a:t>len</a:t>
             </a:r>
             <a:r>
               <a:rPr lang="en-US" sz="2200" dirty="0">
                 <a:sym typeface="Wingdings" pitchFamily="2" charset="2"/>
               </a:rPr>
-              <a:t> = ''</a:t>
-            </a:r>
-          </a:p>
-          <a:p>
+              <a:t>(</a:t>
+            </a:r>
+            <a:r>
+              <a:rPr lang="en-US" sz="2200" dirty="0" err="1">
+                <a:sym typeface="Wingdings" pitchFamily="2" charset="2"/>
+              </a:rPr>
+              <a:t>myString</a:t>
+            </a:r>
             <a:r>
               <a:rPr lang="en-US" sz="2200" dirty="0">
                 <a:sym typeface="Wingdings" pitchFamily="2" charset="2"/>
               </a:rPr>
-              <a:t>for x in range(</a:t>
-            </a:r>
-            <a:r>
-              <a:rPr lang="en-US" sz="2200" dirty="0" err="1">
-                <a:sym typeface="Wingdings" pitchFamily="2" charset="2"/>
-              </a:rPr>
-              <a:t>len</a:t>
-            </a:r>
+              <a:t>)):</a:t>
+            </a:r>
+          </a:p>
+          <a:p>
             <a:r>
               <a:rPr lang="en-US" sz="2200" dirty="0">
                 <a:sym typeface="Wingdings" pitchFamily="2" charset="2"/>
               </a:rPr>
-              <a:t>(</a:t>
-            </a:r>
-            <a:r>
-              <a:rPr lang="en-US" sz="2200" dirty="0" err="1">
-                <a:sym typeface="Wingdings" pitchFamily="2" charset="2"/>
-              </a:rPr>
-              <a:t>myString</a:t>
-            </a:r>
-            <a:r>
-              <a:rPr lang="en-US" sz="2200" dirty="0">
-                <a:sym typeface="Wingdings" pitchFamily="2" charset="2"/>
-              </a:rPr>
-              <a:t>)):</a:t>
-            </a:r>
-          </a:p>
-          <a:p>
-            <a:r>
-              <a:rPr lang="en-US" sz="2200" dirty="0">
-                <a:sym typeface="Wingdings" pitchFamily="2" charset="2"/>
-              </a:rPr>
-              <a:t>	</a:t>
-            </a:r>
-            <a:r>
-              <a:rPr lang="en-US" sz="2200" dirty="0" err="1">
-                <a:sym typeface="Wingdings" pitchFamily="2" charset="2"/>
-              </a:rPr>
-              <a:t>outputString</a:t>
-            </a:r>
-            <a:r>
-              <a:rPr lang="en-US" sz="2200" dirty="0">
-                <a:sym typeface="Wingdings" pitchFamily="2" charset="2"/>
-              </a:rPr>
-              <a:t> = </a:t>
-            </a:r>
-            <a:r>
-              <a:rPr lang="en-US" sz="2200" dirty="0" err="1">
-                <a:sym typeface="Wingdings" pitchFamily="2" charset="2"/>
-              </a:rPr>
-              <a:t>outputString</a:t>
-            </a:r>
-            <a:r>
-              <a:rPr lang="en-US" sz="2200" dirty="0">
-                <a:sym typeface="Wingdings" pitchFamily="2" charset="2"/>
-              </a:rPr>
-              <a:t> + </a:t>
-            </a:r>
-            <a:r>
-              <a:rPr lang="en-US" sz="2200" dirty="0" err="1">
-                <a:sym typeface="Wingdings" pitchFamily="2" charset="2"/>
-              </a:rPr>
-              <a:t>myString</a:t>
-            </a:r>
-            <a:r>
-              <a:rPr lang="en-US" sz="2200" dirty="0">
-                <a:sym typeface="Wingdings" pitchFamily="2" charset="2"/>
-              </a:rPr>
-              <a:t>[x]</a:t>
+              <a:t>	print(x)</a:t>
             </a:r>
           </a:p>
         </p:txBody>
@@ -12253,7 +12062,7 @@
         <p:spPr>
           <a:xfrm>
             <a:off x="6078828" y="2694630"/>
-            <a:ext cx="3216906" cy="369332"/>
+            <a:ext cx="2164952" cy="369332"/>
           </a:xfrm>
           <a:prstGeom prst="rect">
             <a:avLst/>
@@ -12268,61 +12077,7 @@
           <a:p>
             <a:r>
               <a:rPr lang="en-US" dirty="0"/>
-              <a:t>okay, what what does </a:t>
-            </a:r>
-            <a:r>
-              <a:rPr lang="en-US" i="1" dirty="0"/>
-              <a:t>this</a:t>
-            </a:r>
-            <a:r>
-              <a:rPr lang="en-US" dirty="0"/>
-              <a:t> print?</a:t>
-            </a:r>
-          </a:p>
-        </p:txBody>
-      </p:sp>
-      <p:sp>
-        <p:nvSpPr>
-          <p:cNvPr id="7" name="TextBox 6">
-            <a:extLst>
-              <a:ext uri="{FF2B5EF4-FFF2-40B4-BE49-F238E27FC236}">
-                <a16:creationId xmlns:a16="http://schemas.microsoft.com/office/drawing/2014/main" id="{4C4125A0-B4D9-384F-A4B6-99DE3259158D}"/>
-              </a:ext>
-            </a:extLst>
-          </p:cNvPr>
-          <p:cNvSpPr txBox="1"/>
-          <p:nvPr/>
-        </p:nvSpPr>
-        <p:spPr>
-          <a:xfrm>
-            <a:off x="9295734" y="4371766"/>
-            <a:ext cx="2037224" cy="369332"/>
-          </a:xfrm>
-          <a:prstGeom prst="rect">
-            <a:avLst/>
-          </a:prstGeom>
-          <a:solidFill>
-            <a:schemeClr val="accent1"/>
-          </a:solidFill>
-          <a:ln>
-            <a:solidFill>
-              <a:schemeClr val="accent1"/>
-            </a:solidFill>
-          </a:ln>
-        </p:spPr>
-        <p:txBody>
-          <a:bodyPr wrap="none" rtlCol="0">
-            <a:spAutoFit/>
-          </a:bodyPr>
-          <a:lstStyle/>
-          <a:p>
-            <a:r>
-              <a:rPr lang="en-US" dirty="0">
-                <a:solidFill>
-                  <a:srgbClr val="FFFF00"/>
-                </a:solidFill>
-              </a:rPr>
-              <a:t>answer: hello world</a:t>
+              <a:t>what does this print?</a:t>
             </a:r>
           </a:p>
         </p:txBody>
@@ -12330,7 +12085,7 @@
     </p:spTree>
     <p:extLst>
       <p:ext uri="{BB962C8B-B14F-4D97-AF65-F5344CB8AC3E}">
-        <p14:creationId xmlns:p14="http://schemas.microsoft.com/office/powerpoint/2010/main" val="2969649936"/>
+        <p14:creationId xmlns:p14="http://schemas.microsoft.com/office/powerpoint/2010/main" val="1740364638"/>
       </p:ext>
     </p:extLst>
   </p:cSld>
@@ -12391,7 +12146,7 @@
                   <a:srgbClr val="FF0000"/>
                 </a:solidFill>
               </a:rPr>
-              <a:t>IN-CLASS DISCUSSION</a:t>
+              <a:t>FUN WITH RANGES</a:t>
             </a:r>
           </a:p>
         </p:txBody>
@@ -12443,7 +12198,7 @@
         <p:spPr>
           <a:xfrm>
             <a:off x="590309" y="2002010"/>
-            <a:ext cx="10678886" cy="4832092"/>
+            <a:ext cx="10678886" cy="1785104"/>
           </a:xfrm>
           <a:prstGeom prst="rect">
             <a:avLst/>
@@ -12460,7 +12215,7 @@
               <a:rPr lang="en-US" sz="2200" dirty="0">
                 <a:sym typeface="Wingdings" pitchFamily="2" charset="2"/>
               </a:rPr>
-              <a:t>Remember that the range function is pretty flexible.</a:t>
+              <a:t>Consider this for loop:</a:t>
             </a:r>
           </a:p>
           <a:p>
@@ -12469,50 +12224,49 @@
             </a:endParaRPr>
           </a:p>
           <a:p>
-            <a:endParaRPr lang="en-US" sz="2200" dirty="0">
-              <a:sym typeface="Wingdings" pitchFamily="2" charset="2"/>
-            </a:endParaRPr>
-          </a:p>
-          <a:p>
+            <a:r>
+              <a:rPr lang="en-US" sz="2200" dirty="0" err="1">
+                <a:sym typeface="Wingdings" pitchFamily="2" charset="2"/>
+              </a:rPr>
+              <a:t>myString</a:t>
+            </a:r>
             <a:r>
               <a:rPr lang="en-US" sz="2200" dirty="0">
                 <a:sym typeface="Wingdings" pitchFamily="2" charset="2"/>
               </a:rPr>
-              <a:t>range(starting point, ending point, increment) </a:t>
-            </a:r>
-          </a:p>
-          <a:p>
-            <a:endParaRPr lang="en-US" sz="2200" dirty="0">
-              <a:sym typeface="Wingdings" pitchFamily="2" charset="2"/>
-            </a:endParaRPr>
+              <a:t> = "hello world"</a:t>
+            </a:r>
           </a:p>
           <a:p>
             <a:r>
               <a:rPr lang="en-US" sz="2200" dirty="0">
                 <a:sym typeface="Wingdings" pitchFamily="2" charset="2"/>
               </a:rPr>
-              <a:t>for x in range(0, 10, 2):</a:t>
-            </a:r>
-          </a:p>
-          <a:p>
+              <a:t>for x in range(</a:t>
+            </a:r>
+            <a:r>
+              <a:rPr lang="en-US" sz="2200" dirty="0" err="1">
+                <a:sym typeface="Wingdings" pitchFamily="2" charset="2"/>
+              </a:rPr>
+              <a:t>len</a:t>
+            </a:r>
             <a:r>
               <a:rPr lang="en-US" sz="2200" dirty="0">
                 <a:sym typeface="Wingdings" pitchFamily="2" charset="2"/>
               </a:rPr>
-              <a:t>	print(x)			</a:t>
-            </a:r>
-          </a:p>
-          <a:p>
-            <a:endParaRPr lang="en-US" sz="2200" dirty="0">
-              <a:sym typeface="Wingdings" pitchFamily="2" charset="2"/>
-            </a:endParaRPr>
-          </a:p>
-          <a:p>
+              <a:t>(</a:t>
+            </a:r>
+            <a:r>
+              <a:rPr lang="en-US" sz="2200" dirty="0" err="1">
+                <a:sym typeface="Wingdings" pitchFamily="2" charset="2"/>
+              </a:rPr>
+              <a:t>myString</a:t>
+            </a:r>
             <a:r>
               <a:rPr lang="en-US" sz="2200" dirty="0">
                 <a:sym typeface="Wingdings" pitchFamily="2" charset="2"/>
               </a:rPr>
-              <a:t>prints: </a:t>
+              <a:t>)):</a:t>
             </a:r>
           </a:p>
           <a:p>
@@ -12520,39 +12274,188 @@
               <a:rPr lang="en-US" sz="2200" dirty="0">
                 <a:sym typeface="Wingdings" pitchFamily="2" charset="2"/>
               </a:rPr>
-              <a:t>0</a:t>
-            </a:r>
-          </a:p>
-          <a:p>
-            <a:r>
-              <a:rPr lang="en-US" sz="2200" dirty="0">
-                <a:sym typeface="Wingdings" pitchFamily="2" charset="2"/>
-              </a:rPr>
-              <a:t>2</a:t>
-            </a:r>
-          </a:p>
-          <a:p>
-            <a:r>
-              <a:rPr lang="en-US" sz="2200" dirty="0">
-                <a:sym typeface="Wingdings" pitchFamily="2" charset="2"/>
-              </a:rPr>
-              <a:t>4</a:t>
-            </a:r>
-          </a:p>
-          <a:p>
-            <a:r>
-              <a:rPr lang="en-US" sz="2200" dirty="0">
-                <a:sym typeface="Wingdings" pitchFamily="2" charset="2"/>
-              </a:rPr>
-              <a:t>6</a:t>
-            </a:r>
-          </a:p>
-          <a:p>
-            <a:r>
-              <a:rPr lang="en-US" sz="2200" dirty="0">
-                <a:sym typeface="Wingdings" pitchFamily="2" charset="2"/>
-              </a:rPr>
-              <a:t>8</a:t>
+              <a:t>	print(x)</a:t>
+            </a:r>
+          </a:p>
+        </p:txBody>
+      </p:sp>
+      <p:sp>
+        <p:nvSpPr>
+          <p:cNvPr id="6" name="TextBox 5">
+            <a:extLst>
+              <a:ext uri="{FF2B5EF4-FFF2-40B4-BE49-F238E27FC236}">
+                <a16:creationId xmlns:a16="http://schemas.microsoft.com/office/drawing/2014/main" id="{70752080-E5A5-9F4B-9CBE-5A92C332040F}"/>
+              </a:ext>
+            </a:extLst>
+          </p:cNvPr>
+          <p:cNvSpPr txBox="1"/>
+          <p:nvPr/>
+        </p:nvSpPr>
+        <p:spPr>
+          <a:xfrm>
+            <a:off x="6078828" y="2694630"/>
+            <a:ext cx="2164952" cy="369332"/>
+          </a:xfrm>
+          <a:prstGeom prst="rect">
+            <a:avLst/>
+          </a:prstGeom>
+          <a:noFill/>
+        </p:spPr>
+        <p:txBody>
+          <a:bodyPr wrap="none" rtlCol="0">
+            <a:spAutoFit/>
+          </a:bodyPr>
+          <a:lstStyle/>
+          <a:p>
+            <a:r>
+              <a:rPr lang="en-US" dirty="0"/>
+              <a:t>what does this print?</a:t>
+            </a:r>
+          </a:p>
+        </p:txBody>
+      </p:sp>
+      <p:sp>
+        <p:nvSpPr>
+          <p:cNvPr id="4" name="TextBox 3">
+            <a:extLst>
+              <a:ext uri="{FF2B5EF4-FFF2-40B4-BE49-F238E27FC236}">
+                <a16:creationId xmlns:a16="http://schemas.microsoft.com/office/drawing/2014/main" id="{42110F1D-BCA9-DC46-A70F-2F851FD3F0F4}"/>
+              </a:ext>
+            </a:extLst>
+          </p:cNvPr>
+          <p:cNvSpPr txBox="1"/>
+          <p:nvPr/>
+        </p:nvSpPr>
+        <p:spPr>
+          <a:xfrm>
+            <a:off x="9247031" y="2002010"/>
+            <a:ext cx="1342034" cy="3139321"/>
+          </a:xfrm>
+          <a:prstGeom prst="rect">
+            <a:avLst/>
+          </a:prstGeom>
+          <a:solidFill>
+            <a:schemeClr val="accent1"/>
+          </a:solidFill>
+          <a:ln>
+            <a:solidFill>
+              <a:schemeClr val="accent1"/>
+            </a:solidFill>
+          </a:ln>
+        </p:spPr>
+        <p:txBody>
+          <a:bodyPr wrap="none" rtlCol="0">
+            <a:spAutoFit/>
+          </a:bodyPr>
+          <a:lstStyle/>
+          <a:p>
+            <a:r>
+              <a:rPr lang="en-US" dirty="0">
+                <a:solidFill>
+                  <a:srgbClr val="FFFF00"/>
+                </a:solidFill>
+              </a:rPr>
+              <a:t>answer:  	0 </a:t>
+            </a:r>
+          </a:p>
+          <a:p>
+            <a:r>
+              <a:rPr lang="en-US" dirty="0">
+                <a:solidFill>
+                  <a:srgbClr val="FFFF00"/>
+                </a:solidFill>
+              </a:rPr>
+              <a:t>	1</a:t>
+            </a:r>
+          </a:p>
+          <a:p>
+            <a:r>
+              <a:rPr lang="en-US" dirty="0">
+                <a:solidFill>
+                  <a:srgbClr val="FFFF00"/>
+                </a:solidFill>
+              </a:rPr>
+              <a:t>	2</a:t>
+            </a:r>
+          </a:p>
+          <a:p>
+            <a:r>
+              <a:rPr lang="en-US" dirty="0">
+                <a:solidFill>
+                  <a:srgbClr val="FFFF00"/>
+                </a:solidFill>
+              </a:rPr>
+              <a:t>	3</a:t>
+            </a:r>
+          </a:p>
+          <a:p>
+            <a:r>
+              <a:rPr lang="en-US" dirty="0">
+                <a:solidFill>
+                  <a:srgbClr val="FFFF00"/>
+                </a:solidFill>
+              </a:rPr>
+              <a:t>	4</a:t>
+            </a:r>
+          </a:p>
+          <a:p>
+            <a:r>
+              <a:rPr lang="en-US" dirty="0">
+                <a:solidFill>
+                  <a:srgbClr val="FFFF00"/>
+                </a:solidFill>
+              </a:rPr>
+              <a:t>	5</a:t>
+            </a:r>
+          </a:p>
+          <a:p>
+            <a:r>
+              <a:rPr lang="en-US" dirty="0">
+                <a:solidFill>
+                  <a:srgbClr val="FFFF00"/>
+                </a:solidFill>
+              </a:rPr>
+              <a:t>	6</a:t>
+            </a:r>
+          </a:p>
+          <a:p>
+            <a:r>
+              <a:rPr lang="en-US" dirty="0">
+                <a:solidFill>
+                  <a:srgbClr val="FFFF00"/>
+                </a:solidFill>
+              </a:rPr>
+              <a:t>	7</a:t>
+            </a:r>
+          </a:p>
+          <a:p>
+            <a:r>
+              <a:rPr lang="en-US" dirty="0">
+                <a:solidFill>
+                  <a:srgbClr val="FFFF00"/>
+                </a:solidFill>
+              </a:rPr>
+              <a:t>	8</a:t>
+            </a:r>
+          </a:p>
+          <a:p>
+            <a:r>
+              <a:rPr lang="en-US" dirty="0">
+                <a:solidFill>
+                  <a:srgbClr val="FFFF00"/>
+                </a:solidFill>
+              </a:rPr>
+              <a:t>	9</a:t>
+            </a:r>
+          </a:p>
+          <a:p>
+            <a:r>
+              <a:rPr lang="en-US" dirty="0">
+                <a:solidFill>
+                  <a:srgbClr val="FFFF00"/>
+                </a:solidFill>
+              </a:rPr>
+              <a:t>	10</a:t>
             </a:r>
           </a:p>
         </p:txBody>
@@ -12560,7 +12463,7 @@
     </p:spTree>
     <p:extLst>
       <p:ext uri="{BB962C8B-B14F-4D97-AF65-F5344CB8AC3E}">
-        <p14:creationId xmlns:p14="http://schemas.microsoft.com/office/powerpoint/2010/main" val="1874559920"/>
+        <p14:creationId xmlns:p14="http://schemas.microsoft.com/office/powerpoint/2010/main" val="791396677"/>
       </p:ext>
     </p:extLst>
   </p:cSld>
@@ -12621,7 +12524,7 @@
                   <a:srgbClr val="FF0000"/>
                 </a:solidFill>
               </a:rPr>
-              <a:t>IN-CLASS DISCUSSION</a:t>
+              <a:t>FUN WITH RANGES</a:t>
             </a:r>
           </a:p>
         </p:txBody>
@@ -12673,7 +12576,7 @@
         <p:spPr>
           <a:xfrm>
             <a:off x="590309" y="2002010"/>
-            <a:ext cx="10678886" cy="4832092"/>
+            <a:ext cx="10678886" cy="1785104"/>
           </a:xfrm>
           <a:prstGeom prst="rect">
             <a:avLst/>
@@ -12690,7 +12593,7 @@
               <a:rPr lang="en-US" sz="2200" dirty="0">
                 <a:sym typeface="Wingdings" pitchFamily="2" charset="2"/>
               </a:rPr>
-              <a:t>Remember that the range function is pretty flexible.</a:t>
+              <a:t>Consider this for loop:</a:t>
             </a:r>
           </a:p>
           <a:p>
@@ -12699,50 +12602,49 @@
             </a:endParaRPr>
           </a:p>
           <a:p>
-            <a:endParaRPr lang="en-US" sz="2200" dirty="0">
-              <a:sym typeface="Wingdings" pitchFamily="2" charset="2"/>
-            </a:endParaRPr>
-          </a:p>
-          <a:p>
+            <a:r>
+              <a:rPr lang="en-US" sz="2200" dirty="0" err="1">
+                <a:sym typeface="Wingdings" pitchFamily="2" charset="2"/>
+              </a:rPr>
+              <a:t>myString</a:t>
+            </a:r>
             <a:r>
               <a:rPr lang="en-US" sz="2200" dirty="0">
                 <a:sym typeface="Wingdings" pitchFamily="2" charset="2"/>
               </a:rPr>
-              <a:t>range(starting point, ending point, increment) </a:t>
-            </a:r>
-          </a:p>
-          <a:p>
-            <a:endParaRPr lang="en-US" sz="2200" dirty="0">
-              <a:sym typeface="Wingdings" pitchFamily="2" charset="2"/>
-            </a:endParaRPr>
+              <a:t> = "hello world"</a:t>
+            </a:r>
           </a:p>
           <a:p>
             <a:r>
               <a:rPr lang="en-US" sz="2200" dirty="0">
                 <a:sym typeface="Wingdings" pitchFamily="2" charset="2"/>
               </a:rPr>
-              <a:t>for x in range(10, -1, -2):</a:t>
-            </a:r>
-          </a:p>
-          <a:p>
+              <a:t>for x in range(</a:t>
+            </a:r>
+            <a:r>
+              <a:rPr lang="en-US" sz="2200" dirty="0" err="1">
+                <a:sym typeface="Wingdings" pitchFamily="2" charset="2"/>
+              </a:rPr>
+              <a:t>len</a:t>
+            </a:r>
             <a:r>
               <a:rPr lang="en-US" sz="2200" dirty="0">
                 <a:sym typeface="Wingdings" pitchFamily="2" charset="2"/>
               </a:rPr>
-              <a:t>	print(x)			</a:t>
-            </a:r>
-          </a:p>
-          <a:p>
-            <a:endParaRPr lang="en-US" sz="2200" dirty="0">
-              <a:sym typeface="Wingdings" pitchFamily="2" charset="2"/>
-            </a:endParaRPr>
-          </a:p>
-          <a:p>
+              <a:t>(</a:t>
+            </a:r>
+            <a:r>
+              <a:rPr lang="en-US" sz="2200" dirty="0" err="1">
+                <a:sym typeface="Wingdings" pitchFamily="2" charset="2"/>
+              </a:rPr>
+              <a:t>myString</a:t>
+            </a:r>
             <a:r>
               <a:rPr lang="en-US" sz="2200" dirty="0">
                 <a:sym typeface="Wingdings" pitchFamily="2" charset="2"/>
               </a:rPr>
-              <a:t>prints:</a:t>
+              <a:t>)):</a:t>
             </a:r>
           </a:p>
           <a:p>
@@ -12750,39 +12652,258 @@
               <a:rPr lang="en-US" sz="2200" dirty="0">
                 <a:sym typeface="Wingdings" pitchFamily="2" charset="2"/>
               </a:rPr>
-              <a:t>10</a:t>
-            </a:r>
-          </a:p>
-          <a:p>
-            <a:r>
-              <a:rPr lang="en-US" sz="2200" dirty="0">
-                <a:sym typeface="Wingdings" pitchFamily="2" charset="2"/>
-              </a:rPr>
-              <a:t>8</a:t>
-            </a:r>
-          </a:p>
-          <a:p>
-            <a:r>
-              <a:rPr lang="en-US" sz="2200" dirty="0">
-                <a:sym typeface="Wingdings" pitchFamily="2" charset="2"/>
-              </a:rPr>
-              <a:t>6</a:t>
-            </a:r>
-          </a:p>
-          <a:p>
-            <a:r>
-              <a:rPr lang="en-US" sz="2200" dirty="0">
-                <a:sym typeface="Wingdings" pitchFamily="2" charset="2"/>
-              </a:rPr>
-              <a:t>4</a:t>
-            </a:r>
-          </a:p>
-          <a:p>
-            <a:r>
-              <a:rPr lang="en-US" sz="2200" dirty="0">
-                <a:sym typeface="Wingdings" pitchFamily="2" charset="2"/>
-              </a:rPr>
-              <a:t>2</a:t>
+              <a:t>	print(x)</a:t>
+            </a:r>
+          </a:p>
+        </p:txBody>
+      </p:sp>
+      <p:sp>
+        <p:nvSpPr>
+          <p:cNvPr id="6" name="TextBox 5">
+            <a:extLst>
+              <a:ext uri="{FF2B5EF4-FFF2-40B4-BE49-F238E27FC236}">
+                <a16:creationId xmlns:a16="http://schemas.microsoft.com/office/drawing/2014/main" id="{70752080-E5A5-9F4B-9CBE-5A92C332040F}"/>
+              </a:ext>
+            </a:extLst>
+          </p:cNvPr>
+          <p:cNvSpPr txBox="1"/>
+          <p:nvPr/>
+        </p:nvSpPr>
+        <p:spPr>
+          <a:xfrm>
+            <a:off x="6078828" y="2694630"/>
+            <a:ext cx="2835071" cy="2308324"/>
+          </a:xfrm>
+          <a:prstGeom prst="rect">
+            <a:avLst/>
+          </a:prstGeom>
+          <a:noFill/>
+        </p:spPr>
+        <p:txBody>
+          <a:bodyPr wrap="none" rtlCol="0">
+            <a:spAutoFit/>
+          </a:bodyPr>
+          <a:lstStyle/>
+          <a:p>
+            <a:r>
+              <a:rPr lang="en-US" dirty="0"/>
+              <a:t>this may not seem terribly</a:t>
+            </a:r>
+          </a:p>
+          <a:p>
+            <a:r>
+              <a:rPr lang="en-US" dirty="0"/>
+              <a:t>useful, but notice that these</a:t>
+            </a:r>
+          </a:p>
+          <a:p>
+            <a:r>
+              <a:rPr lang="en-US" dirty="0"/>
+              <a:t>are the indices of all the</a:t>
+            </a:r>
+          </a:p>
+          <a:p>
+            <a:r>
+              <a:rPr lang="en-US" dirty="0"/>
+              <a:t>characters in </a:t>
+            </a:r>
+            <a:r>
+              <a:rPr lang="en-US" dirty="0" err="1"/>
+              <a:t>myString</a:t>
+            </a:r>
+            <a:endParaRPr lang="en-US" dirty="0"/>
+          </a:p>
+          <a:p>
+            <a:endParaRPr lang="en-US" dirty="0"/>
+          </a:p>
+          <a:p>
+            <a:r>
+              <a:rPr lang="en-US" dirty="0" err="1"/>
+              <a:t>myString</a:t>
+            </a:r>
+            <a:r>
+              <a:rPr lang="en-US" dirty="0"/>
+              <a:t>[0] </a:t>
+            </a:r>
+            <a:r>
+              <a:rPr lang="en-US" dirty="0">
+                <a:sym typeface="Wingdings" pitchFamily="2" charset="2"/>
+              </a:rPr>
+              <a:t> 	h</a:t>
+            </a:r>
+          </a:p>
+          <a:p>
+            <a:r>
+              <a:rPr lang="en-US" dirty="0" err="1">
+                <a:sym typeface="Wingdings" pitchFamily="2" charset="2"/>
+              </a:rPr>
+              <a:t>myString</a:t>
+            </a:r>
+            <a:r>
+              <a:rPr lang="en-US" dirty="0">
+                <a:sym typeface="Wingdings" pitchFamily="2" charset="2"/>
+              </a:rPr>
+              <a:t>[4]  	o</a:t>
+            </a:r>
+          </a:p>
+          <a:p>
+            <a:r>
+              <a:rPr lang="en-US" dirty="0" err="1">
+                <a:sym typeface="Wingdings" pitchFamily="2" charset="2"/>
+              </a:rPr>
+              <a:t>myString</a:t>
+            </a:r>
+            <a:r>
+              <a:rPr lang="en-US" dirty="0">
+                <a:sym typeface="Wingdings" pitchFamily="2" charset="2"/>
+              </a:rPr>
+              <a:t>[10]  	d</a:t>
+            </a:r>
+          </a:p>
+        </p:txBody>
+      </p:sp>
+      <p:sp>
+        <p:nvSpPr>
+          <p:cNvPr id="4" name="TextBox 3">
+            <a:extLst>
+              <a:ext uri="{FF2B5EF4-FFF2-40B4-BE49-F238E27FC236}">
+                <a16:creationId xmlns:a16="http://schemas.microsoft.com/office/drawing/2014/main" id="{42110F1D-BCA9-DC46-A70F-2F851FD3F0F4}"/>
+              </a:ext>
+            </a:extLst>
+          </p:cNvPr>
+          <p:cNvSpPr txBox="1"/>
+          <p:nvPr/>
+        </p:nvSpPr>
+        <p:spPr>
+          <a:xfrm>
+            <a:off x="9247031" y="2002010"/>
+            <a:ext cx="1342034" cy="3139321"/>
+          </a:xfrm>
+          <a:prstGeom prst="rect">
+            <a:avLst/>
+          </a:prstGeom>
+          <a:solidFill>
+            <a:schemeClr val="accent1"/>
+          </a:solidFill>
+          <a:ln>
+            <a:solidFill>
+              <a:schemeClr val="accent1"/>
+            </a:solidFill>
+          </a:ln>
+        </p:spPr>
+        <p:txBody>
+          <a:bodyPr wrap="none" rtlCol="0">
+            <a:spAutoFit/>
+          </a:bodyPr>
+          <a:lstStyle/>
+          <a:p>
+            <a:r>
+              <a:rPr lang="en-US" dirty="0">
+                <a:solidFill>
+                  <a:srgbClr val="FFFF00"/>
+                </a:solidFill>
+              </a:rPr>
+              <a:t>answer:  	0 </a:t>
+            </a:r>
+          </a:p>
+          <a:p>
+            <a:r>
+              <a:rPr lang="en-US" dirty="0">
+                <a:solidFill>
+                  <a:srgbClr val="FFFF00"/>
+                </a:solidFill>
+              </a:rPr>
+              <a:t>	1</a:t>
+            </a:r>
+          </a:p>
+          <a:p>
+            <a:r>
+              <a:rPr lang="en-US" dirty="0">
+                <a:solidFill>
+                  <a:srgbClr val="FFFF00"/>
+                </a:solidFill>
+              </a:rPr>
+              <a:t>	2</a:t>
+            </a:r>
+          </a:p>
+          <a:p>
+            <a:r>
+              <a:rPr lang="en-US" dirty="0">
+                <a:solidFill>
+                  <a:srgbClr val="FFFF00"/>
+                </a:solidFill>
+              </a:rPr>
+              <a:t>	3</a:t>
+            </a:r>
+          </a:p>
+          <a:p>
+            <a:r>
+              <a:rPr lang="en-US" dirty="0">
+                <a:solidFill>
+                  <a:srgbClr val="FFFF00"/>
+                </a:solidFill>
+              </a:rPr>
+              <a:t>	4</a:t>
+            </a:r>
+          </a:p>
+          <a:p>
+            <a:r>
+              <a:rPr lang="en-US" dirty="0">
+                <a:solidFill>
+                  <a:srgbClr val="FFFF00"/>
+                </a:solidFill>
+              </a:rPr>
+              <a:t>	5</a:t>
+            </a:r>
+          </a:p>
+          <a:p>
+            <a:r>
+              <a:rPr lang="en-US" dirty="0">
+                <a:solidFill>
+                  <a:srgbClr val="FFFF00"/>
+                </a:solidFill>
+              </a:rPr>
+              <a:t>	6</a:t>
+            </a:r>
+          </a:p>
+          <a:p>
+            <a:r>
+              <a:rPr lang="en-US" dirty="0">
+                <a:solidFill>
+                  <a:srgbClr val="FFFF00"/>
+                </a:solidFill>
+              </a:rPr>
+              <a:t>	7</a:t>
+            </a:r>
+          </a:p>
+          <a:p>
+            <a:r>
+              <a:rPr lang="en-US" dirty="0">
+                <a:solidFill>
+                  <a:srgbClr val="FFFF00"/>
+                </a:solidFill>
+              </a:rPr>
+              <a:t>	8</a:t>
+            </a:r>
+          </a:p>
+          <a:p>
+            <a:r>
+              <a:rPr lang="en-US" dirty="0">
+                <a:solidFill>
+                  <a:srgbClr val="FFFF00"/>
+                </a:solidFill>
+              </a:rPr>
+              <a:t>	9</a:t>
+            </a:r>
+          </a:p>
+          <a:p>
+            <a:r>
+              <a:rPr lang="en-US" dirty="0">
+                <a:solidFill>
+                  <a:srgbClr val="FFFF00"/>
+                </a:solidFill>
+              </a:rPr>
+              <a:t>	10</a:t>
             </a:r>
           </a:p>
         </p:txBody>
@@ -12790,7 +12911,7 @@
     </p:spTree>
     <p:extLst>
       <p:ext uri="{BB962C8B-B14F-4D97-AF65-F5344CB8AC3E}">
-        <p14:creationId xmlns:p14="http://schemas.microsoft.com/office/powerpoint/2010/main" val="2675264383"/>
+        <p14:creationId xmlns:p14="http://schemas.microsoft.com/office/powerpoint/2010/main" val="597262373"/>
       </p:ext>
     </p:extLst>
   </p:cSld>
@@ -12851,7 +12972,7 @@
                   <a:srgbClr val="FF0000"/>
                 </a:solidFill>
               </a:rPr>
-              <a:t>IN-CLASS DISCUSSION</a:t>
+              <a:t>FUN WITH RANGES</a:t>
             </a:r>
           </a:p>
         </p:txBody>
@@ -12903,7 +13024,7 @@
         <p:spPr>
           <a:xfrm>
             <a:off x="590309" y="2002010"/>
-            <a:ext cx="10678886" cy="2462213"/>
+            <a:ext cx="10678886" cy="1785104"/>
           </a:xfrm>
           <a:prstGeom prst="rect">
             <a:avLst/>
@@ -12920,7 +13041,7 @@
               <a:rPr lang="en-US" sz="2200" dirty="0">
                 <a:sym typeface="Wingdings" pitchFamily="2" charset="2"/>
               </a:rPr>
-              <a:t>What does this print?</a:t>
+              <a:t>Consider this for loop:</a:t>
             </a:r>
           </a:p>
           <a:p>
@@ -12947,27 +13068,39 @@
               <a:rPr lang="en-US" sz="2200" dirty="0">
                 <a:sym typeface="Wingdings" pitchFamily="2" charset="2"/>
               </a:rPr>
-              <a:t>output = ''</a:t>
-            </a:r>
-          </a:p>
-          <a:p>
+              <a:t>for x in range(</a:t>
+            </a:r>
+            <a:r>
+              <a:rPr lang="en-US" sz="2200" dirty="0" err="1">
+                <a:sym typeface="Wingdings" pitchFamily="2" charset="2"/>
+              </a:rPr>
+              <a:t>len</a:t>
+            </a:r>
             <a:r>
               <a:rPr lang="en-US" sz="2200" dirty="0">
                 <a:sym typeface="Wingdings" pitchFamily="2" charset="2"/>
               </a:rPr>
-              <a:t>for x in range(</a:t>
+              <a:t>(</a:t>
             </a:r>
             <a:r>
               <a:rPr lang="en-US" sz="2200" dirty="0" err="1">
                 <a:sym typeface="Wingdings" pitchFamily="2" charset="2"/>
               </a:rPr>
-              <a:t>len</a:t>
+              <a:t>myString</a:t>
             </a:r>
             <a:r>
               <a:rPr lang="en-US" sz="2200" dirty="0">
                 <a:sym typeface="Wingdings" pitchFamily="2" charset="2"/>
               </a:rPr>
-              <a:t>(</a:t>
+              <a:t>)):</a:t>
+            </a:r>
+          </a:p>
+          <a:p>
+            <a:r>
+              <a:rPr lang="en-US" sz="2200" dirty="0">
+                <a:sym typeface="Wingdings" pitchFamily="2" charset="2"/>
+              </a:rPr>
+              <a:t>	print(</a:t>
             </a:r>
             <a:r>
               <a:rPr lang="en-US" sz="2200" dirty="0" err="1">
@@ -12979,45 +13112,17 @@
               <a:rPr lang="en-US" sz="2200" dirty="0">
                 <a:sym typeface="Wingdings" pitchFamily="2" charset="2"/>
               </a:rPr>
-              <a:t>)-1, -1, -1):</a:t>
-            </a:r>
-          </a:p>
-          <a:p>
-            <a:r>
-              <a:rPr lang="en-US" sz="2200" dirty="0">
-                <a:sym typeface="Wingdings" pitchFamily="2" charset="2"/>
-              </a:rPr>
-              <a:t>	output = output + </a:t>
-            </a:r>
-            <a:r>
-              <a:rPr lang="en-US" sz="2200" dirty="0" err="1">
-                <a:sym typeface="Wingdings" pitchFamily="2" charset="2"/>
-              </a:rPr>
-              <a:t>myString</a:t>
-            </a:r>
-            <a:r>
-              <a:rPr lang="en-US" sz="2200" dirty="0">
-                <a:sym typeface="Wingdings" pitchFamily="2" charset="2"/>
-              </a:rPr>
-              <a:t>[x]</a:t>
-            </a:r>
-          </a:p>
-          <a:p>
-            <a:r>
-              <a:rPr lang="en-US" sz="2200" dirty="0">
-                <a:sym typeface="Wingdings" pitchFamily="2" charset="2"/>
-              </a:rPr>
-              <a:t>print(output)</a:t>
-            </a:r>
-          </a:p>
-        </p:txBody>
-      </p:sp>
-      <p:sp>
-        <p:nvSpPr>
-          <p:cNvPr id="4" name="TextBox 3">
-            <a:extLst>
-              <a:ext uri="{FF2B5EF4-FFF2-40B4-BE49-F238E27FC236}">
-                <a16:creationId xmlns:a16="http://schemas.microsoft.com/office/drawing/2014/main" id="{F5F129F1-9F26-CD4B-AF46-F9F1F3ED943F}"/>
+              <a:t>[x])</a:t>
+            </a:r>
+          </a:p>
+        </p:txBody>
+      </p:sp>
+      <p:sp>
+        <p:nvSpPr>
+          <p:cNvPr id="6" name="TextBox 5">
+            <a:extLst>
+              <a:ext uri="{FF2B5EF4-FFF2-40B4-BE49-F238E27FC236}">
+                <a16:creationId xmlns:a16="http://schemas.microsoft.com/office/drawing/2014/main" id="{70752080-E5A5-9F4B-9CBE-5A92C332040F}"/>
               </a:ext>
             </a:extLst>
           </p:cNvPr>
@@ -13026,76 +13131,137 @@
         </p:nvSpPr>
         <p:spPr>
           <a:xfrm>
-            <a:off x="8615966" y="4464223"/>
-            <a:ext cx="1751708" cy="646331"/>
+            <a:off x="6078828" y="2694630"/>
+            <a:ext cx="3216906" cy="369332"/>
           </a:xfrm>
           <a:prstGeom prst="rect">
             <a:avLst/>
           </a:prstGeom>
-          <a:solidFill>
-            <a:schemeClr val="accent1"/>
-          </a:solidFill>
-        </p:spPr>
-        <p:txBody>
-          <a:bodyPr wrap="square" rtlCol="0">
+          <a:noFill/>
+        </p:spPr>
+        <p:txBody>
+          <a:bodyPr wrap="none" rtlCol="0">
             <a:spAutoFit/>
           </a:bodyPr>
           <a:lstStyle/>
           <a:p>
             <a:r>
-              <a:rPr lang="en-US" dirty="0">
-                <a:solidFill>
-                  <a:srgbClr val="FFFF00"/>
-                </a:solidFill>
-              </a:rPr>
-              <a:t>answer:</a:t>
-            </a:r>
-          </a:p>
-          <a:p>
-            <a:r>
-              <a:rPr lang="en-US" dirty="0">
-                <a:solidFill>
-                  <a:srgbClr val="FFFF00"/>
-                </a:solidFill>
-              </a:rPr>
-              <a:t> </a:t>
-            </a:r>
-            <a:r>
-              <a:rPr lang="en-US" dirty="0" err="1">
-                <a:solidFill>
-                  <a:srgbClr val="FFFF00"/>
-                </a:solidFill>
-              </a:rPr>
-              <a:t>dlrow</a:t>
-            </a:r>
-            <a:r>
-              <a:rPr lang="en-US" dirty="0">
-                <a:solidFill>
-                  <a:srgbClr val="FFFF00"/>
-                </a:solidFill>
-              </a:rPr>
-              <a:t> </a:t>
-            </a:r>
-            <a:r>
-              <a:rPr lang="en-US" dirty="0" err="1">
-                <a:solidFill>
-                  <a:srgbClr val="FFFF00"/>
-                </a:solidFill>
-              </a:rPr>
-              <a:t>olleh</a:t>
-            </a:r>
-            <a:endParaRPr lang="en-US" dirty="0">
-              <a:solidFill>
-                <a:srgbClr val="FFFF00"/>
-              </a:solidFill>
-            </a:endParaRPr>
+              <a:rPr lang="en-US" dirty="0"/>
+              <a:t>okay, what what does </a:t>
+            </a:r>
+            <a:r>
+              <a:rPr lang="en-US" i="1" dirty="0"/>
+              <a:t>this</a:t>
+            </a:r>
+            <a:r>
+              <a:rPr lang="en-US" dirty="0"/>
+              <a:t> print?</a:t>
+            </a:r>
+          </a:p>
+        </p:txBody>
+      </p:sp>
+      <p:sp>
+        <p:nvSpPr>
+          <p:cNvPr id="4" name="TextBox 3">
+            <a:extLst>
+              <a:ext uri="{FF2B5EF4-FFF2-40B4-BE49-F238E27FC236}">
+                <a16:creationId xmlns:a16="http://schemas.microsoft.com/office/drawing/2014/main" id="{F6C1EDF6-D09E-854A-ACE5-ED646C608BF5}"/>
+              </a:ext>
+            </a:extLst>
+          </p:cNvPr>
+          <p:cNvSpPr txBox="1"/>
+          <p:nvPr/>
+        </p:nvSpPr>
+        <p:spPr>
+          <a:xfrm>
+            <a:off x="4597758" y="3503226"/>
+            <a:ext cx="3990901" cy="646331"/>
+          </a:xfrm>
+          <a:prstGeom prst="rect">
+            <a:avLst/>
+          </a:prstGeom>
+          <a:noFill/>
+        </p:spPr>
+        <p:txBody>
+          <a:bodyPr wrap="none" rtlCol="0">
+            <a:spAutoFit/>
+          </a:bodyPr>
+          <a:lstStyle/>
+          <a:p>
+            <a:r>
+              <a:rPr lang="en-US" dirty="0"/>
+              <a:t>(remember, the </a:t>
+            </a:r>
+            <a:r>
+              <a:rPr lang="en-US" dirty="0" err="1"/>
+              <a:t>len</a:t>
+            </a:r>
+            <a:r>
+              <a:rPr lang="en-US" dirty="0"/>
+              <a:t>() function prints the </a:t>
+            </a:r>
+          </a:p>
+          <a:p>
+            <a:r>
+              <a:rPr lang="en-US" dirty="0"/>
+              <a:t>length of the string you pass in)</a:t>
+            </a:r>
+          </a:p>
+        </p:txBody>
+      </p:sp>
+      <p:sp>
+        <p:nvSpPr>
+          <p:cNvPr id="7" name="Down Arrow 6">
+            <a:extLst>
+              <a:ext uri="{FF2B5EF4-FFF2-40B4-BE49-F238E27FC236}">
+                <a16:creationId xmlns:a16="http://schemas.microsoft.com/office/drawing/2014/main" id="{1D4D359E-F019-524A-8D04-CEAB5A2180BD}"/>
+              </a:ext>
+            </a:extLst>
+          </p:cNvPr>
+          <p:cNvSpPr/>
+          <p:nvPr/>
+        </p:nvSpPr>
+        <p:spPr>
+          <a:xfrm rot="6353669">
+            <a:off x="4049961" y="3047725"/>
+            <a:ext cx="413145" cy="591933"/>
+          </a:xfrm>
+          <a:prstGeom prst="downArrow">
+            <a:avLst>
+              <a:gd name="adj1" fmla="val 50000"/>
+              <a:gd name="adj2" fmla="val 53426"/>
+            </a:avLst>
+          </a:prstGeom>
+        </p:spPr>
+        <p:style>
+          <a:lnRef idx="2">
+            <a:schemeClr val="accent1">
+              <a:shade val="50000"/>
+            </a:schemeClr>
+          </a:lnRef>
+          <a:fillRef idx="1">
+            <a:schemeClr val="accent1"/>
+          </a:fillRef>
+          <a:effectRef idx="0">
+            <a:schemeClr val="accent1"/>
+          </a:effectRef>
+          <a:fontRef idx="minor">
+            <a:schemeClr val="lt1"/>
+          </a:fontRef>
+        </p:style>
+        <p:txBody>
+          <a:bodyPr rtlCol="0" anchor="ctr"/>
+          <a:lstStyle/>
+          <a:p>
+            <a:pPr algn="ctr"/>
+            <a:endParaRPr lang="en-US"/>
           </a:p>
         </p:txBody>
       </p:sp>
     </p:spTree>
     <p:extLst>
       <p:ext uri="{BB962C8B-B14F-4D97-AF65-F5344CB8AC3E}">
-        <p14:creationId xmlns:p14="http://schemas.microsoft.com/office/powerpoint/2010/main" val="490781853"/>
+        <p14:creationId xmlns:p14="http://schemas.microsoft.com/office/powerpoint/2010/main" val="1876066901"/>
       </p:ext>
     </p:extLst>
   </p:cSld>
@@ -13137,7 +13303,7 @@
         <p:spPr>
           <a:xfrm>
             <a:off x="590309" y="555583"/>
-            <a:ext cx="11514666" cy="1323439"/>
+            <a:ext cx="11514666" cy="1015663"/>
           </a:xfrm>
           <a:prstGeom prst="rect">
             <a:avLst/>
@@ -13151,22 +13317,22 @@
           <a:lstStyle/>
           <a:p>
             <a:r>
-              <a:rPr lang="en-US" sz="8000" dirty="0">
+              <a:rPr lang="en-US" sz="6000" dirty="0">
                 <a:solidFill>
                   <a:srgbClr val="FF0000"/>
                 </a:solidFill>
               </a:rPr>
-              <a:t>IN-CLASS EXERCISE 2</a:t>
-            </a:r>
-          </a:p>
-        </p:txBody>
-      </p:sp>
-      <p:sp>
-        <p:nvSpPr>
-          <p:cNvPr id="4" name="TextBox 3">
-            <a:extLst>
-              <a:ext uri="{FF2B5EF4-FFF2-40B4-BE49-F238E27FC236}">
-                <a16:creationId xmlns:a16="http://schemas.microsoft.com/office/drawing/2014/main" id="{E35D83AF-0E32-C145-85B6-27C9ECF9D14E}"/>
+              <a:t>FUN WITH RANGES</a:t>
+            </a:r>
+          </a:p>
+        </p:txBody>
+      </p:sp>
+      <p:sp>
+        <p:nvSpPr>
+          <p:cNvPr id="2" name="TextBox 1">
+            <a:extLst>
+              <a:ext uri="{FF2B5EF4-FFF2-40B4-BE49-F238E27FC236}">
+                <a16:creationId xmlns:a16="http://schemas.microsoft.com/office/drawing/2014/main" id="{D547AD33-8FE1-584E-B510-08C013ACA746}"/>
               </a:ext>
             </a:extLst>
           </p:cNvPr>
@@ -13175,8 +13341,8 @@
         </p:nvSpPr>
         <p:spPr>
           <a:xfrm>
-            <a:off x="590309" y="1879022"/>
-            <a:ext cx="10678886" cy="2308324"/>
+            <a:off x="6078828" y="3063962"/>
+            <a:ext cx="184731" cy="369332"/>
           </a:xfrm>
           <a:prstGeom prst="rect">
             <a:avLst/>
@@ -13184,218 +13350,406 @@
           <a:noFill/>
         </p:spPr>
         <p:txBody>
+          <a:bodyPr wrap="none" rtlCol="0">
+            <a:spAutoFit/>
+          </a:bodyPr>
+          <a:lstStyle/>
+          <a:p>
+            <a:endParaRPr lang="en-US" dirty="0"/>
+          </a:p>
+        </p:txBody>
+      </p:sp>
+      <p:sp>
+        <p:nvSpPr>
+          <p:cNvPr id="9" name="TextBox 8">
+            <a:extLst>
+              <a:ext uri="{FF2B5EF4-FFF2-40B4-BE49-F238E27FC236}">
+                <a16:creationId xmlns:a16="http://schemas.microsoft.com/office/drawing/2014/main" id="{1B119A5E-C909-7A43-8310-B5F1C6FCE541}"/>
+              </a:ext>
+            </a:extLst>
+          </p:cNvPr>
+          <p:cNvSpPr txBox="1"/>
+          <p:nvPr/>
+        </p:nvSpPr>
+        <p:spPr>
+          <a:xfrm>
+            <a:off x="590309" y="2002010"/>
+            <a:ext cx="10678886" cy="1785104"/>
+          </a:xfrm>
+          <a:prstGeom prst="rect">
+            <a:avLst/>
+          </a:prstGeom>
+          <a:noFill/>
+        </p:spPr>
+        <p:txBody>
           <a:bodyPr wrap="square" rtlCol="0">
             <a:spAutoFit/>
           </a:bodyPr>
           <a:lstStyle/>
           <a:p>
             <a:r>
-              <a:rPr lang="en-US" sz="2400" dirty="0">
-                <a:sym typeface="Wingdings" pitchFamily="2" charset="2"/>
-              </a:rPr>
-              <a:t>Write a function that takes a string, then returns a new string consisting of the original string plus the original string backwards.</a:t>
-            </a:r>
-          </a:p>
-          <a:p>
-            <a:endParaRPr lang="en-US" sz="2400" dirty="0">
+              <a:rPr lang="en-US" sz="2200" dirty="0">
+                <a:sym typeface="Wingdings" pitchFamily="2" charset="2"/>
+              </a:rPr>
+              <a:t>Consider this for loop:</a:t>
+            </a:r>
+          </a:p>
+          <a:p>
+            <a:endParaRPr lang="en-US" sz="2200" dirty="0">
               <a:sym typeface="Wingdings" pitchFamily="2" charset="2"/>
             </a:endParaRPr>
           </a:p>
           <a:p>
             <a:r>
-              <a:rPr lang="en-US" sz="2400" dirty="0">
-                <a:sym typeface="Wingdings" pitchFamily="2" charset="2"/>
-              </a:rPr>
-              <a:t>print(</a:t>
-            </a:r>
-            <a:r>
-              <a:rPr lang="en-US" sz="2400" dirty="0" err="1">
-                <a:sym typeface="Wingdings" pitchFamily="2" charset="2"/>
-              </a:rPr>
-              <a:t>makePalindrome</a:t>
-            </a:r>
-            <a:r>
-              <a:rPr lang="en-US" sz="2400" dirty="0">
-                <a:sym typeface="Wingdings" pitchFamily="2" charset="2"/>
-              </a:rPr>
-              <a:t>('hello'))    prints </a:t>
-            </a:r>
-            <a:r>
-              <a:rPr lang="en-US" sz="2400" dirty="0" err="1">
-                <a:sym typeface="Wingdings" pitchFamily="2" charset="2"/>
-              </a:rPr>
-              <a:t>helloolleh</a:t>
-            </a:r>
-            <a:endParaRPr lang="en-US" sz="2400" dirty="0">
-              <a:sym typeface="Wingdings" pitchFamily="2" charset="2"/>
-            </a:endParaRPr>
-          </a:p>
-          <a:p>
-            <a:r>
-              <a:rPr lang="en-US" sz="2400" dirty="0">
-                <a:sym typeface="Wingdings" pitchFamily="2" charset="2"/>
-              </a:rPr>
-              <a:t>print(</a:t>
-            </a:r>
-            <a:r>
-              <a:rPr lang="en-US" sz="2400" dirty="0" err="1">
-                <a:sym typeface="Wingdings" pitchFamily="2" charset="2"/>
-              </a:rPr>
-              <a:t>makePalindrome</a:t>
-            </a:r>
-            <a:r>
-              <a:rPr lang="en-US" sz="2400" dirty="0">
-                <a:sym typeface="Wingdings" pitchFamily="2" charset="2"/>
-              </a:rPr>
-              <a:t>('</a:t>
-            </a:r>
-            <a:r>
-              <a:rPr lang="en-US" sz="2400" dirty="0" err="1">
-                <a:sym typeface="Wingdings" pitchFamily="2" charset="2"/>
-              </a:rPr>
-              <a:t>dracula</a:t>
-            </a:r>
-            <a:r>
-              <a:rPr lang="en-US" sz="2400" dirty="0">
-                <a:sym typeface="Wingdings" pitchFamily="2" charset="2"/>
-              </a:rPr>
-              <a:t>'))  prints </a:t>
-            </a:r>
-            <a:r>
-              <a:rPr lang="en-US" sz="2400" dirty="0" err="1">
-                <a:sym typeface="Wingdings" pitchFamily="2" charset="2"/>
-              </a:rPr>
-              <a:t>draculaalucard</a:t>
-            </a:r>
-            <a:endParaRPr lang="en-US" sz="2400" dirty="0">
-              <a:sym typeface="Wingdings" pitchFamily="2" charset="2"/>
-            </a:endParaRPr>
-          </a:p>
-          <a:p>
-            <a:pPr marL="457200" indent="-457200">
-              <a:buFont typeface="Arial" panose="020B0604020202020204" pitchFamily="34" charset="0"/>
-              <a:buChar char="•"/>
-            </a:pPr>
-            <a:endParaRPr lang="en-US" sz="2400" dirty="0">
-              <a:sym typeface="Wingdings" pitchFamily="2" charset="2"/>
-            </a:endParaRPr>
-          </a:p>
-        </p:txBody>
-      </p:sp>
-      <p:sp>
-        <p:nvSpPr>
-          <p:cNvPr id="2" name="Rectangle 1">
-            <a:extLst>
-              <a:ext uri="{FF2B5EF4-FFF2-40B4-BE49-F238E27FC236}">
-                <a16:creationId xmlns:a16="http://schemas.microsoft.com/office/drawing/2014/main" id="{12C892C0-03AF-144D-8562-7A5F63CA15C0}"/>
-              </a:ext>
-            </a:extLst>
-          </p:cNvPr>
-          <p:cNvSpPr/>
+              <a:rPr lang="en-US" sz="2200" dirty="0" err="1">
+                <a:sym typeface="Wingdings" pitchFamily="2" charset="2"/>
+              </a:rPr>
+              <a:t>myString</a:t>
+            </a:r>
+            <a:r>
+              <a:rPr lang="en-US" sz="2200" dirty="0">
+                <a:sym typeface="Wingdings" pitchFamily="2" charset="2"/>
+              </a:rPr>
+              <a:t> = "hello world"</a:t>
+            </a:r>
+          </a:p>
+          <a:p>
+            <a:r>
+              <a:rPr lang="en-US" sz="2200" dirty="0">
+                <a:sym typeface="Wingdings" pitchFamily="2" charset="2"/>
+              </a:rPr>
+              <a:t>for x in range(</a:t>
+            </a:r>
+            <a:r>
+              <a:rPr lang="en-US" sz="2200" dirty="0" err="1">
+                <a:sym typeface="Wingdings" pitchFamily="2" charset="2"/>
+              </a:rPr>
+              <a:t>len</a:t>
+            </a:r>
+            <a:r>
+              <a:rPr lang="en-US" sz="2200" dirty="0">
+                <a:sym typeface="Wingdings" pitchFamily="2" charset="2"/>
+              </a:rPr>
+              <a:t>(</a:t>
+            </a:r>
+            <a:r>
+              <a:rPr lang="en-US" sz="2200" dirty="0" err="1">
+                <a:sym typeface="Wingdings" pitchFamily="2" charset="2"/>
+              </a:rPr>
+              <a:t>myString</a:t>
+            </a:r>
+            <a:r>
+              <a:rPr lang="en-US" sz="2200" dirty="0">
+                <a:sym typeface="Wingdings" pitchFamily="2" charset="2"/>
+              </a:rPr>
+              <a:t>)):</a:t>
+            </a:r>
+          </a:p>
+          <a:p>
+            <a:r>
+              <a:rPr lang="en-US" sz="2200" dirty="0">
+                <a:sym typeface="Wingdings" pitchFamily="2" charset="2"/>
+              </a:rPr>
+              <a:t>	print(</a:t>
+            </a:r>
+            <a:r>
+              <a:rPr lang="en-US" sz="2200" dirty="0" err="1">
+                <a:sym typeface="Wingdings" pitchFamily="2" charset="2"/>
+              </a:rPr>
+              <a:t>myString</a:t>
+            </a:r>
+            <a:r>
+              <a:rPr lang="en-US" sz="2200" dirty="0">
+                <a:sym typeface="Wingdings" pitchFamily="2" charset="2"/>
+              </a:rPr>
+              <a:t>[x])</a:t>
+            </a:r>
+          </a:p>
+        </p:txBody>
+      </p:sp>
+      <p:sp>
+        <p:nvSpPr>
+          <p:cNvPr id="6" name="TextBox 5">
+            <a:extLst>
+              <a:ext uri="{FF2B5EF4-FFF2-40B4-BE49-F238E27FC236}">
+                <a16:creationId xmlns:a16="http://schemas.microsoft.com/office/drawing/2014/main" id="{70752080-E5A5-9F4B-9CBE-5A92C332040F}"/>
+              </a:ext>
+            </a:extLst>
+          </p:cNvPr>
+          <p:cNvSpPr txBox="1"/>
           <p:nvPr/>
         </p:nvSpPr>
         <p:spPr>
           <a:xfrm>
-            <a:off x="5469229" y="3973631"/>
-            <a:ext cx="6096000" cy="1754326"/>
+            <a:off x="6078828" y="2694630"/>
+            <a:ext cx="3216906" cy="369332"/>
           </a:xfrm>
           <a:prstGeom prst="rect">
             <a:avLst/>
           </a:prstGeom>
-        </p:spPr>
-        <p:txBody>
-          <a:bodyPr>
+          <a:noFill/>
+        </p:spPr>
+        <p:txBody>
+          <a:bodyPr wrap="none" rtlCol="0">
             <a:spAutoFit/>
           </a:bodyPr>
           <a:lstStyle/>
           <a:p>
             <a:r>
+              <a:rPr lang="en-US" dirty="0"/>
+              <a:t>okay, what what does </a:t>
+            </a:r>
+            <a:r>
+              <a:rPr lang="en-US" i="1" dirty="0"/>
+              <a:t>this</a:t>
+            </a:r>
+            <a:r>
+              <a:rPr lang="en-US" dirty="0"/>
+              <a:t> print?</a:t>
+            </a:r>
+          </a:p>
+        </p:txBody>
+      </p:sp>
+      <p:sp>
+        <p:nvSpPr>
+          <p:cNvPr id="4" name="TextBox 3">
+            <a:extLst>
+              <a:ext uri="{FF2B5EF4-FFF2-40B4-BE49-F238E27FC236}">
+                <a16:creationId xmlns:a16="http://schemas.microsoft.com/office/drawing/2014/main" id="{F6C1EDF6-D09E-854A-ACE5-ED646C608BF5}"/>
+              </a:ext>
+            </a:extLst>
+          </p:cNvPr>
+          <p:cNvSpPr txBox="1"/>
+          <p:nvPr/>
+        </p:nvSpPr>
+        <p:spPr>
+          <a:xfrm>
+            <a:off x="4597758" y="3503226"/>
+            <a:ext cx="3990901" cy="646331"/>
+          </a:xfrm>
+          <a:prstGeom prst="rect">
+            <a:avLst/>
+          </a:prstGeom>
+          <a:noFill/>
+        </p:spPr>
+        <p:txBody>
+          <a:bodyPr wrap="none" rtlCol="0">
+            <a:spAutoFit/>
+          </a:bodyPr>
+          <a:lstStyle/>
+          <a:p>
+            <a:r>
+              <a:rPr lang="en-US" dirty="0"/>
+              <a:t>(remember, the </a:t>
+            </a:r>
+            <a:r>
+              <a:rPr lang="en-US" dirty="0" err="1"/>
+              <a:t>len</a:t>
+            </a:r>
+            <a:r>
+              <a:rPr lang="en-US" dirty="0"/>
+              <a:t>() function prints the </a:t>
+            </a:r>
+          </a:p>
+          <a:p>
+            <a:r>
+              <a:rPr lang="en-US" dirty="0"/>
+              <a:t>length of the string you pass in)</a:t>
+            </a:r>
+          </a:p>
+        </p:txBody>
+      </p:sp>
+      <p:sp>
+        <p:nvSpPr>
+          <p:cNvPr id="7" name="Down Arrow 6">
+            <a:extLst>
+              <a:ext uri="{FF2B5EF4-FFF2-40B4-BE49-F238E27FC236}">
+                <a16:creationId xmlns:a16="http://schemas.microsoft.com/office/drawing/2014/main" id="{1D4D359E-F019-524A-8D04-CEAB5A2180BD}"/>
+              </a:ext>
+            </a:extLst>
+          </p:cNvPr>
+          <p:cNvSpPr/>
+          <p:nvPr/>
+        </p:nvSpPr>
+        <p:spPr>
+          <a:xfrm rot="6353669">
+            <a:off x="4049961" y="3047725"/>
+            <a:ext cx="413145" cy="591933"/>
+          </a:xfrm>
+          <a:prstGeom prst="downArrow">
+            <a:avLst>
+              <a:gd name="adj1" fmla="val 50000"/>
+              <a:gd name="adj2" fmla="val 53426"/>
+            </a:avLst>
+          </a:prstGeom>
+        </p:spPr>
+        <p:style>
+          <a:lnRef idx="2">
+            <a:schemeClr val="accent1">
+              <a:shade val="50000"/>
+            </a:schemeClr>
+          </a:lnRef>
+          <a:fillRef idx="1">
+            <a:schemeClr val="accent1"/>
+          </a:fillRef>
+          <a:effectRef idx="0">
+            <a:schemeClr val="accent1"/>
+          </a:effectRef>
+          <a:fontRef idx="minor">
+            <a:schemeClr val="lt1"/>
+          </a:fontRef>
+        </p:style>
+        <p:txBody>
+          <a:bodyPr rtlCol="0" anchor="ctr"/>
+          <a:lstStyle/>
+          <a:p>
+            <a:pPr algn="ctr"/>
+            <a:endParaRPr lang="en-US"/>
+          </a:p>
+        </p:txBody>
+      </p:sp>
+      <p:sp>
+        <p:nvSpPr>
+          <p:cNvPr id="8" name="TextBox 7">
+            <a:extLst>
+              <a:ext uri="{FF2B5EF4-FFF2-40B4-BE49-F238E27FC236}">
+                <a16:creationId xmlns:a16="http://schemas.microsoft.com/office/drawing/2014/main" id="{A56C95C3-5D42-EE40-9D97-2962D3A5A2D7}"/>
+              </a:ext>
+            </a:extLst>
+          </p:cNvPr>
+          <p:cNvSpPr txBox="1"/>
+          <p:nvPr/>
+        </p:nvSpPr>
+        <p:spPr>
+          <a:xfrm>
+            <a:off x="9247031" y="2002010"/>
+            <a:ext cx="1282723" cy="3139321"/>
+          </a:xfrm>
+          <a:prstGeom prst="rect">
+            <a:avLst/>
+          </a:prstGeom>
+          <a:solidFill>
+            <a:schemeClr val="accent1"/>
+          </a:solidFill>
+          <a:ln>
+            <a:solidFill>
+              <a:schemeClr val="accent1"/>
+            </a:solidFill>
+          </a:ln>
+        </p:spPr>
+        <p:txBody>
+          <a:bodyPr wrap="none" rtlCol="0">
+            <a:spAutoFit/>
+          </a:bodyPr>
+          <a:lstStyle/>
+          <a:p>
+            <a:r>
               <a:rPr lang="en-US" dirty="0">
-                <a:sym typeface="Wingdings" pitchFamily="2" charset="2"/>
-              </a:rPr>
-              <a:t>FOR REFERENCE: </a:t>
-            </a:r>
-          </a:p>
-          <a:p>
-            <a:r>
-              <a:rPr lang="en-US" dirty="0" err="1">
-                <a:sym typeface="Wingdings" pitchFamily="2" charset="2"/>
-              </a:rPr>
-              <a:t>myString</a:t>
-            </a:r>
+                <a:solidFill>
+                  <a:srgbClr val="FFFF00"/>
+                </a:solidFill>
+              </a:rPr>
+              <a:t>answer:  	h </a:t>
+            </a:r>
+          </a:p>
+          <a:p>
             <a:r>
               <a:rPr lang="en-US" dirty="0">
-                <a:sym typeface="Wingdings" pitchFamily="2" charset="2"/>
-              </a:rPr>
-              <a:t> = "hello world"</a:t>
+                <a:solidFill>
+                  <a:srgbClr val="FFFF00"/>
+                </a:solidFill>
+              </a:rPr>
+              <a:t>	e</a:t>
             </a:r>
           </a:p>
           <a:p>
             <a:r>
               <a:rPr lang="en-US" dirty="0">
-                <a:sym typeface="Wingdings" pitchFamily="2" charset="2"/>
-              </a:rPr>
-              <a:t>output = ''</a:t>
+                <a:solidFill>
+                  <a:srgbClr val="FFFF00"/>
+                </a:solidFill>
+              </a:rPr>
+              <a:t>	l</a:t>
             </a:r>
           </a:p>
           <a:p>
             <a:r>
               <a:rPr lang="en-US" dirty="0">
-                <a:sym typeface="Wingdings" pitchFamily="2" charset="2"/>
-              </a:rPr>
-              <a:t>for x in range(</a:t>
-            </a:r>
-            <a:r>
-              <a:rPr lang="en-US" dirty="0" err="1">
-                <a:sym typeface="Wingdings" pitchFamily="2" charset="2"/>
-              </a:rPr>
-              <a:t>len</a:t>
-            </a:r>
+                <a:solidFill>
+                  <a:srgbClr val="FFFF00"/>
+                </a:solidFill>
+              </a:rPr>
+              <a:t>	l</a:t>
+            </a:r>
+          </a:p>
+          <a:p>
             <a:r>
               <a:rPr lang="en-US" dirty="0">
-                <a:sym typeface="Wingdings" pitchFamily="2" charset="2"/>
-              </a:rPr>
-              <a:t>(</a:t>
-            </a:r>
-            <a:r>
-              <a:rPr lang="en-US" dirty="0" err="1">
-                <a:sym typeface="Wingdings" pitchFamily="2" charset="2"/>
-              </a:rPr>
-              <a:t>myString</a:t>
-            </a:r>
+                <a:solidFill>
+                  <a:srgbClr val="FFFF00"/>
+                </a:solidFill>
+              </a:rPr>
+              <a:t>	o</a:t>
+            </a:r>
+          </a:p>
+          <a:p>
             <a:r>
               <a:rPr lang="en-US" dirty="0">
-                <a:sym typeface="Wingdings" pitchFamily="2" charset="2"/>
-              </a:rPr>
-              <a:t>)-1, -1, -1):</a:t>
+                <a:solidFill>
+                  <a:srgbClr val="FFFF00"/>
+                </a:solidFill>
+              </a:rPr>
+              <a:t>	</a:t>
             </a:r>
           </a:p>
           <a:p>
             <a:r>
               <a:rPr lang="en-US" dirty="0">
-                <a:sym typeface="Wingdings" pitchFamily="2" charset="2"/>
-              </a:rPr>
-              <a:t>	output = output + </a:t>
-            </a:r>
-            <a:r>
-              <a:rPr lang="en-US" dirty="0" err="1">
-                <a:sym typeface="Wingdings" pitchFamily="2" charset="2"/>
-              </a:rPr>
-              <a:t>myString</a:t>
-            </a:r>
+                <a:solidFill>
+                  <a:srgbClr val="FFFF00"/>
+                </a:solidFill>
+              </a:rPr>
+              <a:t>	w</a:t>
+            </a:r>
+          </a:p>
+          <a:p>
             <a:r>
               <a:rPr lang="en-US" dirty="0">
-                <a:sym typeface="Wingdings" pitchFamily="2" charset="2"/>
-              </a:rPr>
-              <a:t>[x]</a:t>
+                <a:solidFill>
+                  <a:srgbClr val="FFFF00"/>
+                </a:solidFill>
+              </a:rPr>
+              <a:t>	o</a:t>
             </a:r>
           </a:p>
           <a:p>
             <a:r>
               <a:rPr lang="en-US" dirty="0">
-                <a:sym typeface="Wingdings" pitchFamily="2" charset="2"/>
-              </a:rPr>
-              <a:t>print(output)</a:t>
+                <a:solidFill>
+                  <a:srgbClr val="FFFF00"/>
+                </a:solidFill>
+              </a:rPr>
+              <a:t>	r</a:t>
+            </a:r>
+          </a:p>
+          <a:p>
+            <a:r>
+              <a:rPr lang="en-US" dirty="0">
+                <a:solidFill>
+                  <a:srgbClr val="FFFF00"/>
+                </a:solidFill>
+              </a:rPr>
+              <a:t>	l</a:t>
+            </a:r>
+          </a:p>
+          <a:p>
+            <a:r>
+              <a:rPr lang="en-US" dirty="0">
+                <a:solidFill>
+                  <a:srgbClr val="FFFF00"/>
+                </a:solidFill>
+              </a:rPr>
+              <a:t>	d</a:t>
             </a:r>
           </a:p>
         </p:txBody>
@@ -13403,7 +13757,803 @@
     </p:spTree>
     <p:extLst>
       <p:ext uri="{BB962C8B-B14F-4D97-AF65-F5344CB8AC3E}">
-        <p14:creationId xmlns:p14="http://schemas.microsoft.com/office/powerpoint/2010/main" val="1238425483"/>
+        <p14:creationId xmlns:p14="http://schemas.microsoft.com/office/powerpoint/2010/main" val="2710399490"/>
+      </p:ext>
+    </p:extLst>
+  </p:cSld>
+  <p:clrMapOvr>
+    <a:masterClrMapping/>
+  </p:clrMapOvr>
+</p:sld>
+</file>
+
+<file path=ppt/slides/slide37.xml><?xml version="1.0" encoding="utf-8"?>
+<p:sld xmlns:a="http://schemas.openxmlformats.org/drawingml/2006/main" xmlns:r="http://schemas.openxmlformats.org/officeDocument/2006/relationships" xmlns:p="http://schemas.openxmlformats.org/presentationml/2006/main">
+  <p:cSld>
+    <p:spTree>
+      <p:nvGrpSpPr>
+        <p:cNvPr id="1" name=""/>
+        <p:cNvGrpSpPr/>
+        <p:nvPr/>
+      </p:nvGrpSpPr>
+      <p:grpSpPr>
+        <a:xfrm>
+          <a:off x="0" y="0"/>
+          <a:ext cx="0" cy="0"/>
+          <a:chOff x="0" y="0"/>
+          <a:chExt cx="0" cy="0"/>
+        </a:xfrm>
+      </p:grpSpPr>
+      <p:sp>
+        <p:nvSpPr>
+          <p:cNvPr id="3" name="TextBox 2">
+            <a:extLst>
+              <a:ext uri="{FF2B5EF4-FFF2-40B4-BE49-F238E27FC236}">
+                <a16:creationId xmlns:a16="http://schemas.microsoft.com/office/drawing/2014/main" id="{E42D67C2-3010-0B46-A3B3-EDDCD41D3FBD}"/>
+              </a:ext>
+            </a:extLst>
+          </p:cNvPr>
+          <p:cNvSpPr txBox="1"/>
+          <p:nvPr/>
+        </p:nvSpPr>
+        <p:spPr>
+          <a:xfrm>
+            <a:off x="590309" y="555583"/>
+            <a:ext cx="11514666" cy="1015663"/>
+          </a:xfrm>
+          <a:prstGeom prst="rect">
+            <a:avLst/>
+          </a:prstGeom>
+          <a:noFill/>
+        </p:spPr>
+        <p:txBody>
+          <a:bodyPr wrap="square" rtlCol="0">
+            <a:spAutoFit/>
+          </a:bodyPr>
+          <a:lstStyle/>
+          <a:p>
+            <a:r>
+              <a:rPr lang="en-US" sz="6000" dirty="0">
+                <a:solidFill>
+                  <a:srgbClr val="FF0000"/>
+                </a:solidFill>
+              </a:rPr>
+              <a:t>FUN WITH ACCUMULATORS</a:t>
+            </a:r>
+          </a:p>
+        </p:txBody>
+      </p:sp>
+      <p:sp>
+        <p:nvSpPr>
+          <p:cNvPr id="2" name="TextBox 1">
+            <a:extLst>
+              <a:ext uri="{FF2B5EF4-FFF2-40B4-BE49-F238E27FC236}">
+                <a16:creationId xmlns:a16="http://schemas.microsoft.com/office/drawing/2014/main" id="{D547AD33-8FE1-584E-B510-08C013ACA746}"/>
+              </a:ext>
+            </a:extLst>
+          </p:cNvPr>
+          <p:cNvSpPr txBox="1"/>
+          <p:nvPr/>
+        </p:nvSpPr>
+        <p:spPr>
+          <a:xfrm>
+            <a:off x="6078828" y="3063962"/>
+            <a:ext cx="184731" cy="369332"/>
+          </a:xfrm>
+          <a:prstGeom prst="rect">
+            <a:avLst/>
+          </a:prstGeom>
+          <a:noFill/>
+        </p:spPr>
+        <p:txBody>
+          <a:bodyPr wrap="none" rtlCol="0">
+            <a:spAutoFit/>
+          </a:bodyPr>
+          <a:lstStyle/>
+          <a:p>
+            <a:endParaRPr lang="en-US" dirty="0"/>
+          </a:p>
+        </p:txBody>
+      </p:sp>
+      <p:sp>
+        <p:nvSpPr>
+          <p:cNvPr id="9" name="TextBox 8">
+            <a:extLst>
+              <a:ext uri="{FF2B5EF4-FFF2-40B4-BE49-F238E27FC236}">
+                <a16:creationId xmlns:a16="http://schemas.microsoft.com/office/drawing/2014/main" id="{1B119A5E-C909-7A43-8310-B5F1C6FCE541}"/>
+              </a:ext>
+            </a:extLst>
+          </p:cNvPr>
+          <p:cNvSpPr txBox="1"/>
+          <p:nvPr/>
+        </p:nvSpPr>
+        <p:spPr>
+          <a:xfrm>
+            <a:off x="590309" y="2002010"/>
+            <a:ext cx="10678886" cy="2123658"/>
+          </a:xfrm>
+          <a:prstGeom prst="rect">
+            <a:avLst/>
+          </a:prstGeom>
+          <a:noFill/>
+        </p:spPr>
+        <p:txBody>
+          <a:bodyPr wrap="square" rtlCol="0">
+            <a:spAutoFit/>
+          </a:bodyPr>
+          <a:lstStyle/>
+          <a:p>
+            <a:r>
+              <a:rPr lang="en-US" sz="2200" dirty="0">
+                <a:sym typeface="Wingdings" pitchFamily="2" charset="2"/>
+              </a:rPr>
+              <a:t>Consider this for loop:</a:t>
+            </a:r>
+          </a:p>
+          <a:p>
+            <a:endParaRPr lang="en-US" sz="2200" dirty="0">
+              <a:sym typeface="Wingdings" pitchFamily="2" charset="2"/>
+            </a:endParaRPr>
+          </a:p>
+          <a:p>
+            <a:r>
+              <a:rPr lang="en-US" sz="2200" dirty="0" err="1">
+                <a:sym typeface="Wingdings" pitchFamily="2" charset="2"/>
+              </a:rPr>
+              <a:t>myString</a:t>
+            </a:r>
+            <a:r>
+              <a:rPr lang="en-US" sz="2200" dirty="0">
+                <a:sym typeface="Wingdings" pitchFamily="2" charset="2"/>
+              </a:rPr>
+              <a:t> = "hello world"</a:t>
+            </a:r>
+          </a:p>
+          <a:p>
+            <a:r>
+              <a:rPr lang="en-US" sz="2200" dirty="0" err="1">
+                <a:sym typeface="Wingdings" pitchFamily="2" charset="2"/>
+              </a:rPr>
+              <a:t>outputString</a:t>
+            </a:r>
+            <a:r>
+              <a:rPr lang="en-US" sz="2200" dirty="0">
+                <a:sym typeface="Wingdings" pitchFamily="2" charset="2"/>
+              </a:rPr>
+              <a:t> = ''</a:t>
+            </a:r>
+          </a:p>
+          <a:p>
+            <a:r>
+              <a:rPr lang="en-US" sz="2200" dirty="0">
+                <a:sym typeface="Wingdings" pitchFamily="2" charset="2"/>
+              </a:rPr>
+              <a:t>for x in range(</a:t>
+            </a:r>
+            <a:r>
+              <a:rPr lang="en-US" sz="2200" dirty="0" err="1">
+                <a:sym typeface="Wingdings" pitchFamily="2" charset="2"/>
+              </a:rPr>
+              <a:t>len</a:t>
+            </a:r>
+            <a:r>
+              <a:rPr lang="en-US" sz="2200" dirty="0">
+                <a:sym typeface="Wingdings" pitchFamily="2" charset="2"/>
+              </a:rPr>
+              <a:t>(</a:t>
+            </a:r>
+            <a:r>
+              <a:rPr lang="en-US" sz="2200" dirty="0" err="1">
+                <a:sym typeface="Wingdings" pitchFamily="2" charset="2"/>
+              </a:rPr>
+              <a:t>myString</a:t>
+            </a:r>
+            <a:r>
+              <a:rPr lang="en-US" sz="2200" dirty="0">
+                <a:sym typeface="Wingdings" pitchFamily="2" charset="2"/>
+              </a:rPr>
+              <a:t>)):</a:t>
+            </a:r>
+          </a:p>
+          <a:p>
+            <a:r>
+              <a:rPr lang="en-US" sz="2200" dirty="0">
+                <a:sym typeface="Wingdings" pitchFamily="2" charset="2"/>
+              </a:rPr>
+              <a:t>	</a:t>
+            </a:r>
+            <a:r>
+              <a:rPr lang="en-US" sz="2200" dirty="0" err="1">
+                <a:sym typeface="Wingdings" pitchFamily="2" charset="2"/>
+              </a:rPr>
+              <a:t>outputString</a:t>
+            </a:r>
+            <a:r>
+              <a:rPr lang="en-US" sz="2200" dirty="0">
+                <a:sym typeface="Wingdings" pitchFamily="2" charset="2"/>
+              </a:rPr>
+              <a:t> = </a:t>
+            </a:r>
+            <a:r>
+              <a:rPr lang="en-US" sz="2200" dirty="0" err="1">
+                <a:sym typeface="Wingdings" pitchFamily="2" charset="2"/>
+              </a:rPr>
+              <a:t>outputString</a:t>
+            </a:r>
+            <a:r>
+              <a:rPr lang="en-US" sz="2200" dirty="0">
+                <a:sym typeface="Wingdings" pitchFamily="2" charset="2"/>
+              </a:rPr>
+              <a:t> + </a:t>
+            </a:r>
+            <a:r>
+              <a:rPr lang="en-US" sz="2200" dirty="0" err="1">
+                <a:sym typeface="Wingdings" pitchFamily="2" charset="2"/>
+              </a:rPr>
+              <a:t>myString</a:t>
+            </a:r>
+            <a:r>
+              <a:rPr lang="en-US" sz="2200" dirty="0">
+                <a:sym typeface="Wingdings" pitchFamily="2" charset="2"/>
+              </a:rPr>
+              <a:t>[x]</a:t>
+            </a:r>
+          </a:p>
+        </p:txBody>
+      </p:sp>
+      <p:sp>
+        <p:nvSpPr>
+          <p:cNvPr id="6" name="TextBox 5">
+            <a:extLst>
+              <a:ext uri="{FF2B5EF4-FFF2-40B4-BE49-F238E27FC236}">
+                <a16:creationId xmlns:a16="http://schemas.microsoft.com/office/drawing/2014/main" id="{70752080-E5A5-9F4B-9CBE-5A92C332040F}"/>
+              </a:ext>
+            </a:extLst>
+          </p:cNvPr>
+          <p:cNvSpPr txBox="1"/>
+          <p:nvPr/>
+        </p:nvSpPr>
+        <p:spPr>
+          <a:xfrm>
+            <a:off x="6078828" y="2694630"/>
+            <a:ext cx="3216906" cy="369332"/>
+          </a:xfrm>
+          <a:prstGeom prst="rect">
+            <a:avLst/>
+          </a:prstGeom>
+          <a:noFill/>
+        </p:spPr>
+        <p:txBody>
+          <a:bodyPr wrap="none" rtlCol="0">
+            <a:spAutoFit/>
+          </a:bodyPr>
+          <a:lstStyle/>
+          <a:p>
+            <a:r>
+              <a:rPr lang="en-US" dirty="0"/>
+              <a:t>okay, what what does </a:t>
+            </a:r>
+            <a:r>
+              <a:rPr lang="en-US" i="1" dirty="0"/>
+              <a:t>this</a:t>
+            </a:r>
+            <a:r>
+              <a:rPr lang="en-US" dirty="0"/>
+              <a:t> print?</a:t>
+            </a:r>
+          </a:p>
+        </p:txBody>
+      </p:sp>
+      <p:sp>
+        <p:nvSpPr>
+          <p:cNvPr id="7" name="TextBox 6">
+            <a:extLst>
+              <a:ext uri="{FF2B5EF4-FFF2-40B4-BE49-F238E27FC236}">
+                <a16:creationId xmlns:a16="http://schemas.microsoft.com/office/drawing/2014/main" id="{4C4125A0-B4D9-384F-A4B6-99DE3259158D}"/>
+              </a:ext>
+            </a:extLst>
+          </p:cNvPr>
+          <p:cNvSpPr txBox="1"/>
+          <p:nvPr/>
+        </p:nvSpPr>
+        <p:spPr>
+          <a:xfrm>
+            <a:off x="9295734" y="4371766"/>
+            <a:ext cx="2037224" cy="369332"/>
+          </a:xfrm>
+          <a:prstGeom prst="rect">
+            <a:avLst/>
+          </a:prstGeom>
+          <a:solidFill>
+            <a:schemeClr val="accent1"/>
+          </a:solidFill>
+          <a:ln>
+            <a:solidFill>
+              <a:schemeClr val="accent1"/>
+            </a:solidFill>
+          </a:ln>
+        </p:spPr>
+        <p:txBody>
+          <a:bodyPr wrap="none" rtlCol="0">
+            <a:spAutoFit/>
+          </a:bodyPr>
+          <a:lstStyle/>
+          <a:p>
+            <a:r>
+              <a:rPr lang="en-US" dirty="0">
+                <a:solidFill>
+                  <a:srgbClr val="FFFF00"/>
+                </a:solidFill>
+              </a:rPr>
+              <a:t>answer: hello world</a:t>
+            </a:r>
+          </a:p>
+        </p:txBody>
+      </p:sp>
+    </p:spTree>
+    <p:extLst>
+      <p:ext uri="{BB962C8B-B14F-4D97-AF65-F5344CB8AC3E}">
+        <p14:creationId xmlns:p14="http://schemas.microsoft.com/office/powerpoint/2010/main" val="2969649936"/>
+      </p:ext>
+    </p:extLst>
+  </p:cSld>
+  <p:clrMapOvr>
+    <a:masterClrMapping/>
+  </p:clrMapOvr>
+</p:sld>
+</file>
+
+<file path=ppt/slides/slide38.xml><?xml version="1.0" encoding="utf-8"?>
+<p:sld xmlns:a="http://schemas.openxmlformats.org/drawingml/2006/main" xmlns:r="http://schemas.openxmlformats.org/officeDocument/2006/relationships" xmlns:p="http://schemas.openxmlformats.org/presentationml/2006/main">
+  <p:cSld>
+    <p:spTree>
+      <p:nvGrpSpPr>
+        <p:cNvPr id="1" name=""/>
+        <p:cNvGrpSpPr/>
+        <p:nvPr/>
+      </p:nvGrpSpPr>
+      <p:grpSpPr>
+        <a:xfrm>
+          <a:off x="0" y="0"/>
+          <a:ext cx="0" cy="0"/>
+          <a:chOff x="0" y="0"/>
+          <a:chExt cx="0" cy="0"/>
+        </a:xfrm>
+      </p:grpSpPr>
+      <p:sp>
+        <p:nvSpPr>
+          <p:cNvPr id="3" name="TextBox 2">
+            <a:extLst>
+              <a:ext uri="{FF2B5EF4-FFF2-40B4-BE49-F238E27FC236}">
+                <a16:creationId xmlns:a16="http://schemas.microsoft.com/office/drawing/2014/main" id="{E42D67C2-3010-0B46-A3B3-EDDCD41D3FBD}"/>
+              </a:ext>
+            </a:extLst>
+          </p:cNvPr>
+          <p:cNvSpPr txBox="1"/>
+          <p:nvPr/>
+        </p:nvSpPr>
+        <p:spPr>
+          <a:xfrm>
+            <a:off x="590309" y="555583"/>
+            <a:ext cx="11514666" cy="1015663"/>
+          </a:xfrm>
+          <a:prstGeom prst="rect">
+            <a:avLst/>
+          </a:prstGeom>
+          <a:noFill/>
+        </p:spPr>
+        <p:txBody>
+          <a:bodyPr wrap="square" rtlCol="0">
+            <a:spAutoFit/>
+          </a:bodyPr>
+          <a:lstStyle/>
+          <a:p>
+            <a:r>
+              <a:rPr lang="en-US" sz="6000" dirty="0">
+                <a:solidFill>
+                  <a:srgbClr val="FF0000"/>
+                </a:solidFill>
+              </a:rPr>
+              <a:t>IN-CLASS DISCUSSION</a:t>
+            </a:r>
+          </a:p>
+        </p:txBody>
+      </p:sp>
+      <p:sp>
+        <p:nvSpPr>
+          <p:cNvPr id="2" name="TextBox 1">
+            <a:extLst>
+              <a:ext uri="{FF2B5EF4-FFF2-40B4-BE49-F238E27FC236}">
+                <a16:creationId xmlns:a16="http://schemas.microsoft.com/office/drawing/2014/main" id="{D547AD33-8FE1-584E-B510-08C013ACA746}"/>
+              </a:ext>
+            </a:extLst>
+          </p:cNvPr>
+          <p:cNvSpPr txBox="1"/>
+          <p:nvPr/>
+        </p:nvSpPr>
+        <p:spPr>
+          <a:xfrm>
+            <a:off x="6078828" y="3063962"/>
+            <a:ext cx="184731" cy="369332"/>
+          </a:xfrm>
+          <a:prstGeom prst="rect">
+            <a:avLst/>
+          </a:prstGeom>
+          <a:noFill/>
+        </p:spPr>
+        <p:txBody>
+          <a:bodyPr wrap="none" rtlCol="0">
+            <a:spAutoFit/>
+          </a:bodyPr>
+          <a:lstStyle/>
+          <a:p>
+            <a:endParaRPr lang="en-US" dirty="0"/>
+          </a:p>
+        </p:txBody>
+      </p:sp>
+      <p:sp>
+        <p:nvSpPr>
+          <p:cNvPr id="9" name="TextBox 8">
+            <a:extLst>
+              <a:ext uri="{FF2B5EF4-FFF2-40B4-BE49-F238E27FC236}">
+                <a16:creationId xmlns:a16="http://schemas.microsoft.com/office/drawing/2014/main" id="{1B119A5E-C909-7A43-8310-B5F1C6FCE541}"/>
+              </a:ext>
+            </a:extLst>
+          </p:cNvPr>
+          <p:cNvSpPr txBox="1"/>
+          <p:nvPr/>
+        </p:nvSpPr>
+        <p:spPr>
+          <a:xfrm>
+            <a:off x="590309" y="2002010"/>
+            <a:ext cx="10678886" cy="4832092"/>
+          </a:xfrm>
+          <a:prstGeom prst="rect">
+            <a:avLst/>
+          </a:prstGeom>
+          <a:noFill/>
+        </p:spPr>
+        <p:txBody>
+          <a:bodyPr wrap="square" rtlCol="0">
+            <a:spAutoFit/>
+          </a:bodyPr>
+          <a:lstStyle/>
+          <a:p>
+            <a:r>
+              <a:rPr lang="en-US" sz="2200" dirty="0">
+                <a:sym typeface="Wingdings" pitchFamily="2" charset="2"/>
+              </a:rPr>
+              <a:t>Remember that the range function is pretty flexible.</a:t>
+            </a:r>
+          </a:p>
+          <a:p>
+            <a:endParaRPr lang="en-US" sz="2200" dirty="0">
+              <a:sym typeface="Wingdings" pitchFamily="2" charset="2"/>
+            </a:endParaRPr>
+          </a:p>
+          <a:p>
+            <a:endParaRPr lang="en-US" sz="2200" dirty="0">
+              <a:sym typeface="Wingdings" pitchFamily="2" charset="2"/>
+            </a:endParaRPr>
+          </a:p>
+          <a:p>
+            <a:r>
+              <a:rPr lang="en-US" sz="2200" dirty="0">
+                <a:sym typeface="Wingdings" pitchFamily="2" charset="2"/>
+              </a:rPr>
+              <a:t>range(starting point, ending point, increment) </a:t>
+            </a:r>
+          </a:p>
+          <a:p>
+            <a:endParaRPr lang="en-US" sz="2200" dirty="0">
+              <a:sym typeface="Wingdings" pitchFamily="2" charset="2"/>
+            </a:endParaRPr>
+          </a:p>
+          <a:p>
+            <a:r>
+              <a:rPr lang="en-US" sz="2200" dirty="0">
+                <a:sym typeface="Wingdings" pitchFamily="2" charset="2"/>
+              </a:rPr>
+              <a:t>for x in range(0, 10, 2):</a:t>
+            </a:r>
+          </a:p>
+          <a:p>
+            <a:r>
+              <a:rPr lang="en-US" sz="2200" dirty="0">
+                <a:sym typeface="Wingdings" pitchFamily="2" charset="2"/>
+              </a:rPr>
+              <a:t>	print(x)			</a:t>
+            </a:r>
+          </a:p>
+          <a:p>
+            <a:endParaRPr lang="en-US" sz="2200" dirty="0">
+              <a:sym typeface="Wingdings" pitchFamily="2" charset="2"/>
+            </a:endParaRPr>
+          </a:p>
+          <a:p>
+            <a:r>
+              <a:rPr lang="en-US" sz="2200" dirty="0">
+                <a:sym typeface="Wingdings" pitchFamily="2" charset="2"/>
+              </a:rPr>
+              <a:t>prints: </a:t>
+            </a:r>
+          </a:p>
+          <a:p>
+            <a:r>
+              <a:rPr lang="en-US" sz="2200" dirty="0">
+                <a:sym typeface="Wingdings" pitchFamily="2" charset="2"/>
+              </a:rPr>
+              <a:t>0</a:t>
+            </a:r>
+          </a:p>
+          <a:p>
+            <a:r>
+              <a:rPr lang="en-US" sz="2200" dirty="0">
+                <a:sym typeface="Wingdings" pitchFamily="2" charset="2"/>
+              </a:rPr>
+              <a:t>2</a:t>
+            </a:r>
+          </a:p>
+          <a:p>
+            <a:r>
+              <a:rPr lang="en-US" sz="2200" dirty="0">
+                <a:sym typeface="Wingdings" pitchFamily="2" charset="2"/>
+              </a:rPr>
+              <a:t>4</a:t>
+            </a:r>
+          </a:p>
+          <a:p>
+            <a:r>
+              <a:rPr lang="en-US" sz="2200" dirty="0">
+                <a:sym typeface="Wingdings" pitchFamily="2" charset="2"/>
+              </a:rPr>
+              <a:t>6</a:t>
+            </a:r>
+          </a:p>
+          <a:p>
+            <a:r>
+              <a:rPr lang="en-US" sz="2200" dirty="0">
+                <a:sym typeface="Wingdings" pitchFamily="2" charset="2"/>
+              </a:rPr>
+              <a:t>8</a:t>
+            </a:r>
+          </a:p>
+        </p:txBody>
+      </p:sp>
+    </p:spTree>
+    <p:extLst>
+      <p:ext uri="{BB962C8B-B14F-4D97-AF65-F5344CB8AC3E}">
+        <p14:creationId xmlns:p14="http://schemas.microsoft.com/office/powerpoint/2010/main" val="1874559920"/>
+      </p:ext>
+    </p:extLst>
+  </p:cSld>
+  <p:clrMapOvr>
+    <a:masterClrMapping/>
+  </p:clrMapOvr>
+</p:sld>
+</file>
+
+<file path=ppt/slides/slide39.xml><?xml version="1.0" encoding="utf-8"?>
+<p:sld xmlns:a="http://schemas.openxmlformats.org/drawingml/2006/main" xmlns:r="http://schemas.openxmlformats.org/officeDocument/2006/relationships" xmlns:p="http://schemas.openxmlformats.org/presentationml/2006/main">
+  <p:cSld>
+    <p:spTree>
+      <p:nvGrpSpPr>
+        <p:cNvPr id="1" name=""/>
+        <p:cNvGrpSpPr/>
+        <p:nvPr/>
+      </p:nvGrpSpPr>
+      <p:grpSpPr>
+        <a:xfrm>
+          <a:off x="0" y="0"/>
+          <a:ext cx="0" cy="0"/>
+          <a:chOff x="0" y="0"/>
+          <a:chExt cx="0" cy="0"/>
+        </a:xfrm>
+      </p:grpSpPr>
+      <p:sp>
+        <p:nvSpPr>
+          <p:cNvPr id="3" name="TextBox 2">
+            <a:extLst>
+              <a:ext uri="{FF2B5EF4-FFF2-40B4-BE49-F238E27FC236}">
+                <a16:creationId xmlns:a16="http://schemas.microsoft.com/office/drawing/2014/main" id="{E42D67C2-3010-0B46-A3B3-EDDCD41D3FBD}"/>
+              </a:ext>
+            </a:extLst>
+          </p:cNvPr>
+          <p:cNvSpPr txBox="1"/>
+          <p:nvPr/>
+        </p:nvSpPr>
+        <p:spPr>
+          <a:xfrm>
+            <a:off x="590309" y="555583"/>
+            <a:ext cx="11514666" cy="1015663"/>
+          </a:xfrm>
+          <a:prstGeom prst="rect">
+            <a:avLst/>
+          </a:prstGeom>
+          <a:noFill/>
+        </p:spPr>
+        <p:txBody>
+          <a:bodyPr wrap="square" rtlCol="0">
+            <a:spAutoFit/>
+          </a:bodyPr>
+          <a:lstStyle/>
+          <a:p>
+            <a:r>
+              <a:rPr lang="en-US" sz="6000" dirty="0">
+                <a:solidFill>
+                  <a:srgbClr val="FF0000"/>
+                </a:solidFill>
+              </a:rPr>
+              <a:t>IN-CLASS DISCUSSION</a:t>
+            </a:r>
+          </a:p>
+        </p:txBody>
+      </p:sp>
+      <p:sp>
+        <p:nvSpPr>
+          <p:cNvPr id="2" name="TextBox 1">
+            <a:extLst>
+              <a:ext uri="{FF2B5EF4-FFF2-40B4-BE49-F238E27FC236}">
+                <a16:creationId xmlns:a16="http://schemas.microsoft.com/office/drawing/2014/main" id="{D547AD33-8FE1-584E-B510-08C013ACA746}"/>
+              </a:ext>
+            </a:extLst>
+          </p:cNvPr>
+          <p:cNvSpPr txBox="1"/>
+          <p:nvPr/>
+        </p:nvSpPr>
+        <p:spPr>
+          <a:xfrm>
+            <a:off x="6078828" y="3063962"/>
+            <a:ext cx="184731" cy="369332"/>
+          </a:xfrm>
+          <a:prstGeom prst="rect">
+            <a:avLst/>
+          </a:prstGeom>
+          <a:noFill/>
+        </p:spPr>
+        <p:txBody>
+          <a:bodyPr wrap="none" rtlCol="0">
+            <a:spAutoFit/>
+          </a:bodyPr>
+          <a:lstStyle/>
+          <a:p>
+            <a:endParaRPr lang="en-US" dirty="0"/>
+          </a:p>
+        </p:txBody>
+      </p:sp>
+      <p:sp>
+        <p:nvSpPr>
+          <p:cNvPr id="9" name="TextBox 8">
+            <a:extLst>
+              <a:ext uri="{FF2B5EF4-FFF2-40B4-BE49-F238E27FC236}">
+                <a16:creationId xmlns:a16="http://schemas.microsoft.com/office/drawing/2014/main" id="{1B119A5E-C909-7A43-8310-B5F1C6FCE541}"/>
+              </a:ext>
+            </a:extLst>
+          </p:cNvPr>
+          <p:cNvSpPr txBox="1"/>
+          <p:nvPr/>
+        </p:nvSpPr>
+        <p:spPr>
+          <a:xfrm>
+            <a:off x="590309" y="2002010"/>
+            <a:ext cx="10678886" cy="4832092"/>
+          </a:xfrm>
+          <a:prstGeom prst="rect">
+            <a:avLst/>
+          </a:prstGeom>
+          <a:noFill/>
+        </p:spPr>
+        <p:txBody>
+          <a:bodyPr wrap="square" rtlCol="0">
+            <a:spAutoFit/>
+          </a:bodyPr>
+          <a:lstStyle/>
+          <a:p>
+            <a:r>
+              <a:rPr lang="en-US" sz="2200" dirty="0">
+                <a:sym typeface="Wingdings" pitchFamily="2" charset="2"/>
+              </a:rPr>
+              <a:t>Remember that the range function is pretty flexible.</a:t>
+            </a:r>
+          </a:p>
+          <a:p>
+            <a:endParaRPr lang="en-US" sz="2200" dirty="0">
+              <a:sym typeface="Wingdings" pitchFamily="2" charset="2"/>
+            </a:endParaRPr>
+          </a:p>
+          <a:p>
+            <a:endParaRPr lang="en-US" sz="2200" dirty="0">
+              <a:sym typeface="Wingdings" pitchFamily="2" charset="2"/>
+            </a:endParaRPr>
+          </a:p>
+          <a:p>
+            <a:r>
+              <a:rPr lang="en-US" sz="2200" dirty="0">
+                <a:sym typeface="Wingdings" pitchFamily="2" charset="2"/>
+              </a:rPr>
+              <a:t>range(starting point, ending point, increment) </a:t>
+            </a:r>
+          </a:p>
+          <a:p>
+            <a:endParaRPr lang="en-US" sz="2200" dirty="0">
+              <a:sym typeface="Wingdings" pitchFamily="2" charset="2"/>
+            </a:endParaRPr>
+          </a:p>
+          <a:p>
+            <a:r>
+              <a:rPr lang="en-US" sz="2200" dirty="0">
+                <a:sym typeface="Wingdings" pitchFamily="2" charset="2"/>
+              </a:rPr>
+              <a:t>for x in range(10, -1, -2):</a:t>
+            </a:r>
+          </a:p>
+          <a:p>
+            <a:r>
+              <a:rPr lang="en-US" sz="2200" dirty="0">
+                <a:sym typeface="Wingdings" pitchFamily="2" charset="2"/>
+              </a:rPr>
+              <a:t>	print(x)			</a:t>
+            </a:r>
+          </a:p>
+          <a:p>
+            <a:endParaRPr lang="en-US" sz="2200" dirty="0">
+              <a:sym typeface="Wingdings" pitchFamily="2" charset="2"/>
+            </a:endParaRPr>
+          </a:p>
+          <a:p>
+            <a:r>
+              <a:rPr lang="en-US" sz="2200" dirty="0">
+                <a:sym typeface="Wingdings" pitchFamily="2" charset="2"/>
+              </a:rPr>
+              <a:t>prints:</a:t>
+            </a:r>
+          </a:p>
+          <a:p>
+            <a:r>
+              <a:rPr lang="en-US" sz="2200" dirty="0">
+                <a:sym typeface="Wingdings" pitchFamily="2" charset="2"/>
+              </a:rPr>
+              <a:t>10</a:t>
+            </a:r>
+          </a:p>
+          <a:p>
+            <a:r>
+              <a:rPr lang="en-US" sz="2200" dirty="0">
+                <a:sym typeface="Wingdings" pitchFamily="2" charset="2"/>
+              </a:rPr>
+              <a:t>8</a:t>
+            </a:r>
+          </a:p>
+          <a:p>
+            <a:r>
+              <a:rPr lang="en-US" sz="2200" dirty="0">
+                <a:sym typeface="Wingdings" pitchFamily="2" charset="2"/>
+              </a:rPr>
+              <a:t>6</a:t>
+            </a:r>
+          </a:p>
+          <a:p>
+            <a:r>
+              <a:rPr lang="en-US" sz="2200" dirty="0">
+                <a:sym typeface="Wingdings" pitchFamily="2" charset="2"/>
+              </a:rPr>
+              <a:t>4</a:t>
+            </a:r>
+          </a:p>
+          <a:p>
+            <a:r>
+              <a:rPr lang="en-US" sz="2200" dirty="0">
+                <a:sym typeface="Wingdings" pitchFamily="2" charset="2"/>
+              </a:rPr>
+              <a:t>2</a:t>
+            </a:r>
+          </a:p>
+        </p:txBody>
+      </p:sp>
+    </p:spTree>
+    <p:extLst>
+      <p:ext uri="{BB962C8B-B14F-4D97-AF65-F5344CB8AC3E}">
+        <p14:creationId xmlns:p14="http://schemas.microsoft.com/office/powerpoint/2010/main" val="2675264383"/>
       </p:ext>
     </p:extLst>
   </p:cSld>
@@ -13640,6 +14790,619 @@
     <p:extLst>
       <p:ext uri="{BB962C8B-B14F-4D97-AF65-F5344CB8AC3E}">
         <p14:creationId xmlns:p14="http://schemas.microsoft.com/office/powerpoint/2010/main" val="4039933975"/>
+      </p:ext>
+    </p:extLst>
+  </p:cSld>
+  <p:clrMapOvr>
+    <a:masterClrMapping/>
+  </p:clrMapOvr>
+</p:sld>
+</file>
+
+<file path=ppt/slides/slide40.xml><?xml version="1.0" encoding="utf-8"?>
+<p:sld xmlns:a="http://schemas.openxmlformats.org/drawingml/2006/main" xmlns:r="http://schemas.openxmlformats.org/officeDocument/2006/relationships" xmlns:p="http://schemas.openxmlformats.org/presentationml/2006/main">
+  <p:cSld>
+    <p:spTree>
+      <p:nvGrpSpPr>
+        <p:cNvPr id="1" name=""/>
+        <p:cNvGrpSpPr/>
+        <p:nvPr/>
+      </p:nvGrpSpPr>
+      <p:grpSpPr>
+        <a:xfrm>
+          <a:off x="0" y="0"/>
+          <a:ext cx="0" cy="0"/>
+          <a:chOff x="0" y="0"/>
+          <a:chExt cx="0" cy="0"/>
+        </a:xfrm>
+      </p:grpSpPr>
+      <p:sp>
+        <p:nvSpPr>
+          <p:cNvPr id="3" name="TextBox 2">
+            <a:extLst>
+              <a:ext uri="{FF2B5EF4-FFF2-40B4-BE49-F238E27FC236}">
+                <a16:creationId xmlns:a16="http://schemas.microsoft.com/office/drawing/2014/main" id="{E42D67C2-3010-0B46-A3B3-EDDCD41D3FBD}"/>
+              </a:ext>
+            </a:extLst>
+          </p:cNvPr>
+          <p:cNvSpPr txBox="1"/>
+          <p:nvPr/>
+        </p:nvSpPr>
+        <p:spPr>
+          <a:xfrm>
+            <a:off x="590309" y="555583"/>
+            <a:ext cx="11514666" cy="1015663"/>
+          </a:xfrm>
+          <a:prstGeom prst="rect">
+            <a:avLst/>
+          </a:prstGeom>
+          <a:noFill/>
+        </p:spPr>
+        <p:txBody>
+          <a:bodyPr wrap="square" rtlCol="0">
+            <a:spAutoFit/>
+          </a:bodyPr>
+          <a:lstStyle/>
+          <a:p>
+            <a:r>
+              <a:rPr lang="en-US" sz="6000" dirty="0">
+                <a:solidFill>
+                  <a:srgbClr val="FF0000"/>
+                </a:solidFill>
+              </a:rPr>
+              <a:t>IN-CLASS DISCUSSION</a:t>
+            </a:r>
+          </a:p>
+        </p:txBody>
+      </p:sp>
+      <p:sp>
+        <p:nvSpPr>
+          <p:cNvPr id="2" name="TextBox 1">
+            <a:extLst>
+              <a:ext uri="{FF2B5EF4-FFF2-40B4-BE49-F238E27FC236}">
+                <a16:creationId xmlns:a16="http://schemas.microsoft.com/office/drawing/2014/main" id="{D547AD33-8FE1-584E-B510-08C013ACA746}"/>
+              </a:ext>
+            </a:extLst>
+          </p:cNvPr>
+          <p:cNvSpPr txBox="1"/>
+          <p:nvPr/>
+        </p:nvSpPr>
+        <p:spPr>
+          <a:xfrm>
+            <a:off x="6078828" y="3063962"/>
+            <a:ext cx="184731" cy="369332"/>
+          </a:xfrm>
+          <a:prstGeom prst="rect">
+            <a:avLst/>
+          </a:prstGeom>
+          <a:noFill/>
+        </p:spPr>
+        <p:txBody>
+          <a:bodyPr wrap="none" rtlCol="0">
+            <a:spAutoFit/>
+          </a:bodyPr>
+          <a:lstStyle/>
+          <a:p>
+            <a:endParaRPr lang="en-US" dirty="0"/>
+          </a:p>
+        </p:txBody>
+      </p:sp>
+      <p:sp>
+        <p:nvSpPr>
+          <p:cNvPr id="9" name="TextBox 8">
+            <a:extLst>
+              <a:ext uri="{FF2B5EF4-FFF2-40B4-BE49-F238E27FC236}">
+                <a16:creationId xmlns:a16="http://schemas.microsoft.com/office/drawing/2014/main" id="{1B119A5E-C909-7A43-8310-B5F1C6FCE541}"/>
+              </a:ext>
+            </a:extLst>
+          </p:cNvPr>
+          <p:cNvSpPr txBox="1"/>
+          <p:nvPr/>
+        </p:nvSpPr>
+        <p:spPr>
+          <a:xfrm>
+            <a:off x="590309" y="2002010"/>
+            <a:ext cx="10678886" cy="2462213"/>
+          </a:xfrm>
+          <a:prstGeom prst="rect">
+            <a:avLst/>
+          </a:prstGeom>
+          <a:noFill/>
+        </p:spPr>
+        <p:txBody>
+          <a:bodyPr wrap="square" rtlCol="0">
+            <a:spAutoFit/>
+          </a:bodyPr>
+          <a:lstStyle/>
+          <a:p>
+            <a:r>
+              <a:rPr lang="en-US" sz="2200" dirty="0">
+                <a:sym typeface="Wingdings" pitchFamily="2" charset="2"/>
+              </a:rPr>
+              <a:t>What does this print?</a:t>
+            </a:r>
+          </a:p>
+          <a:p>
+            <a:endParaRPr lang="en-US" sz="2200" dirty="0">
+              <a:sym typeface="Wingdings" pitchFamily="2" charset="2"/>
+            </a:endParaRPr>
+          </a:p>
+          <a:p>
+            <a:r>
+              <a:rPr lang="en-US" sz="2200" dirty="0" err="1">
+                <a:sym typeface="Wingdings" pitchFamily="2" charset="2"/>
+              </a:rPr>
+              <a:t>myString</a:t>
+            </a:r>
+            <a:r>
+              <a:rPr lang="en-US" sz="2200" dirty="0">
+                <a:sym typeface="Wingdings" pitchFamily="2" charset="2"/>
+              </a:rPr>
+              <a:t> = "hello world"</a:t>
+            </a:r>
+          </a:p>
+          <a:p>
+            <a:r>
+              <a:rPr lang="en-US" sz="2200" dirty="0">
+                <a:sym typeface="Wingdings" pitchFamily="2" charset="2"/>
+              </a:rPr>
+              <a:t>output = ''</a:t>
+            </a:r>
+          </a:p>
+          <a:p>
+            <a:r>
+              <a:rPr lang="en-US" sz="2200" dirty="0">
+                <a:sym typeface="Wingdings" pitchFamily="2" charset="2"/>
+              </a:rPr>
+              <a:t>for x in range(</a:t>
+            </a:r>
+            <a:r>
+              <a:rPr lang="en-US" sz="2200" dirty="0" err="1">
+                <a:sym typeface="Wingdings" pitchFamily="2" charset="2"/>
+              </a:rPr>
+              <a:t>len</a:t>
+            </a:r>
+            <a:r>
+              <a:rPr lang="en-US" sz="2200" dirty="0">
+                <a:sym typeface="Wingdings" pitchFamily="2" charset="2"/>
+              </a:rPr>
+              <a:t>(</a:t>
+            </a:r>
+            <a:r>
+              <a:rPr lang="en-US" sz="2200" dirty="0" err="1">
+                <a:sym typeface="Wingdings" pitchFamily="2" charset="2"/>
+              </a:rPr>
+              <a:t>myString</a:t>
+            </a:r>
+            <a:r>
+              <a:rPr lang="en-US" sz="2200" dirty="0">
+                <a:sym typeface="Wingdings" pitchFamily="2" charset="2"/>
+              </a:rPr>
+              <a:t>)-1, -1, -1):</a:t>
+            </a:r>
+          </a:p>
+          <a:p>
+            <a:r>
+              <a:rPr lang="en-US" sz="2200" dirty="0">
+                <a:sym typeface="Wingdings" pitchFamily="2" charset="2"/>
+              </a:rPr>
+              <a:t>	output = output + </a:t>
+            </a:r>
+            <a:r>
+              <a:rPr lang="en-US" sz="2200" dirty="0" err="1">
+                <a:sym typeface="Wingdings" pitchFamily="2" charset="2"/>
+              </a:rPr>
+              <a:t>myString</a:t>
+            </a:r>
+            <a:r>
+              <a:rPr lang="en-US" sz="2200" dirty="0">
+                <a:sym typeface="Wingdings" pitchFamily="2" charset="2"/>
+              </a:rPr>
+              <a:t>[x]</a:t>
+            </a:r>
+          </a:p>
+          <a:p>
+            <a:r>
+              <a:rPr lang="en-US" sz="2200" dirty="0">
+                <a:sym typeface="Wingdings" pitchFamily="2" charset="2"/>
+              </a:rPr>
+              <a:t>print(output)</a:t>
+            </a:r>
+          </a:p>
+        </p:txBody>
+      </p:sp>
+      <p:sp>
+        <p:nvSpPr>
+          <p:cNvPr id="4" name="TextBox 3">
+            <a:extLst>
+              <a:ext uri="{FF2B5EF4-FFF2-40B4-BE49-F238E27FC236}">
+                <a16:creationId xmlns:a16="http://schemas.microsoft.com/office/drawing/2014/main" id="{F5F129F1-9F26-CD4B-AF46-F9F1F3ED943F}"/>
+              </a:ext>
+            </a:extLst>
+          </p:cNvPr>
+          <p:cNvSpPr txBox="1"/>
+          <p:nvPr/>
+        </p:nvSpPr>
+        <p:spPr>
+          <a:xfrm>
+            <a:off x="8615966" y="4464223"/>
+            <a:ext cx="1751708" cy="646331"/>
+          </a:xfrm>
+          <a:prstGeom prst="rect">
+            <a:avLst/>
+          </a:prstGeom>
+          <a:solidFill>
+            <a:schemeClr val="accent1"/>
+          </a:solidFill>
+        </p:spPr>
+        <p:txBody>
+          <a:bodyPr wrap="square" rtlCol="0">
+            <a:spAutoFit/>
+          </a:bodyPr>
+          <a:lstStyle/>
+          <a:p>
+            <a:r>
+              <a:rPr lang="en-US" dirty="0">
+                <a:solidFill>
+                  <a:srgbClr val="FFFF00"/>
+                </a:solidFill>
+              </a:rPr>
+              <a:t>answer:</a:t>
+            </a:r>
+          </a:p>
+          <a:p>
+            <a:r>
+              <a:rPr lang="en-US" dirty="0">
+                <a:solidFill>
+                  <a:srgbClr val="FFFF00"/>
+                </a:solidFill>
+              </a:rPr>
+              <a:t> </a:t>
+            </a:r>
+            <a:r>
+              <a:rPr lang="en-US" dirty="0" err="1">
+                <a:solidFill>
+                  <a:srgbClr val="FFFF00"/>
+                </a:solidFill>
+              </a:rPr>
+              <a:t>dlrow</a:t>
+            </a:r>
+            <a:r>
+              <a:rPr lang="en-US" dirty="0">
+                <a:solidFill>
+                  <a:srgbClr val="FFFF00"/>
+                </a:solidFill>
+              </a:rPr>
+              <a:t> </a:t>
+            </a:r>
+            <a:r>
+              <a:rPr lang="en-US" dirty="0" err="1">
+                <a:solidFill>
+                  <a:srgbClr val="FFFF00"/>
+                </a:solidFill>
+              </a:rPr>
+              <a:t>olleh</a:t>
+            </a:r>
+            <a:endParaRPr lang="en-US" dirty="0">
+              <a:solidFill>
+                <a:srgbClr val="FFFF00"/>
+              </a:solidFill>
+            </a:endParaRPr>
+          </a:p>
+        </p:txBody>
+      </p:sp>
+    </p:spTree>
+    <p:extLst>
+      <p:ext uri="{BB962C8B-B14F-4D97-AF65-F5344CB8AC3E}">
+        <p14:creationId xmlns:p14="http://schemas.microsoft.com/office/powerpoint/2010/main" val="490781853"/>
+      </p:ext>
+    </p:extLst>
+  </p:cSld>
+  <p:clrMapOvr>
+    <a:masterClrMapping/>
+  </p:clrMapOvr>
+</p:sld>
+</file>
+
+<file path=ppt/slides/slide41.xml><?xml version="1.0" encoding="utf-8"?>
+<p:sld xmlns:a="http://schemas.openxmlformats.org/drawingml/2006/main" xmlns:r="http://schemas.openxmlformats.org/officeDocument/2006/relationships" xmlns:p="http://schemas.openxmlformats.org/presentationml/2006/main">
+  <p:cSld>
+    <p:spTree>
+      <p:nvGrpSpPr>
+        <p:cNvPr id="1" name=""/>
+        <p:cNvGrpSpPr/>
+        <p:nvPr/>
+      </p:nvGrpSpPr>
+      <p:grpSpPr>
+        <a:xfrm>
+          <a:off x="0" y="0"/>
+          <a:ext cx="0" cy="0"/>
+          <a:chOff x="0" y="0"/>
+          <a:chExt cx="0" cy="0"/>
+        </a:xfrm>
+      </p:grpSpPr>
+      <p:sp>
+        <p:nvSpPr>
+          <p:cNvPr id="3" name="TextBox 2">
+            <a:extLst>
+              <a:ext uri="{FF2B5EF4-FFF2-40B4-BE49-F238E27FC236}">
+                <a16:creationId xmlns:a16="http://schemas.microsoft.com/office/drawing/2014/main" id="{E42D67C2-3010-0B46-A3B3-EDDCD41D3FBD}"/>
+              </a:ext>
+            </a:extLst>
+          </p:cNvPr>
+          <p:cNvSpPr txBox="1"/>
+          <p:nvPr/>
+        </p:nvSpPr>
+        <p:spPr>
+          <a:xfrm>
+            <a:off x="590309" y="555583"/>
+            <a:ext cx="11514666" cy="1323439"/>
+          </a:xfrm>
+          <a:prstGeom prst="rect">
+            <a:avLst/>
+          </a:prstGeom>
+          <a:noFill/>
+        </p:spPr>
+        <p:txBody>
+          <a:bodyPr wrap="square" rtlCol="0">
+            <a:spAutoFit/>
+          </a:bodyPr>
+          <a:lstStyle/>
+          <a:p>
+            <a:r>
+              <a:rPr lang="en-US" sz="8000" dirty="0">
+                <a:solidFill>
+                  <a:srgbClr val="FF0000"/>
+                </a:solidFill>
+              </a:rPr>
+              <a:t>IN-CLASS EXERCISE 2</a:t>
+            </a:r>
+          </a:p>
+        </p:txBody>
+      </p:sp>
+      <p:sp>
+        <p:nvSpPr>
+          <p:cNvPr id="4" name="TextBox 3">
+            <a:extLst>
+              <a:ext uri="{FF2B5EF4-FFF2-40B4-BE49-F238E27FC236}">
+                <a16:creationId xmlns:a16="http://schemas.microsoft.com/office/drawing/2014/main" id="{E35D83AF-0E32-C145-85B6-27C9ECF9D14E}"/>
+              </a:ext>
+            </a:extLst>
+          </p:cNvPr>
+          <p:cNvSpPr txBox="1"/>
+          <p:nvPr/>
+        </p:nvSpPr>
+        <p:spPr>
+          <a:xfrm>
+            <a:off x="590309" y="1879022"/>
+            <a:ext cx="10678886" cy="2308324"/>
+          </a:xfrm>
+          <a:prstGeom prst="rect">
+            <a:avLst/>
+          </a:prstGeom>
+          <a:noFill/>
+        </p:spPr>
+        <p:txBody>
+          <a:bodyPr wrap="square" rtlCol="0">
+            <a:spAutoFit/>
+          </a:bodyPr>
+          <a:lstStyle/>
+          <a:p>
+            <a:r>
+              <a:rPr lang="en-US" sz="2400" dirty="0">
+                <a:sym typeface="Wingdings" pitchFamily="2" charset="2"/>
+              </a:rPr>
+              <a:t>Write a function that takes a string, then returns a new string consisting of the original string plus the original string backwards.</a:t>
+            </a:r>
+          </a:p>
+          <a:p>
+            <a:endParaRPr lang="en-US" sz="2400" dirty="0">
+              <a:sym typeface="Wingdings" pitchFamily="2" charset="2"/>
+            </a:endParaRPr>
+          </a:p>
+          <a:p>
+            <a:r>
+              <a:rPr lang="en-US" sz="2400" dirty="0">
+                <a:sym typeface="Wingdings" pitchFamily="2" charset="2"/>
+              </a:rPr>
+              <a:t>print(</a:t>
+            </a:r>
+            <a:r>
+              <a:rPr lang="en-US" sz="2400" dirty="0" err="1">
+                <a:sym typeface="Wingdings" pitchFamily="2" charset="2"/>
+              </a:rPr>
+              <a:t>makePalindrome</a:t>
+            </a:r>
+            <a:r>
+              <a:rPr lang="en-US" sz="2400" dirty="0">
+                <a:sym typeface="Wingdings" pitchFamily="2" charset="2"/>
+              </a:rPr>
+              <a:t>('hello'))    prints </a:t>
+            </a:r>
+            <a:r>
+              <a:rPr lang="en-US" sz="2400" dirty="0" err="1">
+                <a:sym typeface="Wingdings" pitchFamily="2" charset="2"/>
+              </a:rPr>
+              <a:t>helloolleh</a:t>
+            </a:r>
+            <a:endParaRPr lang="en-US" sz="2400" dirty="0">
+              <a:sym typeface="Wingdings" pitchFamily="2" charset="2"/>
+            </a:endParaRPr>
+          </a:p>
+          <a:p>
+            <a:r>
+              <a:rPr lang="en-US" sz="2400" dirty="0">
+                <a:sym typeface="Wingdings" pitchFamily="2" charset="2"/>
+              </a:rPr>
+              <a:t>print(</a:t>
+            </a:r>
+            <a:r>
+              <a:rPr lang="en-US" sz="2400" dirty="0" err="1">
+                <a:sym typeface="Wingdings" pitchFamily="2" charset="2"/>
+              </a:rPr>
+              <a:t>makePalindrome</a:t>
+            </a:r>
+            <a:r>
+              <a:rPr lang="en-US" sz="2400" dirty="0">
+                <a:sym typeface="Wingdings" pitchFamily="2" charset="2"/>
+              </a:rPr>
+              <a:t>('</a:t>
+            </a:r>
+            <a:r>
+              <a:rPr lang="en-US" sz="2400" dirty="0" err="1">
+                <a:sym typeface="Wingdings" pitchFamily="2" charset="2"/>
+              </a:rPr>
+              <a:t>dracula</a:t>
+            </a:r>
+            <a:r>
+              <a:rPr lang="en-US" sz="2400" dirty="0">
+                <a:sym typeface="Wingdings" pitchFamily="2" charset="2"/>
+              </a:rPr>
+              <a:t>'))  prints </a:t>
+            </a:r>
+            <a:r>
+              <a:rPr lang="en-US" sz="2400" dirty="0" err="1">
+                <a:sym typeface="Wingdings" pitchFamily="2" charset="2"/>
+              </a:rPr>
+              <a:t>draculaalucard</a:t>
+            </a:r>
+            <a:endParaRPr lang="en-US" sz="2400" dirty="0">
+              <a:sym typeface="Wingdings" pitchFamily="2" charset="2"/>
+            </a:endParaRPr>
+          </a:p>
+          <a:p>
+            <a:pPr marL="457200" indent="-457200">
+              <a:buFont typeface="Arial" panose="020B0604020202020204" pitchFamily="34" charset="0"/>
+              <a:buChar char="•"/>
+            </a:pPr>
+            <a:endParaRPr lang="en-US" sz="2400" dirty="0">
+              <a:sym typeface="Wingdings" pitchFamily="2" charset="2"/>
+            </a:endParaRPr>
+          </a:p>
+        </p:txBody>
+      </p:sp>
+      <p:sp>
+        <p:nvSpPr>
+          <p:cNvPr id="2" name="Rectangle 1">
+            <a:extLst>
+              <a:ext uri="{FF2B5EF4-FFF2-40B4-BE49-F238E27FC236}">
+                <a16:creationId xmlns:a16="http://schemas.microsoft.com/office/drawing/2014/main" id="{12C892C0-03AF-144D-8562-7A5F63CA15C0}"/>
+              </a:ext>
+            </a:extLst>
+          </p:cNvPr>
+          <p:cNvSpPr/>
+          <p:nvPr/>
+        </p:nvSpPr>
+        <p:spPr>
+          <a:xfrm>
+            <a:off x="5469229" y="3973631"/>
+            <a:ext cx="6096000" cy="1754326"/>
+          </a:xfrm>
+          <a:prstGeom prst="rect">
+            <a:avLst/>
+          </a:prstGeom>
+        </p:spPr>
+        <p:txBody>
+          <a:bodyPr>
+            <a:spAutoFit/>
+          </a:bodyPr>
+          <a:lstStyle/>
+          <a:p>
+            <a:r>
+              <a:rPr lang="en-US" dirty="0">
+                <a:sym typeface="Wingdings" pitchFamily="2" charset="2"/>
+              </a:rPr>
+              <a:t>FOR REFERENCE: </a:t>
+            </a:r>
+          </a:p>
+          <a:p>
+            <a:r>
+              <a:rPr lang="en-US" dirty="0" err="1">
+                <a:sym typeface="Wingdings" pitchFamily="2" charset="2"/>
+              </a:rPr>
+              <a:t>myString</a:t>
+            </a:r>
+            <a:r>
+              <a:rPr lang="en-US" dirty="0">
+                <a:sym typeface="Wingdings" pitchFamily="2" charset="2"/>
+              </a:rPr>
+              <a:t> = "hello world"</a:t>
+            </a:r>
+          </a:p>
+          <a:p>
+            <a:r>
+              <a:rPr lang="en-US" dirty="0">
+                <a:sym typeface="Wingdings" pitchFamily="2" charset="2"/>
+              </a:rPr>
+              <a:t>output = ''</a:t>
+            </a:r>
+          </a:p>
+          <a:p>
+            <a:r>
+              <a:rPr lang="en-US" dirty="0">
+                <a:sym typeface="Wingdings" pitchFamily="2" charset="2"/>
+              </a:rPr>
+              <a:t>for x in range(</a:t>
+            </a:r>
+            <a:r>
+              <a:rPr lang="en-US" dirty="0" err="1">
+                <a:sym typeface="Wingdings" pitchFamily="2" charset="2"/>
+              </a:rPr>
+              <a:t>len</a:t>
+            </a:r>
+            <a:r>
+              <a:rPr lang="en-US" dirty="0">
+                <a:sym typeface="Wingdings" pitchFamily="2" charset="2"/>
+              </a:rPr>
+              <a:t>(</a:t>
+            </a:r>
+            <a:r>
+              <a:rPr lang="en-US" dirty="0" err="1">
+                <a:sym typeface="Wingdings" pitchFamily="2" charset="2"/>
+              </a:rPr>
+              <a:t>myString</a:t>
+            </a:r>
+            <a:r>
+              <a:rPr lang="en-US" dirty="0">
+                <a:sym typeface="Wingdings" pitchFamily="2" charset="2"/>
+              </a:rPr>
+              <a:t>)-1, -1, -1):</a:t>
+            </a:r>
+          </a:p>
+          <a:p>
+            <a:r>
+              <a:rPr lang="en-US" dirty="0">
+                <a:sym typeface="Wingdings" pitchFamily="2" charset="2"/>
+              </a:rPr>
+              <a:t>	output = output + </a:t>
+            </a:r>
+            <a:r>
+              <a:rPr lang="en-US" dirty="0" err="1">
+                <a:sym typeface="Wingdings" pitchFamily="2" charset="2"/>
+              </a:rPr>
+              <a:t>myString</a:t>
+            </a:r>
+            <a:r>
+              <a:rPr lang="en-US" dirty="0">
+                <a:sym typeface="Wingdings" pitchFamily="2" charset="2"/>
+              </a:rPr>
+              <a:t>[x]</a:t>
+            </a:r>
+          </a:p>
+          <a:p>
+            <a:r>
+              <a:rPr lang="en-US" dirty="0">
+                <a:sym typeface="Wingdings" pitchFamily="2" charset="2"/>
+              </a:rPr>
+              <a:t>print(output)</a:t>
+            </a:r>
+          </a:p>
+        </p:txBody>
+      </p:sp>
+    </p:spTree>
+    <p:extLst>
+      <p:ext uri="{BB962C8B-B14F-4D97-AF65-F5344CB8AC3E}">
+        <p14:creationId xmlns:p14="http://schemas.microsoft.com/office/powerpoint/2010/main" val="1238425483"/>
       </p:ext>
     </p:extLst>
   </p:cSld>
